--- a/exports/pptx/lessons/middle-module-13-indic-ecology/day-09-neighbourhood-walk.pptx
+++ b/exports/pptx/lessons/middle-module-13-indic-ecology/day-09-neighbourhood-walk.pptx
@@ -16,9 +16,17 @@
     <p:sldId id="264" r:id="rId10"/>
     <p:sldId id="265" r:id="rId11"/>
     <p:sldId id="266" r:id="rId12"/>
+    <p:sldId id="267" r:id="rId13"/>
+    <p:sldId id="268" r:id="rId14"/>
+    <p:sldId id="269" r:id="rId15"/>
+    <p:sldId id="270" r:id="rId16"/>
+    <p:sldId id="271" r:id="rId17"/>
+    <p:sldId id="272" r:id="rId18"/>
+    <p:sldId id="273" r:id="rId19"/>
+    <p:sldId id="274" r:id="rId20"/>
   </p:sldIdLst>
   <p:notesMasterIdLst>
-    <p:notesMasterId r:id="rId13"/>
+    <p:notesMasterId r:id="rId21"/>
   </p:notesMasterIdLst>
   <p:sldSz cx="9144000" cy="5143500"/>
   <p:notesSz cx="5143500" cy="9144000"/>
@@ -712,6 +720,710 @@
             <a:fld id="{F7021451-1387-4CA6-816F-3879F97B5CBC}" type="slidenum">
               <a:rPr lang="en-US"/>
               <a:t>11</a:t>
+            </a:fld>
+            <a:endParaRPr lang="en-US"/>
+          </a:p>
+        </p:txBody>
+      </p:sp>
+    </p:spTree>
+    <p:extLst>
+      <p:ext uri="{BB962C8B-B14F-4D97-AF65-F5344CB8AC3E}">
+        <p14:creationId xmlns:p14="http://schemas.microsoft.com/office/powerpoint/2010/main" val="1024086991"/>
+      </p:ext>
+    </p:extLst>
+  </p:cSld>
+  <p:clrMapOvr>
+    <a:masterClrMapping/>
+  </p:clrMapOvr>
+</p:notes>
+</file>
+
+<file path=ppt/notesSlides/notesSlide12.xml><?xml version="1.0" encoding="utf-8"?>
+<p:notes xmlns:a="http://schemas.openxmlformats.org/drawingml/2006/main" xmlns:r="http://schemas.openxmlformats.org/officeDocument/2006/relationships" xmlns:p="http://schemas.openxmlformats.org/presentationml/2006/main">
+  <p:cSld>
+    <p:spTree>
+      <p:nvGrpSpPr>
+        <p:cNvPr id="1" name=""/>
+        <p:cNvGrpSpPr/>
+        <p:nvPr/>
+      </p:nvGrpSpPr>
+      <p:grpSpPr>
+        <a:xfrm>
+          <a:off x="0" y="0"/>
+          <a:ext cx="0" cy="0"/>
+          <a:chOff x="0" y="0"/>
+          <a:chExt cx="0" cy="0"/>
+        </a:xfrm>
+      </p:grpSpPr>
+      <p:sp>
+        <p:nvSpPr>
+          <p:cNvPr id="2" name="Slide Image Placeholder 1"/>
+          <p:cNvSpPr>
+            <a:spLocks noGrp="1" noRot="1" noChangeAspect="1"/>
+          </p:cNvSpPr>
+          <p:nvPr>
+            <p:ph type="sldImg"/>
+          </p:nvPr>
+        </p:nvSpPr>
+        <p:spPr/>
+      </p:sp>
+      <p:sp>
+        <p:nvSpPr>
+          <p:cNvPr id="3" name="Notes Placeholder 2"/>
+          <p:cNvSpPr>
+            <a:spLocks noGrp="1"/>
+          </p:cNvSpPr>
+          <p:nvPr>
+            <p:ph type="body" idx="1"/>
+          </p:nvPr>
+        </p:nvSpPr>
+        <p:spPr/>
+        <p:txBody>
+          <a:bodyPr/>
+          <a:lstStyle/>
+          <a:p>
+            <a:r>
+              <a:rPr lang="en-US" dirty="0"/>
+              <a:t/>
+            </a:r>
+            <a:endParaRPr lang="en-US" dirty="0"/>
+          </a:p>
+        </p:txBody>
+      </p:sp>
+      <p:sp>
+        <p:nvSpPr>
+          <p:cNvPr id="4" name="Slide Number Placeholder 3"/>
+          <p:cNvSpPr>
+            <a:spLocks noGrp="1"/>
+          </p:cNvSpPr>
+          <p:nvPr>
+            <p:ph type="sldNum" sz="quarter" idx="10"/>
+          </p:nvPr>
+        </p:nvSpPr>
+        <p:spPr/>
+        <p:txBody>
+          <a:bodyPr/>
+          <a:lstStyle/>
+          <a:p>
+            <a:fld id="{F7021451-1387-4CA6-816F-3879F97B5CBC}" type="slidenum">
+              <a:rPr lang="en-US"/>
+              <a:t>12</a:t>
+            </a:fld>
+            <a:endParaRPr lang="en-US"/>
+          </a:p>
+        </p:txBody>
+      </p:sp>
+    </p:spTree>
+    <p:extLst>
+      <p:ext uri="{BB962C8B-B14F-4D97-AF65-F5344CB8AC3E}">
+        <p14:creationId xmlns:p14="http://schemas.microsoft.com/office/powerpoint/2010/main" val="1024086991"/>
+      </p:ext>
+    </p:extLst>
+  </p:cSld>
+  <p:clrMapOvr>
+    <a:masterClrMapping/>
+  </p:clrMapOvr>
+</p:notes>
+</file>
+
+<file path=ppt/notesSlides/notesSlide13.xml><?xml version="1.0" encoding="utf-8"?>
+<p:notes xmlns:a="http://schemas.openxmlformats.org/drawingml/2006/main" xmlns:r="http://schemas.openxmlformats.org/officeDocument/2006/relationships" xmlns:p="http://schemas.openxmlformats.org/presentationml/2006/main">
+  <p:cSld>
+    <p:spTree>
+      <p:nvGrpSpPr>
+        <p:cNvPr id="1" name=""/>
+        <p:cNvGrpSpPr/>
+        <p:nvPr/>
+      </p:nvGrpSpPr>
+      <p:grpSpPr>
+        <a:xfrm>
+          <a:off x="0" y="0"/>
+          <a:ext cx="0" cy="0"/>
+          <a:chOff x="0" y="0"/>
+          <a:chExt cx="0" cy="0"/>
+        </a:xfrm>
+      </p:grpSpPr>
+      <p:sp>
+        <p:nvSpPr>
+          <p:cNvPr id="2" name="Slide Image Placeholder 1"/>
+          <p:cNvSpPr>
+            <a:spLocks noGrp="1" noRot="1" noChangeAspect="1"/>
+          </p:cNvSpPr>
+          <p:nvPr>
+            <p:ph type="sldImg"/>
+          </p:nvPr>
+        </p:nvSpPr>
+        <p:spPr/>
+      </p:sp>
+      <p:sp>
+        <p:nvSpPr>
+          <p:cNvPr id="3" name="Notes Placeholder 2"/>
+          <p:cNvSpPr>
+            <a:spLocks noGrp="1"/>
+          </p:cNvSpPr>
+          <p:nvPr>
+            <p:ph type="body" idx="1"/>
+          </p:nvPr>
+        </p:nvSpPr>
+        <p:spPr/>
+        <p:txBody>
+          <a:bodyPr/>
+          <a:lstStyle/>
+          <a:p>
+            <a:r>
+              <a:rPr lang="en-US" dirty="0"/>
+              <a:t/>
+            </a:r>
+            <a:endParaRPr lang="en-US" dirty="0"/>
+          </a:p>
+        </p:txBody>
+      </p:sp>
+      <p:sp>
+        <p:nvSpPr>
+          <p:cNvPr id="4" name="Slide Number Placeholder 3"/>
+          <p:cNvSpPr>
+            <a:spLocks noGrp="1"/>
+          </p:cNvSpPr>
+          <p:nvPr>
+            <p:ph type="sldNum" sz="quarter" idx="10"/>
+          </p:nvPr>
+        </p:nvSpPr>
+        <p:spPr/>
+        <p:txBody>
+          <a:bodyPr/>
+          <a:lstStyle/>
+          <a:p>
+            <a:fld id="{F7021451-1387-4CA6-816F-3879F97B5CBC}" type="slidenum">
+              <a:rPr lang="en-US"/>
+              <a:t>13</a:t>
+            </a:fld>
+            <a:endParaRPr lang="en-US"/>
+          </a:p>
+        </p:txBody>
+      </p:sp>
+    </p:spTree>
+    <p:extLst>
+      <p:ext uri="{BB962C8B-B14F-4D97-AF65-F5344CB8AC3E}">
+        <p14:creationId xmlns:p14="http://schemas.microsoft.com/office/powerpoint/2010/main" val="1024086991"/>
+      </p:ext>
+    </p:extLst>
+  </p:cSld>
+  <p:clrMapOvr>
+    <a:masterClrMapping/>
+  </p:clrMapOvr>
+</p:notes>
+</file>
+
+<file path=ppt/notesSlides/notesSlide14.xml><?xml version="1.0" encoding="utf-8"?>
+<p:notes xmlns:a="http://schemas.openxmlformats.org/drawingml/2006/main" xmlns:r="http://schemas.openxmlformats.org/officeDocument/2006/relationships" xmlns:p="http://schemas.openxmlformats.org/presentationml/2006/main">
+  <p:cSld>
+    <p:spTree>
+      <p:nvGrpSpPr>
+        <p:cNvPr id="1" name=""/>
+        <p:cNvGrpSpPr/>
+        <p:nvPr/>
+      </p:nvGrpSpPr>
+      <p:grpSpPr>
+        <a:xfrm>
+          <a:off x="0" y="0"/>
+          <a:ext cx="0" cy="0"/>
+          <a:chOff x="0" y="0"/>
+          <a:chExt cx="0" cy="0"/>
+        </a:xfrm>
+      </p:grpSpPr>
+      <p:sp>
+        <p:nvSpPr>
+          <p:cNvPr id="2" name="Slide Image Placeholder 1"/>
+          <p:cNvSpPr>
+            <a:spLocks noGrp="1" noRot="1" noChangeAspect="1"/>
+          </p:cNvSpPr>
+          <p:nvPr>
+            <p:ph type="sldImg"/>
+          </p:nvPr>
+        </p:nvSpPr>
+        <p:spPr/>
+      </p:sp>
+      <p:sp>
+        <p:nvSpPr>
+          <p:cNvPr id="3" name="Notes Placeholder 2"/>
+          <p:cNvSpPr>
+            <a:spLocks noGrp="1"/>
+          </p:cNvSpPr>
+          <p:nvPr>
+            <p:ph type="body" idx="1"/>
+          </p:nvPr>
+        </p:nvSpPr>
+        <p:spPr/>
+        <p:txBody>
+          <a:bodyPr/>
+          <a:lstStyle/>
+          <a:p>
+            <a:r>
+              <a:rPr lang="en-US" dirty="0"/>
+              <a:t/>
+            </a:r>
+            <a:endParaRPr lang="en-US" dirty="0"/>
+          </a:p>
+        </p:txBody>
+      </p:sp>
+      <p:sp>
+        <p:nvSpPr>
+          <p:cNvPr id="4" name="Slide Number Placeholder 3"/>
+          <p:cNvSpPr>
+            <a:spLocks noGrp="1"/>
+          </p:cNvSpPr>
+          <p:nvPr>
+            <p:ph type="sldNum" sz="quarter" idx="10"/>
+          </p:nvPr>
+        </p:nvSpPr>
+        <p:spPr/>
+        <p:txBody>
+          <a:bodyPr/>
+          <a:lstStyle/>
+          <a:p>
+            <a:fld id="{F7021451-1387-4CA6-816F-3879F97B5CBC}" type="slidenum">
+              <a:rPr lang="en-US"/>
+              <a:t>14</a:t>
+            </a:fld>
+            <a:endParaRPr lang="en-US"/>
+          </a:p>
+        </p:txBody>
+      </p:sp>
+    </p:spTree>
+    <p:extLst>
+      <p:ext uri="{BB962C8B-B14F-4D97-AF65-F5344CB8AC3E}">
+        <p14:creationId xmlns:p14="http://schemas.microsoft.com/office/powerpoint/2010/main" val="1024086991"/>
+      </p:ext>
+    </p:extLst>
+  </p:cSld>
+  <p:clrMapOvr>
+    <a:masterClrMapping/>
+  </p:clrMapOvr>
+</p:notes>
+</file>
+
+<file path=ppt/notesSlides/notesSlide15.xml><?xml version="1.0" encoding="utf-8"?>
+<p:notes xmlns:a="http://schemas.openxmlformats.org/drawingml/2006/main" xmlns:r="http://schemas.openxmlformats.org/officeDocument/2006/relationships" xmlns:p="http://schemas.openxmlformats.org/presentationml/2006/main">
+  <p:cSld>
+    <p:spTree>
+      <p:nvGrpSpPr>
+        <p:cNvPr id="1" name=""/>
+        <p:cNvGrpSpPr/>
+        <p:nvPr/>
+      </p:nvGrpSpPr>
+      <p:grpSpPr>
+        <a:xfrm>
+          <a:off x="0" y="0"/>
+          <a:ext cx="0" cy="0"/>
+          <a:chOff x="0" y="0"/>
+          <a:chExt cx="0" cy="0"/>
+        </a:xfrm>
+      </p:grpSpPr>
+      <p:sp>
+        <p:nvSpPr>
+          <p:cNvPr id="2" name="Slide Image Placeholder 1"/>
+          <p:cNvSpPr>
+            <a:spLocks noGrp="1" noRot="1" noChangeAspect="1"/>
+          </p:cNvSpPr>
+          <p:nvPr>
+            <p:ph type="sldImg"/>
+          </p:nvPr>
+        </p:nvSpPr>
+        <p:spPr/>
+      </p:sp>
+      <p:sp>
+        <p:nvSpPr>
+          <p:cNvPr id="3" name="Notes Placeholder 2"/>
+          <p:cNvSpPr>
+            <a:spLocks noGrp="1"/>
+          </p:cNvSpPr>
+          <p:nvPr>
+            <p:ph type="body" idx="1"/>
+          </p:nvPr>
+        </p:nvSpPr>
+        <p:spPr/>
+        <p:txBody>
+          <a:bodyPr/>
+          <a:lstStyle/>
+          <a:p>
+            <a:r>
+              <a:rPr lang="en-US" dirty="0"/>
+              <a:t/>
+            </a:r>
+            <a:endParaRPr lang="en-US" dirty="0"/>
+          </a:p>
+        </p:txBody>
+      </p:sp>
+      <p:sp>
+        <p:nvSpPr>
+          <p:cNvPr id="4" name="Slide Number Placeholder 3"/>
+          <p:cNvSpPr>
+            <a:spLocks noGrp="1"/>
+          </p:cNvSpPr>
+          <p:nvPr>
+            <p:ph type="sldNum" sz="quarter" idx="10"/>
+          </p:nvPr>
+        </p:nvSpPr>
+        <p:spPr/>
+        <p:txBody>
+          <a:bodyPr/>
+          <a:lstStyle/>
+          <a:p>
+            <a:fld id="{F7021451-1387-4CA6-816F-3879F97B5CBC}" type="slidenum">
+              <a:rPr lang="en-US"/>
+              <a:t>15</a:t>
+            </a:fld>
+            <a:endParaRPr lang="en-US"/>
+          </a:p>
+        </p:txBody>
+      </p:sp>
+    </p:spTree>
+    <p:extLst>
+      <p:ext uri="{BB962C8B-B14F-4D97-AF65-F5344CB8AC3E}">
+        <p14:creationId xmlns:p14="http://schemas.microsoft.com/office/powerpoint/2010/main" val="1024086991"/>
+      </p:ext>
+    </p:extLst>
+  </p:cSld>
+  <p:clrMapOvr>
+    <a:masterClrMapping/>
+  </p:clrMapOvr>
+</p:notes>
+</file>
+
+<file path=ppt/notesSlides/notesSlide16.xml><?xml version="1.0" encoding="utf-8"?>
+<p:notes xmlns:a="http://schemas.openxmlformats.org/drawingml/2006/main" xmlns:r="http://schemas.openxmlformats.org/officeDocument/2006/relationships" xmlns:p="http://schemas.openxmlformats.org/presentationml/2006/main">
+  <p:cSld>
+    <p:spTree>
+      <p:nvGrpSpPr>
+        <p:cNvPr id="1" name=""/>
+        <p:cNvGrpSpPr/>
+        <p:nvPr/>
+      </p:nvGrpSpPr>
+      <p:grpSpPr>
+        <a:xfrm>
+          <a:off x="0" y="0"/>
+          <a:ext cx="0" cy="0"/>
+          <a:chOff x="0" y="0"/>
+          <a:chExt cx="0" cy="0"/>
+        </a:xfrm>
+      </p:grpSpPr>
+      <p:sp>
+        <p:nvSpPr>
+          <p:cNvPr id="2" name="Slide Image Placeholder 1"/>
+          <p:cNvSpPr>
+            <a:spLocks noGrp="1" noRot="1" noChangeAspect="1"/>
+          </p:cNvSpPr>
+          <p:nvPr>
+            <p:ph type="sldImg"/>
+          </p:nvPr>
+        </p:nvSpPr>
+        <p:spPr/>
+      </p:sp>
+      <p:sp>
+        <p:nvSpPr>
+          <p:cNvPr id="3" name="Notes Placeholder 2"/>
+          <p:cNvSpPr>
+            <a:spLocks noGrp="1"/>
+          </p:cNvSpPr>
+          <p:nvPr>
+            <p:ph type="body" idx="1"/>
+          </p:nvPr>
+        </p:nvSpPr>
+        <p:spPr/>
+        <p:txBody>
+          <a:bodyPr/>
+          <a:lstStyle/>
+          <a:p>
+            <a:r>
+              <a:rPr lang="en-US" dirty="0"/>
+              <a:t/>
+            </a:r>
+            <a:endParaRPr lang="en-US" dirty="0"/>
+          </a:p>
+        </p:txBody>
+      </p:sp>
+      <p:sp>
+        <p:nvSpPr>
+          <p:cNvPr id="4" name="Slide Number Placeholder 3"/>
+          <p:cNvSpPr>
+            <a:spLocks noGrp="1"/>
+          </p:cNvSpPr>
+          <p:nvPr>
+            <p:ph type="sldNum" sz="quarter" idx="10"/>
+          </p:nvPr>
+        </p:nvSpPr>
+        <p:spPr/>
+        <p:txBody>
+          <a:bodyPr/>
+          <a:lstStyle/>
+          <a:p>
+            <a:fld id="{F7021451-1387-4CA6-816F-3879F97B5CBC}" type="slidenum">
+              <a:rPr lang="en-US"/>
+              <a:t>16</a:t>
+            </a:fld>
+            <a:endParaRPr lang="en-US"/>
+          </a:p>
+        </p:txBody>
+      </p:sp>
+    </p:spTree>
+    <p:extLst>
+      <p:ext uri="{BB962C8B-B14F-4D97-AF65-F5344CB8AC3E}">
+        <p14:creationId xmlns:p14="http://schemas.microsoft.com/office/powerpoint/2010/main" val="1024086991"/>
+      </p:ext>
+    </p:extLst>
+  </p:cSld>
+  <p:clrMapOvr>
+    <a:masterClrMapping/>
+  </p:clrMapOvr>
+</p:notes>
+</file>
+
+<file path=ppt/notesSlides/notesSlide17.xml><?xml version="1.0" encoding="utf-8"?>
+<p:notes xmlns:a="http://schemas.openxmlformats.org/drawingml/2006/main" xmlns:r="http://schemas.openxmlformats.org/officeDocument/2006/relationships" xmlns:p="http://schemas.openxmlformats.org/presentationml/2006/main">
+  <p:cSld>
+    <p:spTree>
+      <p:nvGrpSpPr>
+        <p:cNvPr id="1" name=""/>
+        <p:cNvGrpSpPr/>
+        <p:nvPr/>
+      </p:nvGrpSpPr>
+      <p:grpSpPr>
+        <a:xfrm>
+          <a:off x="0" y="0"/>
+          <a:ext cx="0" cy="0"/>
+          <a:chOff x="0" y="0"/>
+          <a:chExt cx="0" cy="0"/>
+        </a:xfrm>
+      </p:grpSpPr>
+      <p:sp>
+        <p:nvSpPr>
+          <p:cNvPr id="2" name="Slide Image Placeholder 1"/>
+          <p:cNvSpPr>
+            <a:spLocks noGrp="1" noRot="1" noChangeAspect="1"/>
+          </p:cNvSpPr>
+          <p:nvPr>
+            <p:ph type="sldImg"/>
+          </p:nvPr>
+        </p:nvSpPr>
+        <p:spPr/>
+      </p:sp>
+      <p:sp>
+        <p:nvSpPr>
+          <p:cNvPr id="3" name="Notes Placeholder 2"/>
+          <p:cNvSpPr>
+            <a:spLocks noGrp="1"/>
+          </p:cNvSpPr>
+          <p:nvPr>
+            <p:ph type="body" idx="1"/>
+          </p:nvPr>
+        </p:nvSpPr>
+        <p:spPr/>
+        <p:txBody>
+          <a:bodyPr/>
+          <a:lstStyle/>
+          <a:p>
+            <a:r>
+              <a:rPr lang="en-US" dirty="0"/>
+              <a:t/>
+            </a:r>
+            <a:endParaRPr lang="en-US" dirty="0"/>
+          </a:p>
+        </p:txBody>
+      </p:sp>
+      <p:sp>
+        <p:nvSpPr>
+          <p:cNvPr id="4" name="Slide Number Placeholder 3"/>
+          <p:cNvSpPr>
+            <a:spLocks noGrp="1"/>
+          </p:cNvSpPr>
+          <p:nvPr>
+            <p:ph type="sldNum" sz="quarter" idx="10"/>
+          </p:nvPr>
+        </p:nvSpPr>
+        <p:spPr/>
+        <p:txBody>
+          <a:bodyPr/>
+          <a:lstStyle/>
+          <a:p>
+            <a:fld id="{F7021451-1387-4CA6-816F-3879F97B5CBC}" type="slidenum">
+              <a:rPr lang="en-US"/>
+              <a:t>17</a:t>
+            </a:fld>
+            <a:endParaRPr lang="en-US"/>
+          </a:p>
+        </p:txBody>
+      </p:sp>
+    </p:spTree>
+    <p:extLst>
+      <p:ext uri="{BB962C8B-B14F-4D97-AF65-F5344CB8AC3E}">
+        <p14:creationId xmlns:p14="http://schemas.microsoft.com/office/powerpoint/2010/main" val="1024086991"/>
+      </p:ext>
+    </p:extLst>
+  </p:cSld>
+  <p:clrMapOvr>
+    <a:masterClrMapping/>
+  </p:clrMapOvr>
+</p:notes>
+</file>
+
+<file path=ppt/notesSlides/notesSlide18.xml><?xml version="1.0" encoding="utf-8"?>
+<p:notes xmlns:a="http://schemas.openxmlformats.org/drawingml/2006/main" xmlns:r="http://schemas.openxmlformats.org/officeDocument/2006/relationships" xmlns:p="http://schemas.openxmlformats.org/presentationml/2006/main">
+  <p:cSld>
+    <p:spTree>
+      <p:nvGrpSpPr>
+        <p:cNvPr id="1" name=""/>
+        <p:cNvGrpSpPr/>
+        <p:nvPr/>
+      </p:nvGrpSpPr>
+      <p:grpSpPr>
+        <a:xfrm>
+          <a:off x="0" y="0"/>
+          <a:ext cx="0" cy="0"/>
+          <a:chOff x="0" y="0"/>
+          <a:chExt cx="0" cy="0"/>
+        </a:xfrm>
+      </p:grpSpPr>
+      <p:sp>
+        <p:nvSpPr>
+          <p:cNvPr id="2" name="Slide Image Placeholder 1"/>
+          <p:cNvSpPr>
+            <a:spLocks noGrp="1" noRot="1" noChangeAspect="1"/>
+          </p:cNvSpPr>
+          <p:nvPr>
+            <p:ph type="sldImg"/>
+          </p:nvPr>
+        </p:nvSpPr>
+        <p:spPr/>
+      </p:sp>
+      <p:sp>
+        <p:nvSpPr>
+          <p:cNvPr id="3" name="Notes Placeholder 2"/>
+          <p:cNvSpPr>
+            <a:spLocks noGrp="1"/>
+          </p:cNvSpPr>
+          <p:nvPr>
+            <p:ph type="body" idx="1"/>
+          </p:nvPr>
+        </p:nvSpPr>
+        <p:spPr/>
+        <p:txBody>
+          <a:bodyPr/>
+          <a:lstStyle/>
+          <a:p>
+            <a:r>
+              <a:rPr lang="en-US" dirty="0"/>
+              <a:t/>
+            </a:r>
+            <a:endParaRPr lang="en-US" dirty="0"/>
+          </a:p>
+        </p:txBody>
+      </p:sp>
+      <p:sp>
+        <p:nvSpPr>
+          <p:cNvPr id="4" name="Slide Number Placeholder 3"/>
+          <p:cNvSpPr>
+            <a:spLocks noGrp="1"/>
+          </p:cNvSpPr>
+          <p:nvPr>
+            <p:ph type="sldNum" sz="quarter" idx="10"/>
+          </p:nvPr>
+        </p:nvSpPr>
+        <p:spPr/>
+        <p:txBody>
+          <a:bodyPr/>
+          <a:lstStyle/>
+          <a:p>
+            <a:fld id="{F7021451-1387-4CA6-816F-3879F97B5CBC}" type="slidenum">
+              <a:rPr lang="en-US"/>
+              <a:t>18</a:t>
+            </a:fld>
+            <a:endParaRPr lang="en-US"/>
+          </a:p>
+        </p:txBody>
+      </p:sp>
+    </p:spTree>
+    <p:extLst>
+      <p:ext uri="{BB962C8B-B14F-4D97-AF65-F5344CB8AC3E}">
+        <p14:creationId xmlns:p14="http://schemas.microsoft.com/office/powerpoint/2010/main" val="1024086991"/>
+      </p:ext>
+    </p:extLst>
+  </p:cSld>
+  <p:clrMapOvr>
+    <a:masterClrMapping/>
+  </p:clrMapOvr>
+</p:notes>
+</file>
+
+<file path=ppt/notesSlides/notesSlide19.xml><?xml version="1.0" encoding="utf-8"?>
+<p:notes xmlns:a="http://schemas.openxmlformats.org/drawingml/2006/main" xmlns:r="http://schemas.openxmlformats.org/officeDocument/2006/relationships" xmlns:p="http://schemas.openxmlformats.org/presentationml/2006/main">
+  <p:cSld>
+    <p:spTree>
+      <p:nvGrpSpPr>
+        <p:cNvPr id="1" name=""/>
+        <p:cNvGrpSpPr/>
+        <p:nvPr/>
+      </p:nvGrpSpPr>
+      <p:grpSpPr>
+        <a:xfrm>
+          <a:off x="0" y="0"/>
+          <a:ext cx="0" cy="0"/>
+          <a:chOff x="0" y="0"/>
+          <a:chExt cx="0" cy="0"/>
+        </a:xfrm>
+      </p:grpSpPr>
+      <p:sp>
+        <p:nvSpPr>
+          <p:cNvPr id="2" name="Slide Image Placeholder 1"/>
+          <p:cNvSpPr>
+            <a:spLocks noGrp="1" noRot="1" noChangeAspect="1"/>
+          </p:cNvSpPr>
+          <p:nvPr>
+            <p:ph type="sldImg"/>
+          </p:nvPr>
+        </p:nvSpPr>
+        <p:spPr/>
+      </p:sp>
+      <p:sp>
+        <p:nvSpPr>
+          <p:cNvPr id="3" name="Notes Placeholder 2"/>
+          <p:cNvSpPr>
+            <a:spLocks noGrp="1"/>
+          </p:cNvSpPr>
+          <p:nvPr>
+            <p:ph type="body" idx="1"/>
+          </p:nvPr>
+        </p:nvSpPr>
+        <p:spPr/>
+        <p:txBody>
+          <a:bodyPr/>
+          <a:lstStyle/>
+          <a:p>
+            <a:r>
+              <a:rPr lang="en-US" dirty="0"/>
+              <a:t/>
+            </a:r>
+            <a:endParaRPr lang="en-US" dirty="0"/>
+          </a:p>
+        </p:txBody>
+      </p:sp>
+      <p:sp>
+        <p:nvSpPr>
+          <p:cNvPr id="4" name="Slide Number Placeholder 3"/>
+          <p:cNvSpPr>
+            <a:spLocks noGrp="1"/>
+          </p:cNvSpPr>
+          <p:nvPr>
+            <p:ph type="sldNum" sz="quarter" idx="10"/>
+          </p:nvPr>
+        </p:nvSpPr>
+        <p:spPr/>
+        <p:txBody>
+          <a:bodyPr/>
+          <a:lstStyle/>
+          <a:p>
+            <a:fld id="{F7021451-1387-4CA6-816F-3879F97B5CBC}" type="slidenum">
+              <a:rPr lang="en-US"/>
+              <a:t>19</a:t>
             </a:fld>
             <a:endParaRPr lang="en-US"/>
           </a:p>
@@ -2011,102 +2723,6 @@
         </p:nvSpPr>
         <p:spPr>
           <a:xfrm>
-            <a:off x="406301" y="1574453"/>
-            <a:ext cx="8498026" cy="274290"/>
-          </a:xfrm>
-          <a:prstGeom prst="rect">
-            <a:avLst/>
-          </a:prstGeom>
-          <a:noFill/>
-          <a:ln/>
-        </p:spPr>
-        <p:txBody>
-          <a:bodyPr wrap="square" lIns="0" tIns="0" rIns="0" bIns="0" rtlCol="0" anchor="t"/>
-          <a:lstStyle/>
-          <a:p>
-            <a:pPr algn="l" indent="0" marL="0">
-              <a:lnSpc>
-                <a:spcPts val="2160"/>
-              </a:lnSpc>
-              <a:spcBef>
-                <a:spcPts val="600"/>
-              </a:spcBef>
-              <a:spcAft>
-                <a:spcPts val="800"/>
-              </a:spcAft>
-              <a:buNone/>
-            </a:pPr>
-            <a:r>
-              <a:rPr lang="en-US" sz="1800" b="1" dirty="0">
-                <a:solidFill>
-                  <a:srgbClr val="FE4447"/>
-                </a:solidFill>
-                <a:latin typeface="Georgia" pitchFamily="34" charset="0"/>
-                <a:ea typeface="Georgia" pitchFamily="34" charset="-122"/>
-                <a:cs typeface="Georgia" pitchFamily="34" charset="-120"/>
-              </a:rPr>
-              <a:t>Learning objective</a:t>
-            </a:r>
-            <a:endParaRPr lang="en-US" sz="1800" dirty="0"/>
-          </a:p>
-        </p:txBody>
-      </p:sp>
-      <p:sp>
-        <p:nvSpPr>
-          <p:cNvPr id="6" name="Text 4"/>
-          <p:cNvSpPr/>
-          <p:nvPr/>
-        </p:nvSpPr>
-        <p:spPr>
-          <a:xfrm>
-            <a:off x="406301" y="1988344"/>
-            <a:ext cx="8498026" cy="426541"/>
-          </a:xfrm>
-          <a:prstGeom prst="rect">
-            <a:avLst/>
-          </a:prstGeom>
-          <a:noFill/>
-          <a:ln/>
-        </p:spPr>
-        <p:txBody>
-          <a:bodyPr wrap="square" lIns="0" tIns="0" rIns="0" bIns="0" rtlCol="0" anchor="t"/>
-          <a:lstStyle/>
-          <a:p>
-            <a:pPr algn="l" indent="0" marL="0">
-              <a:lnSpc>
-                <a:spcPts val="1680"/>
-              </a:lnSpc>
-              <a:spcBef>
-                <a:spcPts val="300"/>
-              </a:spcBef>
-              <a:spcAft>
-                <a:spcPts val="300"/>
-              </a:spcAft>
-              <a:buNone/>
-            </a:pPr>
-            <a:r>
-              <a:rPr lang="en-US" sz="1200" dirty="0">
-                <a:solidFill>
-                  <a:srgbClr val="1C2833"/>
-                </a:solidFill>
-                <a:latin typeface="Arial" pitchFamily="34" charset="0"/>
-                <a:ea typeface="Arial" pitchFamily="34" charset="-122"/>
-                <a:cs typeface="Arial" pitchFamily="34" charset="-120"/>
-              </a:rPr>
-              <a:t>Students conduct a 15-minute observation walk on or near the school campus, record one specific ecological observation, and draft a single concrete action they will lead — anchored on one Indic principle.</a:t>
-            </a:r>
-            <a:endParaRPr lang="en-US" sz="1200" dirty="0"/>
-          </a:p>
-        </p:txBody>
-      </p:sp>
-      <p:sp>
-        <p:nvSpPr>
-          <p:cNvPr id="7" name="Text 5"/>
-          <p:cNvSpPr/>
-          <p:nvPr/>
-        </p:nvSpPr>
-        <p:spPr>
-          <a:xfrm>
             <a:off x="406301" y="4434929"/>
             <a:ext cx="8498026" cy="213271"/>
           </a:xfrm>
@@ -2251,7 +2867,7 @@
                 <a:ea typeface="Georgia" pitchFamily="34" charset="-122"/>
                 <a:cs typeface="Georgia" pitchFamily="34" charset="-120"/>
               </a:rPr>
-              <a:t>Teacher notes</a:t>
+              <a:t>Post-walk action drafting (15 min — in class)</a:t>
             </a:r>
             <a:endParaRPr lang="en-US" sz="1800" dirty="0"/>
           </a:p>
@@ -2265,8 +2881,8 @@
         </p:nvSpPr>
         <p:spPr>
           <a:xfrm>
-            <a:off x="406301" y="870942"/>
-            <a:ext cx="8498026" cy="1279624"/>
+            <a:off x="634901" y="883593"/>
+            <a:ext cx="8102798" cy="281880"/>
           </a:xfrm>
           <a:prstGeom prst="rect">
             <a:avLst/>
@@ -2278,13 +2894,31 @@
           <a:bodyPr wrap="square" lIns="0" tIns="0" rIns="0" bIns="0" rtlCol="0" anchor="t"/>
           <a:lstStyle/>
           <a:p>
-            <a:pPr algn="l" indent="0" marL="0">
-              <a:lnSpc>
-                <a:spcPts val="1680"/>
-              </a:lnSpc>
-              <a:spcBef>
-                <a:spcPts val="300"/>
-              </a:spcBef>
+            <a:pPr algn="l" marL="342900" indent="-342900">
+              <a:lnSpc>
+                <a:spcPts val="1620"/>
+              </a:lnSpc>
+              <a:spcAft>
+                <a:spcPts val="300"/>
+              </a:spcAft>
+              <a:buSzPct val="100000"/>
+              <a:buChar char="•"/>
+            </a:pPr>
+            <a:r>
+              <a:rPr lang="en-US" sz="1200" b="1" dirty="0">
+                <a:solidFill>
+                  <a:srgbClr val="1C2833"/>
+                </a:solidFill>
+                <a:latin typeface="Arial" pitchFamily="34" charset="0"/>
+                <a:ea typeface="Arial" pitchFamily="34" charset="-122"/>
+                <a:cs typeface="Arial" pitchFamily="34" charset="-120"/>
+              </a:rPr>
+              <a:t>Each pair writes — on the sheet — their action plan.</a:t>
+            </a:r>
+            <a:pPr algn="l" indent="0" marL="0">
+              <a:lnSpc>
+                <a:spcPts val="1620"/>
+              </a:lnSpc>
               <a:spcAft>
                 <a:spcPts val="300"/>
               </a:spcAft>
@@ -2299,7 +2933,7 @@
                 <a:ea typeface="Arial" pitchFamily="34" charset="-122"/>
                 <a:cs typeface="Arial" pitchFamily="34" charset="-120"/>
               </a:rPr>
-              <a:t>– Some pairs will plan an action they can't actually do. Push back kindly during the post-walk drafting. "Who specifically will you talk to? When?" – Some pairs will plan an action that is too large to do in 14 days. Cut it. "What's the smallest version of this you can do this week?" The 14-day frame is non-negotiable; the rubric on Day 10 reflects this. – The "engine off" sign is the most common student action. Encourage variation — water saving, food waste, biodiversity (a pollinator-friendly corner), noise reduction. Module 13 is about the full five elements, not just air. – If the school is in a context where an outdoor walk isn't feasible (rain, unsafe neighbourhood), do a "windows and corridors" walk inside the building. Same rules.</a:t>
+              <a:t> Three lines:</a:t>
             </a:r>
             <a:endParaRPr lang="en-US" sz="1200" dirty="0"/>
           </a:p>
@@ -2308,6 +2942,160 @@
       <p:sp>
         <p:nvSpPr>
           <p:cNvPr id="5" name="Text 3"/>
+          <p:cNvSpPr/>
+          <p:nvPr/>
+        </p:nvSpPr>
+        <p:spPr>
+          <a:xfrm>
+            <a:off x="634901" y="1266974"/>
+            <a:ext cx="8102798" cy="769441"/>
+          </a:xfrm>
+          <a:prstGeom prst="rect">
+            <a:avLst/>
+          </a:prstGeom>
+          <a:noFill/>
+          <a:ln/>
+        </p:spPr>
+        <p:txBody>
+          <a:bodyPr wrap="square" lIns="0" tIns="0" rIns="0" bIns="0" rtlCol="0" anchor="t"/>
+          <a:lstStyle/>
+          <a:p>
+            <a:pPr algn="l" marL="342900" indent="-342900">
+              <a:lnSpc>
+                <a:spcPts val="1620"/>
+              </a:lnSpc>
+              <a:spcAft>
+                <a:spcPts val="300"/>
+              </a:spcAft>
+              <a:buSzPct val="100000"/>
+              <a:buChar char="•"/>
+            </a:pPr>
+            <a:r>
+              <a:rPr lang="en-US" sz="1200" b="1" dirty="0">
+                <a:solidFill>
+                  <a:srgbClr val="1C2833"/>
+                </a:solidFill>
+                <a:latin typeface="Arial" pitchFamily="34" charset="0"/>
+                <a:ea typeface="Arial" pitchFamily="34" charset="-122"/>
+                <a:cs typeface="Arial" pitchFamily="34" charset="-120"/>
+              </a:rPr>
+              <a:t>What we observed</a:t>
+            </a:r>
+            <a:pPr algn="l" indent="0" marL="0">
+              <a:lnSpc>
+                <a:spcPts val="1620"/>
+              </a:lnSpc>
+              <a:spcAft>
+                <a:spcPts val="300"/>
+              </a:spcAft>
+              <a:buNone/>
+            </a:pPr>
+            <a:r>
+              <a:rPr lang="en-US" sz="1200" dirty="0">
+                <a:solidFill>
+                  <a:srgbClr val="1C2833"/>
+                </a:solidFill>
+                <a:latin typeface="Arial" pitchFamily="34" charset="0"/>
+                <a:ea typeface="Arial" pitchFamily="34" charset="-122"/>
+                <a:cs typeface="Arial" pitchFamily="34" charset="-120"/>
+              </a:rPr>
+              <a:t> (specific, with time and place).</a:t>
+            </a:r>
+            <a:endParaRPr lang="en-US" sz="1200" dirty="0"/>
+          </a:p>
+          <a:p>
+            <a:pPr algn="l" marL="342900" indent="-342900">
+              <a:lnSpc>
+                <a:spcPts val="1620"/>
+              </a:lnSpc>
+              <a:spcAft>
+                <a:spcPts val="300"/>
+              </a:spcAft>
+              <a:buSzPct val="100000"/>
+              <a:buChar char="•"/>
+            </a:pPr>
+            <a:r>
+              <a:rPr lang="en-US" sz="1200" b="1" dirty="0">
+                <a:solidFill>
+                  <a:srgbClr val="1C2833"/>
+                </a:solidFill>
+                <a:latin typeface="Arial" pitchFamily="34" charset="0"/>
+                <a:ea typeface="Arial" pitchFamily="34" charset="-122"/>
+                <a:cs typeface="Arial" pitchFamily="34" charset="-120"/>
+              </a:rPr>
+              <a:t>Which Indic principle this connects to</a:t>
+            </a:r>
+            <a:pPr algn="l" indent="0" marL="0">
+              <a:lnSpc>
+                <a:spcPts val="1620"/>
+              </a:lnSpc>
+              <a:spcAft>
+                <a:spcPts val="300"/>
+              </a:spcAft>
+              <a:buNone/>
+            </a:pPr>
+            <a:r>
+              <a:rPr lang="en-US" sz="1200" dirty="0">
+                <a:solidFill>
+                  <a:srgbClr val="1C2833"/>
+                </a:solidFill>
+                <a:latin typeface="Arial" pitchFamily="34" charset="0"/>
+                <a:ea typeface="Arial" pitchFamily="34" charset="-122"/>
+                <a:cs typeface="Arial" pitchFamily="34" charset="-120"/>
+              </a:rPr>
+              <a:t> (one of the four).</a:t>
+            </a:r>
+            <a:endParaRPr lang="en-US" sz="1200" dirty="0"/>
+          </a:p>
+          <a:p>
+            <a:pPr algn="l" marL="342900" indent="-342900">
+              <a:lnSpc>
+                <a:spcPts val="1620"/>
+              </a:lnSpc>
+              <a:spcAft>
+                <a:spcPts val="300"/>
+              </a:spcAft>
+              <a:buSzPct val="100000"/>
+              <a:buChar char="•"/>
+            </a:pPr>
+            <a:r>
+              <a:rPr lang="en-US" sz="1200" b="1" dirty="0">
+                <a:solidFill>
+                  <a:srgbClr val="1C2833"/>
+                </a:solidFill>
+                <a:latin typeface="Arial" pitchFamily="34" charset="0"/>
+                <a:ea typeface="Arial" pitchFamily="34" charset="-122"/>
+                <a:cs typeface="Arial" pitchFamily="34" charset="-120"/>
+              </a:rPr>
+              <a:t>What action we will lead</a:t>
+            </a:r>
+            <a:pPr algn="l" indent="0" marL="0">
+              <a:lnSpc>
+                <a:spcPts val="1620"/>
+              </a:lnSpc>
+              <a:spcAft>
+                <a:spcPts val="300"/>
+              </a:spcAft>
+              <a:buNone/>
+            </a:pPr>
+            <a:r>
+              <a:rPr lang="en-US" sz="1200" dirty="0">
+                <a:solidFill>
+                  <a:srgbClr val="1C2833"/>
+                </a:solidFill>
+                <a:latin typeface="Arial" pitchFamily="34" charset="0"/>
+                <a:ea typeface="Arial" pitchFamily="34" charset="-122"/>
+                <a:cs typeface="Arial" pitchFamily="34" charset="-120"/>
+              </a:rPr>
+              <a:t> (specific, doable in the next 14 days).</a:t>
+            </a:r>
+            <a:endParaRPr lang="en-US" sz="1200" dirty="0"/>
+          </a:p>
+        </p:txBody>
+      </p:sp>
+      <p:sp>
+        <p:nvSpPr>
+          <p:cNvPr id="6" name="Text 4"/>
           <p:cNvSpPr/>
           <p:nvPr/>
         </p:nvSpPr>
@@ -2457,6 +3245,3249 @@
                 <a:ea typeface="Georgia" pitchFamily="34" charset="-122"/>
                 <a:cs typeface="Georgia" pitchFamily="34" charset="-120"/>
               </a:rPr>
+              <a:t>Post-walk action drafting (15 min — in class) (cont.)</a:t>
+            </a:r>
+            <a:endParaRPr lang="en-US" sz="1800" dirty="0"/>
+          </a:p>
+        </p:txBody>
+      </p:sp>
+      <p:sp>
+        <p:nvSpPr>
+          <p:cNvPr id="4" name="Text 2"/>
+          <p:cNvSpPr/>
+          <p:nvPr/>
+        </p:nvSpPr>
+        <p:spPr>
+          <a:xfrm>
+            <a:off x="634901" y="883593"/>
+            <a:ext cx="8102798" cy="281880"/>
+          </a:xfrm>
+          <a:prstGeom prst="rect">
+            <a:avLst/>
+          </a:prstGeom>
+          <a:noFill/>
+          <a:ln/>
+        </p:spPr>
+        <p:txBody>
+          <a:bodyPr wrap="square" lIns="0" tIns="0" rIns="0" bIns="0" rtlCol="0" anchor="t"/>
+          <a:lstStyle/>
+          <a:p>
+            <a:pPr algn="l" marL="342900" indent="-342900">
+              <a:lnSpc>
+                <a:spcPts val="1620"/>
+              </a:lnSpc>
+              <a:spcAft>
+                <a:spcPts val="300"/>
+              </a:spcAft>
+              <a:buSzPct val="100000"/>
+              <a:buChar char="•"/>
+            </a:pPr>
+            <a:r>
+              <a:rPr lang="en-US" sz="1200" b="1" dirty="0">
+                <a:solidFill>
+                  <a:srgbClr val="1C2833"/>
+                </a:solidFill>
+                <a:latin typeface="Arial" pitchFamily="34" charset="0"/>
+                <a:ea typeface="Arial" pitchFamily="34" charset="-122"/>
+                <a:cs typeface="Arial" pitchFamily="34" charset="-120"/>
+              </a:rPr>
+              <a:t>Action criteria.</a:t>
+            </a:r>
+            <a:pPr algn="l" indent="0" marL="0">
+              <a:lnSpc>
+                <a:spcPts val="1620"/>
+              </a:lnSpc>
+              <a:spcAft>
+                <a:spcPts val="300"/>
+              </a:spcAft>
+              <a:buNone/>
+            </a:pPr>
+            <a:r>
+              <a:rPr lang="en-US" sz="1200" dirty="0">
+                <a:solidFill>
+                  <a:srgbClr val="1C2833"/>
+                </a:solidFill>
+                <a:latin typeface="Arial" pitchFamily="34" charset="0"/>
+                <a:ea typeface="Arial" pitchFamily="34" charset="-122"/>
+                <a:cs typeface="Arial" pitchFamily="34" charset="-120"/>
+              </a:rPr>
+              <a:t> An action is acceptable if:</a:t>
+            </a:r>
+            <a:endParaRPr lang="en-US" sz="1200" dirty="0"/>
+          </a:p>
+        </p:txBody>
+      </p:sp>
+      <p:sp>
+        <p:nvSpPr>
+          <p:cNvPr id="5" name="Text 3"/>
+          <p:cNvSpPr/>
+          <p:nvPr/>
+        </p:nvSpPr>
+        <p:spPr>
+          <a:xfrm>
+            <a:off x="634901" y="1266974"/>
+            <a:ext cx="8102798" cy="769441"/>
+          </a:xfrm>
+          <a:prstGeom prst="rect">
+            <a:avLst/>
+          </a:prstGeom>
+          <a:noFill/>
+          <a:ln/>
+        </p:spPr>
+        <p:txBody>
+          <a:bodyPr wrap="square" lIns="0" tIns="0" rIns="0" bIns="0" rtlCol="0" anchor="t"/>
+          <a:lstStyle/>
+          <a:p>
+            <a:pPr algn="l" marL="342900" indent="-342900">
+              <a:lnSpc>
+                <a:spcPts val="1620"/>
+              </a:lnSpc>
+              <a:spcAft>
+                <a:spcPts val="300"/>
+              </a:spcAft>
+              <a:buSzPct val="100000"/>
+              <a:buChar char="•"/>
+            </a:pPr>
+            <a:r>
+              <a:rPr lang="en-US" sz="1200" dirty="0">
+                <a:solidFill>
+                  <a:srgbClr val="1C2833"/>
+                </a:solidFill>
+                <a:latin typeface="Arial" pitchFamily="34" charset="0"/>
+                <a:ea typeface="Arial" pitchFamily="34" charset="-122"/>
+                <a:cs typeface="Arial" pitchFamily="34" charset="-120"/>
+              </a:rPr>
+              <a:t>It is specific (names a thing to do, a person to talk to, a place to fix).</a:t>
+            </a:r>
+            <a:endParaRPr lang="en-US" sz="1200" dirty="0"/>
+          </a:p>
+          <a:p>
+            <a:pPr algn="l" marL="342900" indent="-342900">
+              <a:lnSpc>
+                <a:spcPts val="1620"/>
+              </a:lnSpc>
+              <a:spcAft>
+                <a:spcPts val="300"/>
+              </a:spcAft>
+              <a:buSzPct val="100000"/>
+              <a:buChar char="•"/>
+            </a:pPr>
+            <a:r>
+              <a:rPr lang="en-US" sz="1200" dirty="0">
+                <a:solidFill>
+                  <a:srgbClr val="1C2833"/>
+                </a:solidFill>
+                <a:latin typeface="Arial" pitchFamily="34" charset="0"/>
+                <a:ea typeface="Arial" pitchFamily="34" charset="-122"/>
+                <a:cs typeface="Arial" pitchFamily="34" charset="-120"/>
+              </a:rPr>
+              <a:t>It can be done within 14 days.</a:t>
+            </a:r>
+            <a:endParaRPr lang="en-US" sz="1200" dirty="0"/>
+          </a:p>
+          <a:p>
+            <a:pPr algn="l" marL="342900" indent="-342900">
+              <a:lnSpc>
+                <a:spcPts val="1620"/>
+              </a:lnSpc>
+              <a:spcAft>
+                <a:spcPts val="300"/>
+              </a:spcAft>
+              <a:buSzPct val="100000"/>
+              <a:buChar char="•"/>
+            </a:pPr>
+            <a:r>
+              <a:rPr lang="en-US" sz="1200" dirty="0">
+                <a:solidFill>
+                  <a:srgbClr val="1C2833"/>
+                </a:solidFill>
+                <a:latin typeface="Arial" pitchFamily="34" charset="0"/>
+                <a:ea typeface="Arial" pitchFamily="34" charset="-122"/>
+                <a:cs typeface="Arial" pitchFamily="34" charset="-120"/>
+              </a:rPr>
+              <a:t>The pair can actually do it themselves (no "the government should...").</a:t>
+            </a:r>
+            <a:endParaRPr lang="en-US" sz="1200" dirty="0"/>
+          </a:p>
+        </p:txBody>
+      </p:sp>
+      <p:sp>
+        <p:nvSpPr>
+          <p:cNvPr id="6" name="Text 4"/>
+          <p:cNvSpPr/>
+          <p:nvPr/>
+        </p:nvSpPr>
+        <p:spPr>
+          <a:xfrm>
+            <a:off x="634901" y="2137916"/>
+            <a:ext cx="8102798" cy="281880"/>
+          </a:xfrm>
+          <a:prstGeom prst="rect">
+            <a:avLst/>
+          </a:prstGeom>
+          <a:noFill/>
+          <a:ln/>
+        </p:spPr>
+        <p:txBody>
+          <a:bodyPr wrap="square" lIns="0" tIns="0" rIns="0" bIns="0" rtlCol="0" anchor="t"/>
+          <a:lstStyle/>
+          <a:p>
+            <a:pPr algn="l" marL="342900" indent="-342900">
+              <a:lnSpc>
+                <a:spcPts val="1620"/>
+              </a:lnSpc>
+              <a:spcAft>
+                <a:spcPts val="300"/>
+              </a:spcAft>
+              <a:buSzPct val="100000"/>
+              <a:buChar char="•"/>
+            </a:pPr>
+            <a:r>
+              <a:rPr lang="en-US" sz="1200" b="1" dirty="0">
+                <a:solidFill>
+                  <a:srgbClr val="1C2833"/>
+                </a:solidFill>
+                <a:latin typeface="Arial" pitchFamily="34" charset="0"/>
+                <a:ea typeface="Arial" pitchFamily="34" charset="-122"/>
+                <a:cs typeface="Arial" pitchFamily="34" charset="-120"/>
+              </a:rPr>
+              <a:t>Examples of acceptable actions:</a:t>
+            </a:r>
+            <a:endParaRPr lang="en-US" sz="1200" dirty="0"/>
+          </a:p>
+        </p:txBody>
+      </p:sp>
+      <p:sp>
+        <p:nvSpPr>
+          <p:cNvPr id="7" name="Text 5"/>
+          <p:cNvSpPr/>
+          <p:nvPr/>
+        </p:nvSpPr>
+        <p:spPr>
+          <a:xfrm>
+            <a:off x="406301" y="2508647"/>
+            <a:ext cx="8498026" cy="213271"/>
+          </a:xfrm>
+          <a:prstGeom prst="rect">
+            <a:avLst/>
+          </a:prstGeom>
+          <a:noFill/>
+          <a:ln/>
+        </p:spPr>
+        <p:txBody>
+          <a:bodyPr wrap="square" lIns="0" tIns="0" rIns="0" bIns="0" rtlCol="0" anchor="t"/>
+          <a:lstStyle/>
+          <a:p>
+            <a:pPr algn="l" indent="0" marL="0">
+              <a:lnSpc>
+                <a:spcPts val="1680"/>
+              </a:lnSpc>
+              <a:spcBef>
+                <a:spcPts val="300"/>
+              </a:spcBef>
+              <a:spcAft>
+                <a:spcPts val="300"/>
+              </a:spcAft>
+              <a:buNone/>
+            </a:pPr>
+            <a:r>
+              <a:rPr lang="en-US" sz="1200" i="1" dirty="0">
+                <a:solidFill>
+                  <a:srgbClr val="1C2833"/>
+                </a:solidFill>
+                <a:latin typeface="Arial" pitchFamily="34" charset="0"/>
+                <a:ea typeface="Arial" pitchFamily="34" charset="-122"/>
+                <a:cs typeface="Arial" pitchFamily="34" charset="-120"/>
+              </a:rPr>
+              <a:t>Each row: Observation · Principle · Action.</a:t>
+            </a:r>
+            <a:endParaRPr lang="en-US" sz="1200" dirty="0"/>
+          </a:p>
+        </p:txBody>
+      </p:sp>
+      <p:sp>
+        <p:nvSpPr>
+          <p:cNvPr id="8" name="Text 6"/>
+          <p:cNvSpPr/>
+          <p:nvPr/>
+        </p:nvSpPr>
+        <p:spPr>
+          <a:xfrm>
+            <a:off x="406301" y="4434929"/>
+            <a:ext cx="8498026" cy="213271"/>
+          </a:xfrm>
+          <a:prstGeom prst="rect">
+            <a:avLst/>
+          </a:prstGeom>
+          <a:noFill/>
+          <a:ln/>
+        </p:spPr>
+        <p:txBody>
+          <a:bodyPr wrap="square" lIns="0" tIns="0" rIns="0" bIns="0" rtlCol="0" anchor="t"/>
+          <a:lstStyle/>
+          <a:p>
+            <a:pPr algn="l" indent="0" marL="0">
+              <a:lnSpc>
+                <a:spcPts val="1680"/>
+              </a:lnSpc>
+              <a:spcBef>
+                <a:spcPts val="300"/>
+              </a:spcBef>
+              <a:spcAft>
+                <a:spcPts val="300"/>
+              </a:spcAft>
+              <a:buNone/>
+            </a:pPr>
+            <a:r>
+              <a:rPr lang="en-US" sz="1200" dirty="0">
+                <a:solidFill>
+                  <a:srgbClr val="1C2833"/>
+                </a:solidFill>
+                <a:latin typeface="Arial" pitchFamily="34" charset="0"/>
+                <a:ea typeface="Arial" pitchFamily="34" charset="-122"/>
+                <a:cs typeface="Arial" pitchFamily="34" charset="-120"/>
+              </a:rPr>
+              <a:t>Middle ·  · IKS Curriculum</a:t>
+            </a:r>
+            <a:endParaRPr lang="en-US" sz="1200" dirty="0"/>
+          </a:p>
+        </p:txBody>
+      </p:sp>
+    </p:spTree>
+  </p:cSld>
+  <p:clrMapOvr>
+    <a:masterClrMapping/>
+  </p:clrMapOvr>
+</p:sld>
+</file>
+
+<file path=ppt/slides/slide12.xml><?xml version="1.0" encoding="utf-8"?>
+<p:sld xmlns:a="http://schemas.openxmlformats.org/drawingml/2006/main" xmlns:r="http://schemas.openxmlformats.org/officeDocument/2006/relationships" xmlns:p="http://schemas.openxmlformats.org/presentationml/2006/main">
+  <p:cSld name="Slide 12">
+    <p:bg>
+      <p:bgPr>
+        <a:solidFill>
+          <a:srgbClr val="FFFFFF"/>
+        </a:solidFill>
+      </p:bgPr>
+    </p:bg>
+    <p:spTree>
+      <p:nvGrpSpPr>
+        <p:cNvPr id="1" name=""/>
+        <p:cNvGrpSpPr/>
+        <p:nvPr/>
+      </p:nvGrpSpPr>
+      <p:grpSpPr>
+        <a:xfrm>
+          <a:off x="0" y="0"/>
+          <a:ext cx="0" cy="0"/>
+          <a:chOff x="0" y="0"/>
+          <a:chExt cx="0" cy="0"/>
+        </a:xfrm>
+      </p:grpSpPr>
+      <p:sp>
+        <p:nvSpPr>
+          <p:cNvPr id="2" name="Text 0"/>
+          <p:cNvSpPr/>
+          <p:nvPr/>
+        </p:nvSpPr>
+        <p:spPr>
+          <a:xfrm>
+            <a:off x="0" y="0"/>
+            <a:ext cx="9144000" cy="101501"/>
+          </a:xfrm>
+          <a:prstGeom prst="rect">
+            <a:avLst/>
+          </a:prstGeom>
+          <a:solidFill>
+            <a:srgbClr val="277884"/>
+          </a:solidFill>
+          <a:ln/>
+        </p:spPr>
+        <p:txBody>
+          <a:bodyPr wrap="square" rtlCol="0" anchor="ctr"/>
+          <a:lstStyle/>
+          <a:p>
+            <a:pPr indent="0" marL="0">
+              <a:buNone/>
+            </a:pPr>
+            <a:endParaRPr lang="en-US" dirty="0"/>
+          </a:p>
+        </p:txBody>
+      </p:sp>
+      <p:sp>
+        <p:nvSpPr>
+          <p:cNvPr id="3" name="Text 1"/>
+          <p:cNvSpPr/>
+          <p:nvPr/>
+        </p:nvSpPr>
+        <p:spPr>
+          <a:xfrm>
+            <a:off x="406301" y="457051"/>
+            <a:ext cx="8498026" cy="274290"/>
+          </a:xfrm>
+          <a:prstGeom prst="rect">
+            <a:avLst/>
+          </a:prstGeom>
+          <a:noFill/>
+          <a:ln/>
+        </p:spPr>
+        <p:txBody>
+          <a:bodyPr wrap="square" lIns="0" tIns="0" rIns="0" bIns="0" rtlCol="0" anchor="t"/>
+          <a:lstStyle/>
+          <a:p>
+            <a:pPr algn="l" indent="0" marL="0">
+              <a:lnSpc>
+                <a:spcPts val="2160"/>
+              </a:lnSpc>
+              <a:spcBef>
+                <a:spcPts val="600"/>
+              </a:spcBef>
+              <a:spcAft>
+                <a:spcPts val="800"/>
+              </a:spcAft>
+              <a:buNone/>
+            </a:pPr>
+            <a:r>
+              <a:rPr lang="en-US" sz="1800" b="1" dirty="0">
+                <a:solidFill>
+                  <a:srgbClr val="FE4447"/>
+                </a:solidFill>
+                <a:latin typeface="Georgia" pitchFamily="34" charset="0"/>
+                <a:ea typeface="Georgia" pitchFamily="34" charset="-122"/>
+                <a:cs typeface="Georgia" pitchFamily="34" charset="-120"/>
+              </a:rPr>
+              <a:t>Post-walk action drafting (15 min — in class) (cont.)</a:t>
+            </a:r>
+            <a:endParaRPr lang="en-US" sz="1800" dirty="0"/>
+          </a:p>
+        </p:txBody>
+      </p:sp>
+      <p:sp>
+        <p:nvSpPr>
+          <p:cNvPr id="4" name="Text 2"/>
+          <p:cNvSpPr/>
+          <p:nvPr/>
+        </p:nvSpPr>
+        <p:spPr>
+          <a:xfrm>
+            <a:off x="634901" y="883593"/>
+            <a:ext cx="8102798" cy="1424583"/>
+          </a:xfrm>
+          <a:prstGeom prst="rect">
+            <a:avLst/>
+          </a:prstGeom>
+          <a:noFill/>
+          <a:ln/>
+        </p:spPr>
+        <p:txBody>
+          <a:bodyPr wrap="square" lIns="0" tIns="0" rIns="0" bIns="0" rtlCol="0" anchor="t"/>
+          <a:lstStyle/>
+          <a:p>
+            <a:pPr algn="l" marL="342900" indent="-342900">
+              <a:lnSpc>
+                <a:spcPts val="1620"/>
+              </a:lnSpc>
+              <a:spcAft>
+                <a:spcPts val="300"/>
+              </a:spcAft>
+              <a:buSzPct val="100000"/>
+              <a:buChar char="•"/>
+            </a:pPr>
+            <a:r>
+              <a:rPr lang="en-US" sz="1200" b="1" dirty="0">
+                <a:solidFill>
+                  <a:srgbClr val="1C2833"/>
+                </a:solidFill>
+                <a:latin typeface="Arial" pitchFamily="34" charset="0"/>
+                <a:ea typeface="Arial" pitchFamily="34" charset="-122"/>
+                <a:cs typeface="Arial" pitchFamily="34" charset="-120"/>
+              </a:rPr>
+              <a:t>Twelve idling cars at pick-up</a:t>
+            </a:r>
+            <a:pPr algn="l" indent="0" marL="0">
+              <a:lnSpc>
+                <a:spcPts val="1620"/>
+              </a:lnSpc>
+              <a:spcAft>
+                <a:spcPts val="300"/>
+              </a:spcAft>
+              <a:buNone/>
+            </a:pPr>
+            <a:r>
+              <a:rPr lang="en-US" sz="1200" dirty="0">
+                <a:solidFill>
+                  <a:srgbClr val="1C2833"/>
+                </a:solidFill>
+                <a:latin typeface="Arial" pitchFamily="34" charset="0"/>
+                <a:ea typeface="Arial" pitchFamily="34" charset="-122"/>
+                <a:cs typeface="Arial" pitchFamily="34" charset="-120"/>
+              </a:rPr>
+              <a:t> — </a:t>
+            </a:r>
+            <a:pPr algn="l" indent="0" marL="0">
+              <a:lnSpc>
+                <a:spcPts val="1620"/>
+              </a:lnSpc>
+              <a:spcAft>
+                <a:spcPts val="300"/>
+              </a:spcAft>
+              <a:buNone/>
+            </a:pPr>
+            <a:r>
+              <a:rPr lang="en-US" sz="1200" i="1" dirty="0">
+                <a:solidFill>
+                  <a:srgbClr val="1C2833"/>
+                </a:solidFill>
+                <a:latin typeface="Arial" pitchFamily="34" charset="0"/>
+                <a:ea typeface="Arial" pitchFamily="34" charset="-122"/>
+                <a:cs typeface="Arial" pitchFamily="34" charset="-120"/>
+              </a:rPr>
+              <a:t>Yajña</a:t>
+            </a:r>
+            <a:pPr algn="l" indent="0" marL="0">
+              <a:lnSpc>
+                <a:spcPts val="1620"/>
+              </a:lnSpc>
+              <a:spcAft>
+                <a:spcPts val="300"/>
+              </a:spcAft>
+              <a:buNone/>
+            </a:pPr>
+            <a:r>
+              <a:rPr lang="en-US" sz="1200" dirty="0">
+                <a:solidFill>
+                  <a:srgbClr val="1C2833"/>
+                </a:solidFill>
+                <a:latin typeface="Arial" pitchFamily="34" charset="0"/>
+                <a:ea typeface="Arial" pitchFamily="34" charset="-122"/>
+                <a:cs typeface="Arial" pitchFamily="34" charset="-120"/>
+              </a:rPr>
+              <a:t> — give back to </a:t>
+            </a:r>
+            <a:pPr algn="l" indent="0" marL="0">
+              <a:lnSpc>
+                <a:spcPts val="1620"/>
+              </a:lnSpc>
+              <a:spcAft>
+                <a:spcPts val="300"/>
+              </a:spcAft>
+              <a:buNone/>
+            </a:pPr>
+            <a:r>
+              <a:rPr lang="en-US" sz="1200" i="1" dirty="0">
+                <a:solidFill>
+                  <a:srgbClr val="1C2833"/>
+                </a:solidFill>
+                <a:latin typeface="Arial" pitchFamily="34" charset="0"/>
+                <a:ea typeface="Arial" pitchFamily="34" charset="-122"/>
+                <a:cs typeface="Arial" pitchFamily="34" charset="-120"/>
+              </a:rPr>
+              <a:t>vāyu</a:t>
+            </a:r>
+            <a:pPr algn="l" indent="0" marL="0">
+              <a:lnSpc>
+                <a:spcPts val="1620"/>
+              </a:lnSpc>
+              <a:spcAft>
+                <a:spcPts val="300"/>
+              </a:spcAft>
+              <a:buNone/>
+            </a:pPr>
+            <a:r>
+              <a:rPr lang="en-US" sz="1200" dirty="0">
+                <a:solidFill>
+                  <a:srgbClr val="1C2833"/>
+                </a:solidFill>
+                <a:latin typeface="Arial" pitchFamily="34" charset="0"/>
+                <a:ea typeface="Arial" pitchFamily="34" charset="-122"/>
+                <a:cs typeface="Arial" pitchFamily="34" charset="-120"/>
+              </a:rPr>
+              <a:t> · A hand-painted "Engine OFF While Parked" sign at the gate</a:t>
+            </a:r>
+            <a:endParaRPr lang="en-US" sz="1200" dirty="0"/>
+          </a:p>
+          <a:p>
+            <a:pPr algn="l" marL="342900" indent="-342900">
+              <a:lnSpc>
+                <a:spcPts val="1620"/>
+              </a:lnSpc>
+              <a:spcAft>
+                <a:spcPts val="300"/>
+              </a:spcAft>
+              <a:buSzPct val="100000"/>
+              <a:buChar char="•"/>
+            </a:pPr>
+            <a:r>
+              <a:rPr lang="en-US" sz="1200" b="1" dirty="0">
+                <a:solidFill>
+                  <a:srgbClr val="1C2833"/>
+                </a:solidFill>
+                <a:latin typeface="Arial" pitchFamily="34" charset="0"/>
+                <a:ea typeface="Arial" pitchFamily="34" charset="-122"/>
+                <a:cs typeface="Arial" pitchFamily="34" charset="-120"/>
+              </a:rPr>
+              <a:t>A leaking tap at the science block</a:t>
+            </a:r>
+            <a:pPr algn="l" indent="0" marL="0">
+              <a:lnSpc>
+                <a:spcPts val="1620"/>
+              </a:lnSpc>
+              <a:spcAft>
+                <a:spcPts val="300"/>
+              </a:spcAft>
+              <a:buNone/>
+            </a:pPr>
+            <a:r>
+              <a:rPr lang="en-US" sz="1200" dirty="0">
+                <a:solidFill>
+                  <a:srgbClr val="1C2833"/>
+                </a:solidFill>
+                <a:latin typeface="Arial" pitchFamily="34" charset="0"/>
+                <a:ea typeface="Arial" pitchFamily="34" charset="-122"/>
+                <a:cs typeface="Arial" pitchFamily="34" charset="-120"/>
+              </a:rPr>
+              <a:t> — </a:t>
+            </a:r>
+            <a:pPr algn="l" indent="0" marL="0">
+              <a:lnSpc>
+                <a:spcPts val="1620"/>
+              </a:lnSpc>
+              <a:spcAft>
+                <a:spcPts val="300"/>
+              </a:spcAft>
+              <a:buNone/>
+            </a:pPr>
+            <a:r>
+              <a:rPr lang="en-US" sz="1200" i="1" dirty="0">
+                <a:solidFill>
+                  <a:srgbClr val="1C2833"/>
+                </a:solidFill>
+                <a:latin typeface="Arial" pitchFamily="34" charset="0"/>
+                <a:ea typeface="Arial" pitchFamily="34" charset="-122"/>
+                <a:cs typeface="Arial" pitchFamily="34" charset="-120"/>
+              </a:rPr>
+              <a:t>Iṣopaniṣad</a:t>
+            </a:r>
+            <a:pPr algn="l" indent="0" marL="0">
+              <a:lnSpc>
+                <a:spcPts val="1620"/>
+              </a:lnSpc>
+              <a:spcAft>
+                <a:spcPts val="300"/>
+              </a:spcAft>
+              <a:buNone/>
+            </a:pPr>
+            <a:r>
+              <a:rPr lang="en-US" sz="1200" dirty="0">
+                <a:solidFill>
+                  <a:srgbClr val="1C2833"/>
+                </a:solidFill>
+                <a:latin typeface="Arial" pitchFamily="34" charset="0"/>
+                <a:ea typeface="Arial" pitchFamily="34" charset="-122"/>
+                <a:cs typeface="Arial" pitchFamily="34" charset="-120"/>
+              </a:rPr>
+              <a:t> — don't grab · Report to admin + remind every day until fixed</a:t>
+            </a:r>
+            <a:endParaRPr lang="en-US" sz="1200" dirty="0"/>
+          </a:p>
+          <a:p>
+            <a:pPr algn="l" marL="342900" indent="-342900">
+              <a:lnSpc>
+                <a:spcPts val="1620"/>
+              </a:lnSpc>
+              <a:spcAft>
+                <a:spcPts val="300"/>
+              </a:spcAft>
+              <a:buSzPct val="100000"/>
+              <a:buChar char="•"/>
+            </a:pPr>
+            <a:r>
+              <a:rPr lang="en-US" sz="1200" b="1" dirty="0">
+                <a:solidFill>
+                  <a:srgbClr val="1C2833"/>
+                </a:solidFill>
+                <a:latin typeface="Arial" pitchFamily="34" charset="0"/>
+                <a:ea typeface="Arial" pitchFamily="34" charset="-122"/>
+                <a:cs typeface="Arial" pitchFamily="34" charset="-120"/>
+              </a:rPr>
+              <a:t>A dust-heavy corner with no green</a:t>
+            </a:r>
+            <a:pPr algn="l" indent="0" marL="0">
+              <a:lnSpc>
+                <a:spcPts val="1620"/>
+              </a:lnSpc>
+              <a:spcAft>
+                <a:spcPts val="300"/>
+              </a:spcAft>
+              <a:buNone/>
+            </a:pPr>
+            <a:r>
+              <a:rPr lang="en-US" sz="1200" dirty="0">
+                <a:solidFill>
+                  <a:srgbClr val="1C2833"/>
+                </a:solidFill>
+                <a:latin typeface="Arial" pitchFamily="34" charset="0"/>
+                <a:ea typeface="Arial" pitchFamily="34" charset="-122"/>
+                <a:cs typeface="Arial" pitchFamily="34" charset="-120"/>
+              </a:rPr>
+              <a:t> — </a:t>
+            </a:r>
+            <a:pPr algn="l" indent="0" marL="0">
+              <a:lnSpc>
+                <a:spcPts val="1620"/>
+              </a:lnSpc>
+              <a:spcAft>
+                <a:spcPts val="300"/>
+              </a:spcAft>
+              <a:buNone/>
+            </a:pPr>
+            <a:r>
+              <a:rPr lang="en-US" sz="1200" i="1" dirty="0">
+                <a:solidFill>
+                  <a:srgbClr val="1C2833"/>
+                </a:solidFill>
+                <a:latin typeface="Arial" pitchFamily="34" charset="0"/>
+                <a:ea typeface="Arial" pitchFamily="34" charset="-122"/>
+                <a:cs typeface="Arial" pitchFamily="34" charset="-120"/>
+              </a:rPr>
+              <a:t>Pṛthivī Sūkta</a:t>
+            </a:r>
+            <a:pPr algn="l" indent="0" marL="0">
+              <a:lnSpc>
+                <a:spcPts val="1620"/>
+              </a:lnSpc>
+              <a:spcAft>
+                <a:spcPts val="300"/>
+              </a:spcAft>
+              <a:buNone/>
+            </a:pPr>
+            <a:r>
+              <a:rPr lang="en-US" sz="1200" dirty="0">
+                <a:solidFill>
+                  <a:srgbClr val="1C2833"/>
+                </a:solidFill>
+                <a:latin typeface="Arial" pitchFamily="34" charset="0"/>
+                <a:ea typeface="Arial" pitchFamily="34" charset="-122"/>
+                <a:cs typeface="Arial" pitchFamily="34" charset="-120"/>
+              </a:rPr>
+              <a:t> — Earth as mother · Plant two saplings + water for 2 weeks</a:t>
+            </a:r>
+            <a:endParaRPr lang="en-US" sz="1200" dirty="0"/>
+          </a:p>
+          <a:p>
+            <a:pPr algn="l" marL="342900" indent="-342900">
+              <a:lnSpc>
+                <a:spcPts val="1620"/>
+              </a:lnSpc>
+              <a:spcAft>
+                <a:spcPts val="300"/>
+              </a:spcAft>
+              <a:buSzPct val="100000"/>
+              <a:buChar char="•"/>
+            </a:pPr>
+            <a:r>
+              <a:rPr lang="en-US" sz="1200" b="1" dirty="0">
+                <a:solidFill>
+                  <a:srgbClr val="1C2833"/>
+                </a:solidFill>
+                <a:latin typeface="Arial" pitchFamily="34" charset="0"/>
+                <a:ea typeface="Arial" pitchFamily="34" charset="-122"/>
+                <a:cs typeface="Arial" pitchFamily="34" charset="-120"/>
+              </a:rPr>
+              <a:t>A pile of plastic at the canteen</a:t>
+            </a:r>
+            <a:pPr algn="l" indent="0" marL="0">
+              <a:lnSpc>
+                <a:spcPts val="1620"/>
+              </a:lnSpc>
+              <a:spcAft>
+                <a:spcPts val="300"/>
+              </a:spcAft>
+              <a:buNone/>
+            </a:pPr>
+            <a:r>
+              <a:rPr lang="en-US" sz="1200" dirty="0">
+                <a:solidFill>
+                  <a:srgbClr val="1C2833"/>
+                </a:solidFill>
+                <a:latin typeface="Arial" pitchFamily="34" charset="0"/>
+                <a:ea typeface="Arial" pitchFamily="34" charset="-122"/>
+                <a:cs typeface="Arial" pitchFamily="34" charset="-120"/>
+              </a:rPr>
+              <a:t> — </a:t>
+            </a:r>
+            <a:pPr algn="l" indent="0" marL="0">
+              <a:lnSpc>
+                <a:spcPts val="1620"/>
+              </a:lnSpc>
+              <a:spcAft>
+                <a:spcPts val="300"/>
+              </a:spcAft>
+              <a:buNone/>
+            </a:pPr>
+            <a:r>
+              <a:rPr lang="en-US" sz="1200" i="1" dirty="0">
+                <a:solidFill>
+                  <a:srgbClr val="1C2833"/>
+                </a:solidFill>
+                <a:latin typeface="Arial" pitchFamily="34" charset="0"/>
+                <a:ea typeface="Arial" pitchFamily="34" charset="-122"/>
+                <a:cs typeface="Arial" pitchFamily="34" charset="-120"/>
+              </a:rPr>
+              <a:t>Vasudhaiva kuṭumbakam</a:t>
+            </a:r>
+            <a:pPr algn="l" indent="0" marL="0">
+              <a:lnSpc>
+                <a:spcPts val="1620"/>
+              </a:lnSpc>
+              <a:spcAft>
+                <a:spcPts val="300"/>
+              </a:spcAft>
+              <a:buNone/>
+            </a:pPr>
+            <a:r>
+              <a:rPr lang="en-US" sz="1200" dirty="0">
+                <a:solidFill>
+                  <a:srgbClr val="1C2833"/>
+                </a:solidFill>
+                <a:latin typeface="Arial" pitchFamily="34" charset="0"/>
+                <a:ea typeface="Arial" pitchFamily="34" charset="-122"/>
+                <a:cs typeface="Arial" pitchFamily="34" charset="-120"/>
+              </a:rPr>
+              <a:t> — one family · Set up one labelled segregation bin + 1 week of monitoring</a:t>
+            </a:r>
+            <a:endParaRPr lang="en-US" sz="1200" dirty="0"/>
+          </a:p>
+        </p:txBody>
+      </p:sp>
+      <p:sp>
+        <p:nvSpPr>
+          <p:cNvPr id="5" name="Text 3"/>
+          <p:cNvSpPr/>
+          <p:nvPr/>
+        </p:nvSpPr>
+        <p:spPr>
+          <a:xfrm>
+            <a:off x="406301" y="4434929"/>
+            <a:ext cx="8498026" cy="213271"/>
+          </a:xfrm>
+          <a:prstGeom prst="rect">
+            <a:avLst/>
+          </a:prstGeom>
+          <a:noFill/>
+          <a:ln/>
+        </p:spPr>
+        <p:txBody>
+          <a:bodyPr wrap="square" lIns="0" tIns="0" rIns="0" bIns="0" rtlCol="0" anchor="t"/>
+          <a:lstStyle/>
+          <a:p>
+            <a:pPr algn="l" indent="0" marL="0">
+              <a:lnSpc>
+                <a:spcPts val="1680"/>
+              </a:lnSpc>
+              <a:spcBef>
+                <a:spcPts val="300"/>
+              </a:spcBef>
+              <a:spcAft>
+                <a:spcPts val="300"/>
+              </a:spcAft>
+              <a:buNone/>
+            </a:pPr>
+            <a:r>
+              <a:rPr lang="en-US" sz="1200" dirty="0">
+                <a:solidFill>
+                  <a:srgbClr val="1C2833"/>
+                </a:solidFill>
+                <a:latin typeface="Arial" pitchFamily="34" charset="0"/>
+                <a:ea typeface="Arial" pitchFamily="34" charset="-122"/>
+                <a:cs typeface="Arial" pitchFamily="34" charset="-120"/>
+              </a:rPr>
+              <a:t>Middle ·  · IKS Curriculum</a:t>
+            </a:r>
+            <a:endParaRPr lang="en-US" sz="1200" dirty="0"/>
+          </a:p>
+        </p:txBody>
+      </p:sp>
+    </p:spTree>
+  </p:cSld>
+  <p:clrMapOvr>
+    <a:masterClrMapping/>
+  </p:clrMapOvr>
+</p:sld>
+</file>
+
+<file path=ppt/slides/slide13.xml><?xml version="1.0" encoding="utf-8"?>
+<p:sld xmlns:a="http://schemas.openxmlformats.org/drawingml/2006/main" xmlns:r="http://schemas.openxmlformats.org/officeDocument/2006/relationships" xmlns:p="http://schemas.openxmlformats.org/presentationml/2006/main">
+  <p:cSld name="Slide 13">
+    <p:bg>
+      <p:bgPr>
+        <a:solidFill>
+          <a:srgbClr val="FFFFFF"/>
+        </a:solidFill>
+      </p:bgPr>
+    </p:bg>
+    <p:spTree>
+      <p:nvGrpSpPr>
+        <p:cNvPr id="1" name=""/>
+        <p:cNvGrpSpPr/>
+        <p:nvPr/>
+      </p:nvGrpSpPr>
+      <p:grpSpPr>
+        <a:xfrm>
+          <a:off x="0" y="0"/>
+          <a:ext cx="0" cy="0"/>
+          <a:chOff x="0" y="0"/>
+          <a:chExt cx="0" cy="0"/>
+        </a:xfrm>
+      </p:grpSpPr>
+      <p:sp>
+        <p:nvSpPr>
+          <p:cNvPr id="2" name="Text 0"/>
+          <p:cNvSpPr/>
+          <p:nvPr/>
+        </p:nvSpPr>
+        <p:spPr>
+          <a:xfrm>
+            <a:off x="0" y="0"/>
+            <a:ext cx="9144000" cy="101501"/>
+          </a:xfrm>
+          <a:prstGeom prst="rect">
+            <a:avLst/>
+          </a:prstGeom>
+          <a:solidFill>
+            <a:srgbClr val="277884"/>
+          </a:solidFill>
+          <a:ln/>
+        </p:spPr>
+        <p:txBody>
+          <a:bodyPr wrap="square" rtlCol="0" anchor="ctr"/>
+          <a:lstStyle/>
+          <a:p>
+            <a:pPr indent="0" marL="0">
+              <a:buNone/>
+            </a:pPr>
+            <a:endParaRPr lang="en-US" dirty="0"/>
+          </a:p>
+        </p:txBody>
+      </p:sp>
+      <p:sp>
+        <p:nvSpPr>
+          <p:cNvPr id="3" name="Text 1"/>
+          <p:cNvSpPr/>
+          <p:nvPr/>
+        </p:nvSpPr>
+        <p:spPr>
+          <a:xfrm>
+            <a:off x="406301" y="457051"/>
+            <a:ext cx="8498026" cy="274290"/>
+          </a:xfrm>
+          <a:prstGeom prst="rect">
+            <a:avLst/>
+          </a:prstGeom>
+          <a:noFill/>
+          <a:ln/>
+        </p:spPr>
+        <p:txBody>
+          <a:bodyPr wrap="square" lIns="0" tIns="0" rIns="0" bIns="0" rtlCol="0" anchor="t"/>
+          <a:lstStyle/>
+          <a:p>
+            <a:pPr algn="l" indent="0" marL="0">
+              <a:lnSpc>
+                <a:spcPts val="2160"/>
+              </a:lnSpc>
+              <a:spcBef>
+                <a:spcPts val="600"/>
+              </a:spcBef>
+              <a:spcAft>
+                <a:spcPts val="800"/>
+              </a:spcAft>
+              <a:buNone/>
+            </a:pPr>
+            <a:r>
+              <a:rPr lang="en-US" sz="1800" b="1" dirty="0">
+                <a:solidFill>
+                  <a:srgbClr val="FE4447"/>
+                </a:solidFill>
+                <a:latin typeface="Georgia" pitchFamily="34" charset="0"/>
+                <a:ea typeface="Georgia" pitchFamily="34" charset="-122"/>
+                <a:cs typeface="Georgia" pitchFamily="34" charset="-120"/>
+              </a:rPr>
+              <a:t>Post-walk action drafting (15 min — in class) (cont.)</a:t>
+            </a:r>
+            <a:endParaRPr lang="en-US" sz="1800" dirty="0"/>
+          </a:p>
+        </p:txBody>
+      </p:sp>
+      <p:sp>
+        <p:nvSpPr>
+          <p:cNvPr id="4" name="Text 2"/>
+          <p:cNvSpPr/>
+          <p:nvPr/>
+        </p:nvSpPr>
+        <p:spPr>
+          <a:xfrm>
+            <a:off x="634901" y="883593"/>
+            <a:ext cx="8102798" cy="281880"/>
+          </a:xfrm>
+          <a:prstGeom prst="rect">
+            <a:avLst/>
+          </a:prstGeom>
+          <a:noFill/>
+          <a:ln/>
+        </p:spPr>
+        <p:txBody>
+          <a:bodyPr wrap="square" lIns="0" tIns="0" rIns="0" bIns="0" rtlCol="0" anchor="t"/>
+          <a:lstStyle/>
+          <a:p>
+            <a:pPr algn="l" marL="342900" indent="-342900">
+              <a:lnSpc>
+                <a:spcPts val="1620"/>
+              </a:lnSpc>
+              <a:spcAft>
+                <a:spcPts val="300"/>
+              </a:spcAft>
+              <a:buSzPct val="100000"/>
+              <a:buChar char="•"/>
+            </a:pPr>
+            <a:r>
+              <a:rPr lang="en-US" sz="1200" b="1" dirty="0">
+                <a:solidFill>
+                  <a:srgbClr val="1C2833"/>
+                </a:solidFill>
+                <a:latin typeface="Arial" pitchFamily="34" charset="0"/>
+                <a:ea typeface="Arial" pitchFamily="34" charset="-122"/>
+                <a:cs typeface="Arial" pitchFamily="34" charset="-120"/>
+              </a:rPr>
+              <a:t>Examples of unacceptable actions:</a:t>
+            </a:r>
+            <a:endParaRPr lang="en-US" sz="1200" dirty="0"/>
+          </a:p>
+        </p:txBody>
+      </p:sp>
+      <p:sp>
+        <p:nvSpPr>
+          <p:cNvPr id="5" name="Text 3"/>
+          <p:cNvSpPr/>
+          <p:nvPr/>
+        </p:nvSpPr>
+        <p:spPr>
+          <a:xfrm>
+            <a:off x="634901" y="1266974"/>
+            <a:ext cx="8102798" cy="769441"/>
+          </a:xfrm>
+          <a:prstGeom prst="rect">
+            <a:avLst/>
+          </a:prstGeom>
+          <a:noFill/>
+          <a:ln/>
+        </p:spPr>
+        <p:txBody>
+          <a:bodyPr wrap="square" lIns="0" tIns="0" rIns="0" bIns="0" rtlCol="0" anchor="t"/>
+          <a:lstStyle/>
+          <a:p>
+            <a:pPr algn="l" marL="342900" indent="-342900">
+              <a:lnSpc>
+                <a:spcPts val="1620"/>
+              </a:lnSpc>
+              <a:spcAft>
+                <a:spcPts val="300"/>
+              </a:spcAft>
+              <a:buSzPct val="100000"/>
+              <a:buChar char="•"/>
+            </a:pPr>
+            <a:r>
+              <a:rPr lang="en-US" sz="1200" i="1" dirty="0">
+                <a:solidFill>
+                  <a:srgbClr val="1C2833"/>
+                </a:solidFill>
+                <a:latin typeface="Arial" pitchFamily="34" charset="0"/>
+                <a:ea typeface="Arial" pitchFamily="34" charset="-122"/>
+                <a:cs typeface="Arial" pitchFamily="34" charset="-120"/>
+              </a:rPr>
+              <a:t>"Stop climate change."</a:t>
+            </a:r>
+            <a:pPr algn="l" indent="0" marL="0">
+              <a:lnSpc>
+                <a:spcPts val="1620"/>
+              </a:lnSpc>
+              <a:spcAft>
+                <a:spcPts val="300"/>
+              </a:spcAft>
+              <a:buNone/>
+            </a:pPr>
+            <a:r>
+              <a:rPr lang="en-US" sz="1200" dirty="0">
+                <a:solidFill>
+                  <a:srgbClr val="1C2833"/>
+                </a:solidFill>
+                <a:latin typeface="Arial" pitchFamily="34" charset="0"/>
+                <a:ea typeface="Arial" pitchFamily="34" charset="-122"/>
+                <a:cs typeface="Arial" pitchFamily="34" charset="-120"/>
+              </a:rPr>
+              <a:t> (Too vague.)</a:t>
+            </a:r>
+            <a:endParaRPr lang="en-US" sz="1200" dirty="0"/>
+          </a:p>
+          <a:p>
+            <a:pPr algn="l" marL="342900" indent="-342900">
+              <a:lnSpc>
+                <a:spcPts val="1620"/>
+              </a:lnSpc>
+              <a:spcAft>
+                <a:spcPts val="300"/>
+              </a:spcAft>
+              <a:buSzPct val="100000"/>
+              <a:buChar char="•"/>
+            </a:pPr>
+            <a:r>
+              <a:rPr lang="en-US" sz="1200" i="1" dirty="0">
+                <a:solidFill>
+                  <a:srgbClr val="1C2833"/>
+                </a:solidFill>
+                <a:latin typeface="Arial" pitchFamily="34" charset="0"/>
+                <a:ea typeface="Arial" pitchFamily="34" charset="-122"/>
+                <a:cs typeface="Arial" pitchFamily="34" charset="-120"/>
+              </a:rPr>
+              <a:t>"Plant 1 lakh trees."</a:t>
+            </a:r>
+            <a:pPr algn="l" indent="0" marL="0">
+              <a:lnSpc>
+                <a:spcPts val="1620"/>
+              </a:lnSpc>
+              <a:spcAft>
+                <a:spcPts val="300"/>
+              </a:spcAft>
+              <a:buNone/>
+            </a:pPr>
+            <a:r>
+              <a:rPr lang="en-US" sz="1200" dirty="0">
+                <a:solidFill>
+                  <a:srgbClr val="1C2833"/>
+                </a:solidFill>
+                <a:latin typeface="Arial" pitchFamily="34" charset="0"/>
+                <a:ea typeface="Arial" pitchFamily="34" charset="-122"/>
+                <a:cs typeface="Arial" pitchFamily="34" charset="-120"/>
+              </a:rPr>
+              <a:t> (Not doable in 14 days.)</a:t>
+            </a:r>
+            <a:endParaRPr lang="en-US" sz="1200" dirty="0"/>
+          </a:p>
+          <a:p>
+            <a:pPr algn="l" marL="342900" indent="-342900">
+              <a:lnSpc>
+                <a:spcPts val="1620"/>
+              </a:lnSpc>
+              <a:spcAft>
+                <a:spcPts val="300"/>
+              </a:spcAft>
+              <a:buSzPct val="100000"/>
+              <a:buChar char="•"/>
+            </a:pPr>
+            <a:r>
+              <a:rPr lang="en-US" sz="1200" i="1" dirty="0">
+                <a:solidFill>
+                  <a:srgbClr val="1C2833"/>
+                </a:solidFill>
+                <a:latin typeface="Arial" pitchFamily="34" charset="0"/>
+                <a:ea typeface="Arial" pitchFamily="34" charset="-122"/>
+                <a:cs typeface="Arial" pitchFamily="34" charset="-120"/>
+              </a:rPr>
+              <a:t>"The government should ban diesel."</a:t>
+            </a:r>
+            <a:pPr algn="l" indent="0" marL="0">
+              <a:lnSpc>
+                <a:spcPts val="1620"/>
+              </a:lnSpc>
+              <a:spcAft>
+                <a:spcPts val="300"/>
+              </a:spcAft>
+              <a:buNone/>
+            </a:pPr>
+            <a:r>
+              <a:rPr lang="en-US" sz="1200" dirty="0">
+                <a:solidFill>
+                  <a:srgbClr val="1C2833"/>
+                </a:solidFill>
+                <a:latin typeface="Arial" pitchFamily="34" charset="0"/>
+                <a:ea typeface="Arial" pitchFamily="34" charset="-122"/>
+                <a:cs typeface="Arial" pitchFamily="34" charset="-120"/>
+              </a:rPr>
+              <a:t> (Not the pair's action.)</a:t>
+            </a:r>
+            <a:endParaRPr lang="en-US" sz="1200" dirty="0"/>
+          </a:p>
+        </p:txBody>
+      </p:sp>
+      <p:sp>
+        <p:nvSpPr>
+          <p:cNvPr id="6" name="Text 4"/>
+          <p:cNvSpPr/>
+          <p:nvPr/>
+        </p:nvSpPr>
+        <p:spPr>
+          <a:xfrm>
+            <a:off x="406301" y="4434929"/>
+            <a:ext cx="8498026" cy="213271"/>
+          </a:xfrm>
+          <a:prstGeom prst="rect">
+            <a:avLst/>
+          </a:prstGeom>
+          <a:noFill/>
+          <a:ln/>
+        </p:spPr>
+        <p:txBody>
+          <a:bodyPr wrap="square" lIns="0" tIns="0" rIns="0" bIns="0" rtlCol="0" anchor="t"/>
+          <a:lstStyle/>
+          <a:p>
+            <a:pPr algn="l" indent="0" marL="0">
+              <a:lnSpc>
+                <a:spcPts val="1680"/>
+              </a:lnSpc>
+              <a:spcBef>
+                <a:spcPts val="300"/>
+              </a:spcBef>
+              <a:spcAft>
+                <a:spcPts val="300"/>
+              </a:spcAft>
+              <a:buNone/>
+            </a:pPr>
+            <a:r>
+              <a:rPr lang="en-US" sz="1200" dirty="0">
+                <a:solidFill>
+                  <a:srgbClr val="1C2833"/>
+                </a:solidFill>
+                <a:latin typeface="Arial" pitchFamily="34" charset="0"/>
+                <a:ea typeface="Arial" pitchFamily="34" charset="-122"/>
+                <a:cs typeface="Arial" pitchFamily="34" charset="-120"/>
+              </a:rPr>
+              <a:t>Middle ·  · IKS Curriculum</a:t>
+            </a:r>
+            <a:endParaRPr lang="en-US" sz="1200" dirty="0"/>
+          </a:p>
+        </p:txBody>
+      </p:sp>
+    </p:spTree>
+  </p:cSld>
+  <p:clrMapOvr>
+    <a:masterClrMapping/>
+  </p:clrMapOvr>
+</p:sld>
+</file>
+
+<file path=ppt/slides/slide14.xml><?xml version="1.0" encoding="utf-8"?>
+<p:sld xmlns:a="http://schemas.openxmlformats.org/drawingml/2006/main" xmlns:r="http://schemas.openxmlformats.org/officeDocument/2006/relationships" xmlns:p="http://schemas.openxmlformats.org/presentationml/2006/main">
+  <p:cSld name="Slide 14">
+    <p:bg>
+      <p:bgPr>
+        <a:solidFill>
+          <a:srgbClr val="FFFFFF"/>
+        </a:solidFill>
+      </p:bgPr>
+    </p:bg>
+    <p:spTree>
+      <p:nvGrpSpPr>
+        <p:cNvPr id="1" name=""/>
+        <p:cNvGrpSpPr/>
+        <p:nvPr/>
+      </p:nvGrpSpPr>
+      <p:grpSpPr>
+        <a:xfrm>
+          <a:off x="0" y="0"/>
+          <a:ext cx="0" cy="0"/>
+          <a:chOff x="0" y="0"/>
+          <a:chExt cx="0" cy="0"/>
+        </a:xfrm>
+      </p:grpSpPr>
+      <p:sp>
+        <p:nvSpPr>
+          <p:cNvPr id="2" name="Text 0"/>
+          <p:cNvSpPr/>
+          <p:nvPr/>
+        </p:nvSpPr>
+        <p:spPr>
+          <a:xfrm>
+            <a:off x="0" y="0"/>
+            <a:ext cx="9144000" cy="101501"/>
+          </a:xfrm>
+          <a:prstGeom prst="rect">
+            <a:avLst/>
+          </a:prstGeom>
+          <a:solidFill>
+            <a:srgbClr val="277884"/>
+          </a:solidFill>
+          <a:ln/>
+        </p:spPr>
+        <p:txBody>
+          <a:bodyPr wrap="square" rtlCol="0" anchor="ctr"/>
+          <a:lstStyle/>
+          <a:p>
+            <a:pPr indent="0" marL="0">
+              <a:buNone/>
+            </a:pPr>
+            <a:endParaRPr lang="en-US" dirty="0"/>
+          </a:p>
+        </p:txBody>
+      </p:sp>
+      <p:sp>
+        <p:nvSpPr>
+          <p:cNvPr id="3" name="Text 1"/>
+          <p:cNvSpPr/>
+          <p:nvPr/>
+        </p:nvSpPr>
+        <p:spPr>
+          <a:xfrm>
+            <a:off x="406301" y="457051"/>
+            <a:ext cx="8498026" cy="274290"/>
+          </a:xfrm>
+          <a:prstGeom prst="rect">
+            <a:avLst/>
+          </a:prstGeom>
+          <a:noFill/>
+          <a:ln/>
+        </p:spPr>
+        <p:txBody>
+          <a:bodyPr wrap="square" lIns="0" tIns="0" rIns="0" bIns="0" rtlCol="0" anchor="t"/>
+          <a:lstStyle/>
+          <a:p>
+            <a:pPr algn="l" indent="0" marL="0">
+              <a:lnSpc>
+                <a:spcPts val="2160"/>
+              </a:lnSpc>
+              <a:spcBef>
+                <a:spcPts val="600"/>
+              </a:spcBef>
+              <a:spcAft>
+                <a:spcPts val="800"/>
+              </a:spcAft>
+              <a:buNone/>
+            </a:pPr>
+            <a:r>
+              <a:rPr lang="en-US" sz="1800" b="1" dirty="0">
+                <a:solidFill>
+                  <a:srgbClr val="FE4447"/>
+                </a:solidFill>
+                <a:latin typeface="Georgia" pitchFamily="34" charset="0"/>
+                <a:ea typeface="Georgia" pitchFamily="34" charset="-122"/>
+                <a:cs typeface="Georgia" pitchFamily="34" charset="-120"/>
+              </a:rPr>
+              <a:t>Wrap-up (5 min)</a:t>
+            </a:r>
+            <a:endParaRPr lang="en-US" sz="1800" dirty="0"/>
+          </a:p>
+        </p:txBody>
+      </p:sp>
+      <p:sp>
+        <p:nvSpPr>
+          <p:cNvPr id="4" name="Text 2"/>
+          <p:cNvSpPr/>
+          <p:nvPr/>
+        </p:nvSpPr>
+        <p:spPr>
+          <a:xfrm>
+            <a:off x="634901" y="883593"/>
+            <a:ext cx="8102798" cy="769441"/>
+          </a:xfrm>
+          <a:prstGeom prst="rect">
+            <a:avLst/>
+          </a:prstGeom>
+          <a:noFill/>
+          <a:ln/>
+        </p:spPr>
+        <p:txBody>
+          <a:bodyPr wrap="square" lIns="0" tIns="0" rIns="0" bIns="0" rtlCol="0" anchor="t"/>
+          <a:lstStyle/>
+          <a:p>
+            <a:pPr algn="l" marL="342900" indent="-342900">
+              <a:lnSpc>
+                <a:spcPts val="1620"/>
+              </a:lnSpc>
+              <a:spcAft>
+                <a:spcPts val="300"/>
+              </a:spcAft>
+              <a:buSzPct val="100000"/>
+              <a:buChar char="•"/>
+            </a:pPr>
+            <a:r>
+              <a:rPr lang="en-US" sz="1200" dirty="0">
+                <a:solidFill>
+                  <a:srgbClr val="1C2833"/>
+                </a:solidFill>
+                <a:latin typeface="Arial" pitchFamily="34" charset="0"/>
+                <a:ea typeface="Arial" pitchFamily="34" charset="-122"/>
+                <a:cs typeface="Arial" pitchFamily="34" charset="-120"/>
+              </a:rPr>
+              <a:t>Each pair reads ONE line of their action plan aloud — the action sentence.</a:t>
+            </a:r>
+            <a:endParaRPr lang="en-US" sz="1200" dirty="0"/>
+          </a:p>
+          <a:p>
+            <a:pPr algn="l" marL="342900" indent="-342900">
+              <a:lnSpc>
+                <a:spcPts val="1620"/>
+              </a:lnSpc>
+              <a:spcAft>
+                <a:spcPts val="300"/>
+              </a:spcAft>
+              <a:buSzPct val="100000"/>
+              <a:buChar char="•"/>
+            </a:pPr>
+            <a:r>
+              <a:rPr lang="en-US" sz="1200" dirty="0">
+                <a:solidFill>
+                  <a:srgbClr val="1C2833"/>
+                </a:solidFill>
+                <a:latin typeface="Arial" pitchFamily="34" charset="0"/>
+                <a:ea typeface="Arial" pitchFamily="34" charset="-122"/>
+                <a:cs typeface="Arial" pitchFamily="34" charset="-120"/>
+              </a:rPr>
+              <a:t>Teacher acknowledges each with a short response (clarify, narrow, encourage).</a:t>
+            </a:r>
+            <a:endParaRPr lang="en-US" sz="1200" dirty="0"/>
+          </a:p>
+          <a:p>
+            <a:pPr algn="l" marL="342900" indent="-342900">
+              <a:lnSpc>
+                <a:spcPts val="1620"/>
+              </a:lnSpc>
+              <a:spcAft>
+                <a:spcPts val="300"/>
+              </a:spcAft>
+              <a:buSzPct val="100000"/>
+              <a:buChar char="•"/>
+            </a:pPr>
+            <a:r>
+              <a:rPr lang="en-US" sz="1200" dirty="0">
+                <a:solidFill>
+                  <a:srgbClr val="1C2833"/>
+                </a:solidFill>
+                <a:latin typeface="Arial" pitchFamily="34" charset="0"/>
+                <a:ea typeface="Arial" pitchFamily="34" charset="-122"/>
+                <a:cs typeface="Arial" pitchFamily="34" charset="-120"/>
+              </a:rPr>
+              <a:t>Tomorrow: 3-minute pitch + summative quiz.</a:t>
+            </a:r>
+            <a:endParaRPr lang="en-US" sz="1200" dirty="0"/>
+          </a:p>
+        </p:txBody>
+      </p:sp>
+      <p:sp>
+        <p:nvSpPr>
+          <p:cNvPr id="5" name="Text 3"/>
+          <p:cNvSpPr/>
+          <p:nvPr/>
+        </p:nvSpPr>
+        <p:spPr>
+          <a:xfrm>
+            <a:off x="406301" y="4434929"/>
+            <a:ext cx="8498026" cy="213271"/>
+          </a:xfrm>
+          <a:prstGeom prst="rect">
+            <a:avLst/>
+          </a:prstGeom>
+          <a:noFill/>
+          <a:ln/>
+        </p:spPr>
+        <p:txBody>
+          <a:bodyPr wrap="square" lIns="0" tIns="0" rIns="0" bIns="0" rtlCol="0" anchor="t"/>
+          <a:lstStyle/>
+          <a:p>
+            <a:pPr algn="l" indent="0" marL="0">
+              <a:lnSpc>
+                <a:spcPts val="1680"/>
+              </a:lnSpc>
+              <a:spcBef>
+                <a:spcPts val="300"/>
+              </a:spcBef>
+              <a:spcAft>
+                <a:spcPts val="300"/>
+              </a:spcAft>
+              <a:buNone/>
+            </a:pPr>
+            <a:r>
+              <a:rPr lang="en-US" sz="1200" dirty="0">
+                <a:solidFill>
+                  <a:srgbClr val="1C2833"/>
+                </a:solidFill>
+                <a:latin typeface="Arial" pitchFamily="34" charset="0"/>
+                <a:ea typeface="Arial" pitchFamily="34" charset="-122"/>
+                <a:cs typeface="Arial" pitchFamily="34" charset="-120"/>
+              </a:rPr>
+              <a:t>Middle ·  · IKS Curriculum</a:t>
+            </a:r>
+            <a:endParaRPr lang="en-US" sz="1200" dirty="0"/>
+          </a:p>
+        </p:txBody>
+      </p:sp>
+    </p:spTree>
+  </p:cSld>
+  <p:clrMapOvr>
+    <a:masterClrMapping/>
+  </p:clrMapOvr>
+</p:sld>
+</file>
+
+<file path=ppt/slides/slide15.xml><?xml version="1.0" encoding="utf-8"?>
+<p:sld xmlns:a="http://schemas.openxmlformats.org/drawingml/2006/main" xmlns:r="http://schemas.openxmlformats.org/officeDocument/2006/relationships" xmlns:p="http://schemas.openxmlformats.org/presentationml/2006/main">
+  <p:cSld name="Slide 15">
+    <p:bg>
+      <p:bgPr>
+        <a:solidFill>
+          <a:srgbClr val="FFFFFF"/>
+        </a:solidFill>
+      </p:bgPr>
+    </p:bg>
+    <p:spTree>
+      <p:nvGrpSpPr>
+        <p:cNvPr id="1" name=""/>
+        <p:cNvGrpSpPr/>
+        <p:nvPr/>
+      </p:nvGrpSpPr>
+      <p:grpSpPr>
+        <a:xfrm>
+          <a:off x="0" y="0"/>
+          <a:ext cx="0" cy="0"/>
+          <a:chOff x="0" y="0"/>
+          <a:chExt cx="0" cy="0"/>
+        </a:xfrm>
+      </p:grpSpPr>
+      <p:sp>
+        <p:nvSpPr>
+          <p:cNvPr id="2" name="Text 0"/>
+          <p:cNvSpPr/>
+          <p:nvPr/>
+        </p:nvSpPr>
+        <p:spPr>
+          <a:xfrm>
+            <a:off x="0" y="0"/>
+            <a:ext cx="9144000" cy="101501"/>
+          </a:xfrm>
+          <a:prstGeom prst="rect">
+            <a:avLst/>
+          </a:prstGeom>
+          <a:solidFill>
+            <a:srgbClr val="277884"/>
+          </a:solidFill>
+          <a:ln/>
+        </p:spPr>
+        <p:txBody>
+          <a:bodyPr wrap="square" rtlCol="0" anchor="ctr"/>
+          <a:lstStyle/>
+          <a:p>
+            <a:pPr indent="0" marL="0">
+              <a:buNone/>
+            </a:pPr>
+            <a:endParaRPr lang="en-US" dirty="0"/>
+          </a:p>
+        </p:txBody>
+      </p:sp>
+      <p:sp>
+        <p:nvSpPr>
+          <p:cNvPr id="3" name="Text 1"/>
+          <p:cNvSpPr/>
+          <p:nvPr/>
+        </p:nvSpPr>
+        <p:spPr>
+          <a:xfrm>
+            <a:off x="406301" y="457051"/>
+            <a:ext cx="8498026" cy="274290"/>
+          </a:xfrm>
+          <a:prstGeom prst="rect">
+            <a:avLst/>
+          </a:prstGeom>
+          <a:noFill/>
+          <a:ln/>
+        </p:spPr>
+        <p:txBody>
+          <a:bodyPr wrap="square" lIns="0" tIns="0" rIns="0" bIns="0" rtlCol="0" anchor="t"/>
+          <a:lstStyle/>
+          <a:p>
+            <a:pPr algn="l" indent="0" marL="0">
+              <a:lnSpc>
+                <a:spcPts val="2160"/>
+              </a:lnSpc>
+              <a:spcBef>
+                <a:spcPts val="600"/>
+              </a:spcBef>
+              <a:spcAft>
+                <a:spcPts val="800"/>
+              </a:spcAft>
+              <a:buNone/>
+            </a:pPr>
+            <a:r>
+              <a:rPr lang="en-US" sz="1800" b="1" dirty="0">
+                <a:solidFill>
+                  <a:srgbClr val="FE4447"/>
+                </a:solidFill>
+                <a:latin typeface="Georgia" pitchFamily="34" charset="0"/>
+                <a:ea typeface="Georgia" pitchFamily="34" charset="-122"/>
+                <a:cs typeface="Georgia" pitchFamily="34" charset="-120"/>
+              </a:rPr>
+              <a:t>Student-facing content</a:t>
+            </a:r>
+            <a:endParaRPr lang="en-US" sz="1800" dirty="0"/>
+          </a:p>
+        </p:txBody>
+      </p:sp>
+      <p:sp>
+        <p:nvSpPr>
+          <p:cNvPr id="4" name="Text 2"/>
+          <p:cNvSpPr/>
+          <p:nvPr/>
+        </p:nvSpPr>
+        <p:spPr>
+          <a:xfrm>
+            <a:off x="406301" y="883593"/>
+            <a:ext cx="8331398" cy="2764631"/>
+          </a:xfrm>
+          <a:prstGeom prst="rect">
+            <a:avLst/>
+          </a:prstGeom>
+          <a:solidFill>
+            <a:srgbClr val="F4F8F9"/>
+          </a:solidFill>
+          <a:ln/>
+        </p:spPr>
+        <p:txBody>
+          <a:bodyPr wrap="square" rtlCol="0" anchor="ctr"/>
+          <a:lstStyle/>
+          <a:p>
+            <a:pPr indent="0" marL="0">
+              <a:buNone/>
+            </a:pPr>
+            <a:endParaRPr lang="en-US" dirty="0"/>
+          </a:p>
+        </p:txBody>
+      </p:sp>
+      <p:sp>
+        <p:nvSpPr>
+          <p:cNvPr id="5" name="Shape 3"/>
+          <p:cNvSpPr/>
+          <p:nvPr/>
+        </p:nvSpPr>
+        <p:spPr>
+          <a:xfrm>
+            <a:off x="434876" y="883593"/>
+            <a:ext cx="0" cy="2764631"/>
+          </a:xfrm>
+          <a:prstGeom prst="line">
+            <a:avLst/>
+          </a:prstGeom>
+          <a:noFill/>
+          <a:ln w="57150">
+            <a:solidFill>
+              <a:srgbClr val="FE4447"/>
+            </a:solidFill>
+            <a:prstDash val="solid"/>
+          </a:ln>
+        </p:spPr>
+      </p:sp>
+      <p:sp>
+        <p:nvSpPr>
+          <p:cNvPr id="6" name="Text 4"/>
+          <p:cNvSpPr/>
+          <p:nvPr/>
+        </p:nvSpPr>
+        <p:spPr>
+          <a:xfrm>
+            <a:off x="692051" y="1074093"/>
+            <a:ext cx="7973389" cy="230981"/>
+          </a:xfrm>
+          <a:prstGeom prst="rect">
+            <a:avLst/>
+          </a:prstGeom>
+          <a:noFill/>
+          <a:ln/>
+        </p:spPr>
+        <p:txBody>
+          <a:bodyPr wrap="square" lIns="0" tIns="0" rIns="0" bIns="0" rtlCol="0" anchor="t"/>
+          <a:lstStyle/>
+          <a:p>
+            <a:pPr algn="l" indent="0" marL="0">
+              <a:lnSpc>
+                <a:spcPts val="1820"/>
+              </a:lnSpc>
+              <a:spcBef>
+                <a:spcPts val="300"/>
+              </a:spcBef>
+              <a:spcAft>
+                <a:spcPts val="300"/>
+              </a:spcAft>
+              <a:buNone/>
+            </a:pPr>
+            <a:r>
+              <a:rPr lang="en-US" sz="1300" b="1" i="1" dirty="0">
+                <a:solidFill>
+                  <a:srgbClr val="1C2833"/>
+                </a:solidFill>
+                <a:latin typeface="Georgia" pitchFamily="34" charset="0"/>
+                <a:ea typeface="Georgia" pitchFamily="34" charset="-122"/>
+                <a:cs typeface="Georgia" pitchFamily="34" charset="-120"/>
+              </a:rPr>
+              <a:t>The walk has three rules:</a:t>
+            </a:r>
+            <a:endParaRPr lang="en-US" sz="1300" dirty="0"/>
+          </a:p>
+        </p:txBody>
+      </p:sp>
+      <p:sp>
+        <p:nvSpPr>
+          <p:cNvPr id="7" name="Text 5"/>
+          <p:cNvSpPr/>
+          <p:nvPr/>
+        </p:nvSpPr>
+        <p:spPr>
+          <a:xfrm>
+            <a:off x="692051" y="1343174"/>
+            <a:ext cx="7973389" cy="230981"/>
+          </a:xfrm>
+          <a:prstGeom prst="rect">
+            <a:avLst/>
+          </a:prstGeom>
+          <a:noFill/>
+          <a:ln/>
+        </p:spPr>
+        <p:txBody>
+          <a:bodyPr wrap="square" lIns="0" tIns="0" rIns="0" bIns="0" rtlCol="0" anchor="t"/>
+          <a:lstStyle/>
+          <a:p>
+            <a:pPr algn="l" indent="0" marL="0">
+              <a:lnSpc>
+                <a:spcPts val="1820"/>
+              </a:lnSpc>
+              <a:spcBef>
+                <a:spcPts val="300"/>
+              </a:spcBef>
+              <a:spcAft>
+                <a:spcPts val="300"/>
+              </a:spcAft>
+              <a:buNone/>
+            </a:pPr>
+            <a:r>
+              <a:rPr lang="en-US" sz="1300" i="1" dirty="0">
+                <a:solidFill>
+                  <a:srgbClr val="1C2833"/>
+                </a:solidFill>
+                <a:latin typeface="Georgia" pitchFamily="34" charset="0"/>
+                <a:ea typeface="Georgia" pitchFamily="34" charset="-122"/>
+                <a:cs typeface="Georgia" pitchFamily="34" charset="-120"/>
+              </a:rPr>
+              <a:t>Stay with your partner.</a:t>
+            </a:r>
+            <a:endParaRPr lang="en-US" sz="1300" dirty="0"/>
+          </a:p>
+        </p:txBody>
+      </p:sp>
+      <p:sp>
+        <p:nvSpPr>
+          <p:cNvPr id="8" name="Text 6"/>
+          <p:cNvSpPr/>
+          <p:nvPr/>
+        </p:nvSpPr>
+        <p:spPr>
+          <a:xfrm>
+            <a:off x="692051" y="1612255"/>
+            <a:ext cx="7973389" cy="230981"/>
+          </a:xfrm>
+          <a:prstGeom prst="rect">
+            <a:avLst/>
+          </a:prstGeom>
+          <a:noFill/>
+          <a:ln/>
+        </p:spPr>
+        <p:txBody>
+          <a:bodyPr wrap="square" lIns="0" tIns="0" rIns="0" bIns="0" rtlCol="0" anchor="t"/>
+          <a:lstStyle/>
+          <a:p>
+            <a:pPr algn="l" indent="0" marL="0">
+              <a:lnSpc>
+                <a:spcPts val="1820"/>
+              </a:lnSpc>
+              <a:spcBef>
+                <a:spcPts val="300"/>
+              </a:spcBef>
+              <a:spcAft>
+                <a:spcPts val="300"/>
+              </a:spcAft>
+              <a:buNone/>
+            </a:pPr>
+            <a:r>
+              <a:rPr lang="en-US" sz="1300" i="1" dirty="0">
+                <a:solidFill>
+                  <a:srgbClr val="1C2833"/>
+                </a:solidFill>
+                <a:latin typeface="Georgia" pitchFamily="34" charset="0"/>
+                <a:ea typeface="Georgia" pitchFamily="34" charset="-122"/>
+                <a:cs typeface="Georgia" pitchFamily="34" charset="-120"/>
+              </a:rPr>
+              <a:t>Write down one specific observation — with time and place.</a:t>
+            </a:r>
+            <a:endParaRPr lang="en-US" sz="1300" dirty="0"/>
+          </a:p>
+        </p:txBody>
+      </p:sp>
+      <p:sp>
+        <p:nvSpPr>
+          <p:cNvPr id="9" name="Text 7"/>
+          <p:cNvSpPr/>
+          <p:nvPr/>
+        </p:nvSpPr>
+        <p:spPr>
+          <a:xfrm>
+            <a:off x="692051" y="1881336"/>
+            <a:ext cx="7973389" cy="230981"/>
+          </a:xfrm>
+          <a:prstGeom prst="rect">
+            <a:avLst/>
+          </a:prstGeom>
+          <a:noFill/>
+          <a:ln/>
+        </p:spPr>
+        <p:txBody>
+          <a:bodyPr wrap="square" lIns="0" tIns="0" rIns="0" bIns="0" rtlCol="0" anchor="t"/>
+          <a:lstStyle/>
+          <a:p>
+            <a:pPr algn="l" indent="0" marL="0">
+              <a:lnSpc>
+                <a:spcPts val="1820"/>
+              </a:lnSpc>
+              <a:spcBef>
+                <a:spcPts val="300"/>
+              </a:spcBef>
+              <a:spcAft>
+                <a:spcPts val="300"/>
+              </a:spcAft>
+              <a:buNone/>
+            </a:pPr>
+            <a:r>
+              <a:rPr lang="en-US" sz="1300" i="1" dirty="0">
+                <a:solidFill>
+                  <a:srgbClr val="1C2833"/>
+                </a:solidFill>
+                <a:latin typeface="Georgia" pitchFamily="34" charset="0"/>
+                <a:ea typeface="Georgia" pitchFamily="34" charset="-122"/>
+                <a:cs typeface="Georgia" pitchFamily="34" charset="-120"/>
+              </a:rPr>
+              <a:t>Draft one specific action you can actually do.</a:t>
+            </a:r>
+            <a:endParaRPr lang="en-US" sz="1300" dirty="0"/>
+          </a:p>
+        </p:txBody>
+      </p:sp>
+      <p:sp>
+        <p:nvSpPr>
+          <p:cNvPr id="10" name="Text 8"/>
+          <p:cNvSpPr/>
+          <p:nvPr/>
+        </p:nvSpPr>
+        <p:spPr>
+          <a:xfrm>
+            <a:off x="692051" y="2150418"/>
+            <a:ext cx="7973389" cy="230981"/>
+          </a:xfrm>
+          <a:prstGeom prst="rect">
+            <a:avLst/>
+          </a:prstGeom>
+          <a:noFill/>
+          <a:ln/>
+        </p:spPr>
+        <p:txBody>
+          <a:bodyPr wrap="square" lIns="0" tIns="0" rIns="0" bIns="0" rtlCol="0" anchor="t"/>
+          <a:lstStyle/>
+          <a:p>
+            <a:pPr algn="l" indent="0" marL="0">
+              <a:lnSpc>
+                <a:spcPts val="1820"/>
+              </a:lnSpc>
+              <a:spcBef>
+                <a:spcPts val="300"/>
+              </a:spcBef>
+              <a:spcAft>
+                <a:spcPts val="300"/>
+              </a:spcAft>
+              <a:buNone/>
+            </a:pPr>
+            <a:r>
+              <a:rPr lang="en-US" sz="1300" b="1" i="1" dirty="0">
+                <a:solidFill>
+                  <a:srgbClr val="1C2833"/>
+                </a:solidFill>
+                <a:latin typeface="Georgia" pitchFamily="34" charset="0"/>
+                <a:ea typeface="Georgia" pitchFamily="34" charset="-122"/>
+                <a:cs typeface="Georgia" pitchFamily="34" charset="-120"/>
+              </a:rPr>
+              <a:t>The action criteria:</a:t>
+            </a:r>
+            <a:endParaRPr lang="en-US" sz="1300" dirty="0"/>
+          </a:p>
+        </p:txBody>
+      </p:sp>
+      <p:sp>
+        <p:nvSpPr>
+          <p:cNvPr id="11" name="Text 9"/>
+          <p:cNvSpPr/>
+          <p:nvPr/>
+        </p:nvSpPr>
+        <p:spPr>
+          <a:xfrm>
+            <a:off x="692051" y="2419499"/>
+            <a:ext cx="7973389" cy="230981"/>
+          </a:xfrm>
+          <a:prstGeom prst="rect">
+            <a:avLst/>
+          </a:prstGeom>
+          <a:noFill/>
+          <a:ln/>
+        </p:spPr>
+        <p:txBody>
+          <a:bodyPr wrap="square" lIns="0" tIns="0" rIns="0" bIns="0" rtlCol="0" anchor="t"/>
+          <a:lstStyle/>
+          <a:p>
+            <a:pPr algn="l" indent="0" marL="0">
+              <a:lnSpc>
+                <a:spcPts val="1820"/>
+              </a:lnSpc>
+              <a:spcBef>
+                <a:spcPts val="300"/>
+              </a:spcBef>
+              <a:spcAft>
+                <a:spcPts val="300"/>
+              </a:spcAft>
+              <a:buNone/>
+            </a:pPr>
+            <a:r>
+              <a:rPr lang="en-US" sz="1300" i="1" dirty="0">
+                <a:solidFill>
+                  <a:srgbClr val="1C2833"/>
+                </a:solidFill>
+                <a:latin typeface="Georgia" pitchFamily="34" charset="0"/>
+                <a:ea typeface="Georgia" pitchFamily="34" charset="-122"/>
+                <a:cs typeface="Georgia" pitchFamily="34" charset="-120"/>
+              </a:rPr>
+              <a:t>Specific (says exactly what you'll do).</a:t>
+            </a:r>
+            <a:endParaRPr lang="en-US" sz="1300" dirty="0"/>
+          </a:p>
+        </p:txBody>
+      </p:sp>
+      <p:sp>
+        <p:nvSpPr>
+          <p:cNvPr id="12" name="Text 10"/>
+          <p:cNvSpPr/>
+          <p:nvPr/>
+        </p:nvSpPr>
+        <p:spPr>
+          <a:xfrm>
+            <a:off x="692051" y="2688580"/>
+            <a:ext cx="7973389" cy="230981"/>
+          </a:xfrm>
+          <a:prstGeom prst="rect">
+            <a:avLst/>
+          </a:prstGeom>
+          <a:noFill/>
+          <a:ln/>
+        </p:spPr>
+        <p:txBody>
+          <a:bodyPr wrap="square" lIns="0" tIns="0" rIns="0" bIns="0" rtlCol="0" anchor="t"/>
+          <a:lstStyle/>
+          <a:p>
+            <a:pPr algn="l" indent="0" marL="0">
+              <a:lnSpc>
+                <a:spcPts val="1820"/>
+              </a:lnSpc>
+              <a:spcBef>
+                <a:spcPts val="300"/>
+              </a:spcBef>
+              <a:spcAft>
+                <a:spcPts val="300"/>
+              </a:spcAft>
+              <a:buNone/>
+            </a:pPr>
+            <a:r>
+              <a:rPr lang="en-US" sz="1300" i="1" dirty="0">
+                <a:solidFill>
+                  <a:srgbClr val="1C2833"/>
+                </a:solidFill>
+                <a:latin typeface="Georgia" pitchFamily="34" charset="0"/>
+                <a:ea typeface="Georgia" pitchFamily="34" charset="-122"/>
+                <a:cs typeface="Georgia" pitchFamily="34" charset="-120"/>
+              </a:rPr>
+              <a:t>Doable in 14 days.</a:t>
+            </a:r>
+            <a:endParaRPr lang="en-US" sz="1300" dirty="0"/>
+          </a:p>
+        </p:txBody>
+      </p:sp>
+      <p:sp>
+        <p:nvSpPr>
+          <p:cNvPr id="13" name="Text 11"/>
+          <p:cNvSpPr/>
+          <p:nvPr/>
+        </p:nvSpPr>
+        <p:spPr>
+          <a:xfrm>
+            <a:off x="692051" y="2957661"/>
+            <a:ext cx="7973389" cy="230981"/>
+          </a:xfrm>
+          <a:prstGeom prst="rect">
+            <a:avLst/>
+          </a:prstGeom>
+          <a:noFill/>
+          <a:ln/>
+        </p:spPr>
+        <p:txBody>
+          <a:bodyPr wrap="square" lIns="0" tIns="0" rIns="0" bIns="0" rtlCol="0" anchor="t"/>
+          <a:lstStyle/>
+          <a:p>
+            <a:pPr algn="l" indent="0" marL="0">
+              <a:lnSpc>
+                <a:spcPts val="1820"/>
+              </a:lnSpc>
+              <a:spcBef>
+                <a:spcPts val="300"/>
+              </a:spcBef>
+              <a:spcAft>
+                <a:spcPts val="300"/>
+              </a:spcAft>
+              <a:buNone/>
+            </a:pPr>
+            <a:r>
+              <a:rPr lang="en-US" sz="1300" i="1" dirty="0">
+                <a:solidFill>
+                  <a:srgbClr val="1C2833"/>
+                </a:solidFill>
+                <a:latin typeface="Georgia" pitchFamily="34" charset="0"/>
+                <a:ea typeface="Georgia" pitchFamily="34" charset="-122"/>
+                <a:cs typeface="Georgia" pitchFamily="34" charset="-120"/>
+              </a:rPr>
+              <a:t>Done by you, not "by someone."</a:t>
+            </a:r>
+            <a:endParaRPr lang="en-US" sz="1300" dirty="0"/>
+          </a:p>
+        </p:txBody>
+      </p:sp>
+      <p:sp>
+        <p:nvSpPr>
+          <p:cNvPr id="14" name="Text 12"/>
+          <p:cNvSpPr/>
+          <p:nvPr/>
+        </p:nvSpPr>
+        <p:spPr>
+          <a:xfrm>
+            <a:off x="692051" y="3226743"/>
+            <a:ext cx="7973389" cy="230981"/>
+          </a:xfrm>
+          <a:prstGeom prst="rect">
+            <a:avLst/>
+          </a:prstGeom>
+          <a:noFill/>
+          <a:ln/>
+        </p:spPr>
+        <p:txBody>
+          <a:bodyPr wrap="square" lIns="0" tIns="0" rIns="0" bIns="0" rtlCol="0" anchor="t"/>
+          <a:lstStyle/>
+          <a:p>
+            <a:pPr algn="l" indent="0" marL="0">
+              <a:lnSpc>
+                <a:spcPts val="1820"/>
+              </a:lnSpc>
+              <a:spcBef>
+                <a:spcPts val="300"/>
+              </a:spcBef>
+              <a:spcAft>
+                <a:spcPts val="300"/>
+              </a:spcAft>
+              <a:buNone/>
+            </a:pPr>
+            <a:r>
+              <a:rPr lang="en-US" sz="1300" dirty="0">
+                <a:solidFill>
+                  <a:srgbClr val="1C2833"/>
+                </a:solidFill>
+                <a:latin typeface="Georgia" pitchFamily="34" charset="0"/>
+                <a:ea typeface="Georgia" pitchFamily="34" charset="-122"/>
+                <a:cs typeface="Georgia" pitchFamily="34" charset="-120"/>
+              </a:rPr>
+              <a:t>The Indic principle anchors your </a:t>
+            </a:r>
+            <a:pPr algn="l" indent="0" marL="0">
+              <a:lnSpc>
+                <a:spcPts val="1820"/>
+              </a:lnSpc>
+              <a:spcBef>
+                <a:spcPts val="300"/>
+              </a:spcBef>
+              <a:spcAft>
+                <a:spcPts val="300"/>
+              </a:spcAft>
+              <a:buNone/>
+            </a:pPr>
+            <a:r>
+              <a:rPr lang="en-US" sz="1300" i="1" dirty="0">
+                <a:solidFill>
+                  <a:srgbClr val="1C2833"/>
+                </a:solidFill>
+                <a:latin typeface="Georgia" pitchFamily="34" charset="0"/>
+                <a:ea typeface="Georgia" pitchFamily="34" charset="-122"/>
+                <a:cs typeface="Georgia" pitchFamily="34" charset="-120"/>
+              </a:rPr>
+              <a:t>why</a:t>
+            </a:r>
+            <a:pPr algn="l" indent="0" marL="0">
+              <a:lnSpc>
+                <a:spcPts val="1820"/>
+              </a:lnSpc>
+              <a:spcBef>
+                <a:spcPts val="300"/>
+              </a:spcBef>
+              <a:spcAft>
+                <a:spcPts val="300"/>
+              </a:spcAft>
+              <a:buNone/>
+            </a:pPr>
+            <a:r>
+              <a:rPr lang="en-US" sz="1300" dirty="0">
+                <a:solidFill>
+                  <a:srgbClr val="1C2833"/>
+                </a:solidFill>
+                <a:latin typeface="Georgia" pitchFamily="34" charset="0"/>
+                <a:ea typeface="Georgia" pitchFamily="34" charset="-122"/>
+                <a:cs typeface="Georgia" pitchFamily="34" charset="-120"/>
+              </a:rPr>
+              <a:t>. The observation anchors your </a:t>
+            </a:r>
+            <a:pPr algn="l" indent="0" marL="0">
+              <a:lnSpc>
+                <a:spcPts val="1820"/>
+              </a:lnSpc>
+              <a:spcBef>
+                <a:spcPts val="300"/>
+              </a:spcBef>
+              <a:spcAft>
+                <a:spcPts val="300"/>
+              </a:spcAft>
+              <a:buNone/>
+            </a:pPr>
+            <a:r>
+              <a:rPr lang="en-US" sz="1300" i="1" dirty="0">
+                <a:solidFill>
+                  <a:srgbClr val="1C2833"/>
+                </a:solidFill>
+                <a:latin typeface="Georgia" pitchFamily="34" charset="0"/>
+                <a:ea typeface="Georgia" pitchFamily="34" charset="-122"/>
+                <a:cs typeface="Georgia" pitchFamily="34" charset="-120"/>
+              </a:rPr>
+              <a:t>what</a:t>
+            </a:r>
+            <a:pPr algn="l" indent="0" marL="0">
+              <a:lnSpc>
+                <a:spcPts val="1820"/>
+              </a:lnSpc>
+              <a:spcBef>
+                <a:spcPts val="300"/>
+              </a:spcBef>
+              <a:spcAft>
+                <a:spcPts val="300"/>
+              </a:spcAft>
+              <a:buNone/>
+            </a:pPr>
+            <a:r>
+              <a:rPr lang="en-US" sz="1300" dirty="0">
+                <a:solidFill>
+                  <a:srgbClr val="1C2833"/>
+                </a:solidFill>
+                <a:latin typeface="Georgia" pitchFamily="34" charset="0"/>
+                <a:ea typeface="Georgia" pitchFamily="34" charset="-122"/>
+                <a:cs typeface="Georgia" pitchFamily="34" charset="-120"/>
+              </a:rPr>
+              <a:t>. The action is the actual </a:t>
+            </a:r>
+            <a:pPr algn="l" indent="0" marL="0">
+              <a:lnSpc>
+                <a:spcPts val="1820"/>
+              </a:lnSpc>
+              <a:spcBef>
+                <a:spcPts val="300"/>
+              </a:spcBef>
+              <a:spcAft>
+                <a:spcPts val="300"/>
+              </a:spcAft>
+              <a:buNone/>
+            </a:pPr>
+            <a:r>
+              <a:rPr lang="en-US" sz="1300" i="1" dirty="0">
+                <a:solidFill>
+                  <a:srgbClr val="1C2833"/>
+                </a:solidFill>
+                <a:latin typeface="Georgia" pitchFamily="34" charset="0"/>
+                <a:ea typeface="Georgia" pitchFamily="34" charset="-122"/>
+                <a:cs typeface="Georgia" pitchFamily="34" charset="-120"/>
+              </a:rPr>
+              <a:t>yajña</a:t>
+            </a:r>
+            <a:pPr algn="l" indent="0" marL="0">
+              <a:lnSpc>
+                <a:spcPts val="1820"/>
+              </a:lnSpc>
+              <a:spcBef>
+                <a:spcPts val="300"/>
+              </a:spcBef>
+              <a:spcAft>
+                <a:spcPts val="300"/>
+              </a:spcAft>
+              <a:buNone/>
+            </a:pPr>
+            <a:r>
+              <a:rPr lang="en-US" sz="1300" dirty="0">
+                <a:solidFill>
+                  <a:srgbClr val="1C2833"/>
+                </a:solidFill>
+                <a:latin typeface="Georgia" pitchFamily="34" charset="0"/>
+                <a:ea typeface="Georgia" pitchFamily="34" charset="-122"/>
+                <a:cs typeface="Georgia" pitchFamily="34" charset="-120"/>
+              </a:rPr>
+              <a:t>.</a:t>
+            </a:r>
+            <a:endParaRPr lang="en-US" sz="1300" dirty="0"/>
+          </a:p>
+        </p:txBody>
+      </p:sp>
+      <p:sp>
+        <p:nvSpPr>
+          <p:cNvPr id="15" name="Text 13"/>
+          <p:cNvSpPr/>
+          <p:nvPr/>
+        </p:nvSpPr>
+        <p:spPr>
+          <a:xfrm>
+            <a:off x="406301" y="4434929"/>
+            <a:ext cx="8498026" cy="213271"/>
+          </a:xfrm>
+          <a:prstGeom prst="rect">
+            <a:avLst/>
+          </a:prstGeom>
+          <a:noFill/>
+          <a:ln/>
+        </p:spPr>
+        <p:txBody>
+          <a:bodyPr wrap="square" lIns="0" tIns="0" rIns="0" bIns="0" rtlCol="0" anchor="t"/>
+          <a:lstStyle/>
+          <a:p>
+            <a:pPr algn="l" indent="0" marL="0">
+              <a:lnSpc>
+                <a:spcPts val="1680"/>
+              </a:lnSpc>
+              <a:spcBef>
+                <a:spcPts val="300"/>
+              </a:spcBef>
+              <a:spcAft>
+                <a:spcPts val="300"/>
+              </a:spcAft>
+              <a:buNone/>
+            </a:pPr>
+            <a:r>
+              <a:rPr lang="en-US" sz="1200" dirty="0">
+                <a:solidFill>
+                  <a:srgbClr val="1C2833"/>
+                </a:solidFill>
+                <a:latin typeface="Arial" pitchFamily="34" charset="0"/>
+                <a:ea typeface="Arial" pitchFamily="34" charset="-122"/>
+                <a:cs typeface="Arial" pitchFamily="34" charset="-120"/>
+              </a:rPr>
+              <a:t>Middle ·  · IKS Curriculum</a:t>
+            </a:r>
+            <a:endParaRPr lang="en-US" sz="1200" dirty="0"/>
+          </a:p>
+        </p:txBody>
+      </p:sp>
+    </p:spTree>
+  </p:cSld>
+  <p:clrMapOvr>
+    <a:masterClrMapping/>
+  </p:clrMapOvr>
+</p:sld>
+</file>
+
+<file path=ppt/slides/slide16.xml><?xml version="1.0" encoding="utf-8"?>
+<p:sld xmlns:a="http://schemas.openxmlformats.org/drawingml/2006/main" xmlns:r="http://schemas.openxmlformats.org/officeDocument/2006/relationships" xmlns:p="http://schemas.openxmlformats.org/presentationml/2006/main">
+  <p:cSld name="Slide 16">
+    <p:bg>
+      <p:bgPr>
+        <a:solidFill>
+          <a:srgbClr val="FFFFFF"/>
+        </a:solidFill>
+      </p:bgPr>
+    </p:bg>
+    <p:spTree>
+      <p:nvGrpSpPr>
+        <p:cNvPr id="1" name=""/>
+        <p:cNvGrpSpPr/>
+        <p:nvPr/>
+      </p:nvGrpSpPr>
+      <p:grpSpPr>
+        <a:xfrm>
+          <a:off x="0" y="0"/>
+          <a:ext cx="0" cy="0"/>
+          <a:chOff x="0" y="0"/>
+          <a:chExt cx="0" cy="0"/>
+        </a:xfrm>
+      </p:grpSpPr>
+      <p:sp>
+        <p:nvSpPr>
+          <p:cNvPr id="2" name="Text 0"/>
+          <p:cNvSpPr/>
+          <p:nvPr/>
+        </p:nvSpPr>
+        <p:spPr>
+          <a:xfrm>
+            <a:off x="0" y="0"/>
+            <a:ext cx="9144000" cy="101501"/>
+          </a:xfrm>
+          <a:prstGeom prst="rect">
+            <a:avLst/>
+          </a:prstGeom>
+          <a:solidFill>
+            <a:srgbClr val="277884"/>
+          </a:solidFill>
+          <a:ln/>
+        </p:spPr>
+        <p:txBody>
+          <a:bodyPr wrap="square" rtlCol="0" anchor="ctr"/>
+          <a:lstStyle/>
+          <a:p>
+            <a:pPr indent="0" marL="0">
+              <a:buNone/>
+            </a:pPr>
+            <a:endParaRPr lang="en-US" dirty="0"/>
+          </a:p>
+        </p:txBody>
+      </p:sp>
+      <p:sp>
+        <p:nvSpPr>
+          <p:cNvPr id="3" name="Text 1"/>
+          <p:cNvSpPr/>
+          <p:nvPr/>
+        </p:nvSpPr>
+        <p:spPr>
+          <a:xfrm>
+            <a:off x="406301" y="457051"/>
+            <a:ext cx="8498026" cy="274290"/>
+          </a:xfrm>
+          <a:prstGeom prst="rect">
+            <a:avLst/>
+          </a:prstGeom>
+          <a:noFill/>
+          <a:ln/>
+        </p:spPr>
+        <p:txBody>
+          <a:bodyPr wrap="square" lIns="0" tIns="0" rIns="0" bIns="0" rtlCol="0" anchor="t"/>
+          <a:lstStyle/>
+          <a:p>
+            <a:pPr algn="l" indent="0" marL="0">
+              <a:lnSpc>
+                <a:spcPts val="2160"/>
+              </a:lnSpc>
+              <a:spcBef>
+                <a:spcPts val="600"/>
+              </a:spcBef>
+              <a:spcAft>
+                <a:spcPts val="800"/>
+              </a:spcAft>
+              <a:buNone/>
+            </a:pPr>
+            <a:r>
+              <a:rPr lang="en-US" sz="1800" b="1" dirty="0">
+                <a:solidFill>
+                  <a:srgbClr val="FE4447"/>
+                </a:solidFill>
+                <a:latin typeface="Georgia" pitchFamily="34" charset="0"/>
+                <a:ea typeface="Georgia" pitchFamily="34" charset="-122"/>
+                <a:cs typeface="Georgia" pitchFamily="34" charset="-120"/>
+              </a:rPr>
+              <a:t>Homework</a:t>
+            </a:r>
+            <a:endParaRPr lang="en-US" sz="1800" dirty="0"/>
+          </a:p>
+        </p:txBody>
+      </p:sp>
+      <p:sp>
+        <p:nvSpPr>
+          <p:cNvPr id="4" name="Text 2"/>
+          <p:cNvSpPr/>
+          <p:nvPr/>
+        </p:nvSpPr>
+        <p:spPr>
+          <a:xfrm>
+            <a:off x="634901" y="883593"/>
+            <a:ext cx="8102798" cy="1257002"/>
+          </a:xfrm>
+          <a:prstGeom prst="rect">
+            <a:avLst/>
+          </a:prstGeom>
+          <a:noFill/>
+          <a:ln/>
+        </p:spPr>
+        <p:txBody>
+          <a:bodyPr wrap="square" lIns="0" tIns="0" rIns="0" bIns="0" rtlCol="0" anchor="t"/>
+          <a:lstStyle/>
+          <a:p>
+            <a:pPr algn="l" marL="342900" indent="-342900">
+              <a:lnSpc>
+                <a:spcPts val="1620"/>
+              </a:lnSpc>
+              <a:spcAft>
+                <a:spcPts val="300"/>
+              </a:spcAft>
+              <a:buSzPct val="100000"/>
+              <a:buChar char="•"/>
+            </a:pPr>
+            <a:r>
+              <a:rPr lang="en-US" sz="1200" dirty="0">
+                <a:solidFill>
+                  <a:srgbClr val="1C2833"/>
+                </a:solidFill>
+                <a:latin typeface="Arial" pitchFamily="34" charset="0"/>
+                <a:ea typeface="Arial" pitchFamily="34" charset="-122"/>
+                <a:cs typeface="Arial" pitchFamily="34" charset="-120"/>
+              </a:rPr>
+              <a:t>Finalise your pitch:</a:t>
+            </a:r>
+            <a:endParaRPr lang="en-US" sz="1200" dirty="0"/>
+          </a:p>
+          <a:p>
+            <a:pPr algn="l" marL="342900" indent="-342900">
+              <a:lnSpc>
+                <a:spcPts val="1620"/>
+              </a:lnSpc>
+              <a:spcAft>
+                <a:spcPts val="300"/>
+              </a:spcAft>
+              <a:buSzPct val="100000"/>
+              <a:buChar char="•"/>
+            </a:pPr>
+            <a:r>
+              <a:rPr lang="en-US" sz="1200" dirty="0">
+                <a:solidFill>
+                  <a:srgbClr val="1C2833"/>
+                </a:solidFill>
+                <a:latin typeface="Arial" pitchFamily="34" charset="0"/>
+                <a:ea typeface="Arial" pitchFamily="34" charset="-122"/>
+                <a:cs typeface="Arial" pitchFamily="34" charset="-120"/>
+              </a:rPr>
+              <a:t>3 minutes max.</a:t>
+            </a:r>
+            <a:endParaRPr lang="en-US" sz="1200" dirty="0"/>
+          </a:p>
+          <a:p>
+            <a:pPr algn="l" marL="342900" indent="-342900">
+              <a:lnSpc>
+                <a:spcPts val="1620"/>
+              </a:lnSpc>
+              <a:spcAft>
+                <a:spcPts val="300"/>
+              </a:spcAft>
+              <a:buSzPct val="100000"/>
+              <a:buChar char="•"/>
+            </a:pPr>
+            <a:r>
+              <a:rPr lang="en-US" sz="1200" dirty="0">
+                <a:solidFill>
+                  <a:srgbClr val="1C2833"/>
+                </a:solidFill>
+                <a:latin typeface="Arial" pitchFamily="34" charset="0"/>
+                <a:ea typeface="Arial" pitchFamily="34" charset="-122"/>
+                <a:cs typeface="Arial" pitchFamily="34" charset="-120"/>
+              </a:rPr>
+              <a:t>Both partners speak.</a:t>
+            </a:r>
+            <a:endParaRPr lang="en-US" sz="1200" dirty="0"/>
+          </a:p>
+          <a:p>
+            <a:pPr algn="l" marL="342900" indent="-342900">
+              <a:lnSpc>
+                <a:spcPts val="1620"/>
+              </a:lnSpc>
+              <a:spcAft>
+                <a:spcPts val="300"/>
+              </a:spcAft>
+              <a:buSzPct val="100000"/>
+              <a:buChar char="•"/>
+            </a:pPr>
+            <a:r>
+              <a:rPr lang="en-US" sz="1200" dirty="0">
+                <a:solidFill>
+                  <a:srgbClr val="1C2833"/>
+                </a:solidFill>
+                <a:latin typeface="Arial" pitchFamily="34" charset="0"/>
+                <a:ea typeface="Arial" pitchFamily="34" charset="-122"/>
+                <a:cs typeface="Arial" pitchFamily="34" charset="-120"/>
+              </a:rPr>
+              <a:t>Open with the principle. Show the observation. End with the action.</a:t>
+            </a:r>
+            <a:endParaRPr lang="en-US" sz="1200" dirty="0"/>
+          </a:p>
+          <a:p>
+            <a:pPr algn="l" marL="342900" indent="-342900">
+              <a:lnSpc>
+                <a:spcPts val="1620"/>
+              </a:lnSpc>
+              <a:spcAft>
+                <a:spcPts val="300"/>
+              </a:spcAft>
+              <a:buSzPct val="100000"/>
+              <a:buChar char="•"/>
+            </a:pPr>
+            <a:r>
+              <a:rPr lang="en-US" sz="1200" dirty="0">
+                <a:solidFill>
+                  <a:srgbClr val="1C2833"/>
+                </a:solidFill>
+                <a:latin typeface="Arial" pitchFamily="34" charset="0"/>
+                <a:ea typeface="Arial" pitchFamily="34" charset="-122"/>
+                <a:cs typeface="Arial" pitchFamily="34" charset="-120"/>
+              </a:rPr>
+              <a:t>Bring your artefact (poster / audio file on a device / printed plan).</a:t>
+            </a:r>
+            <a:endParaRPr lang="en-US" sz="1200" dirty="0"/>
+          </a:p>
+        </p:txBody>
+      </p:sp>
+      <p:sp>
+        <p:nvSpPr>
+          <p:cNvPr id="5" name="Text 3"/>
+          <p:cNvSpPr/>
+          <p:nvPr/>
+        </p:nvSpPr>
+        <p:spPr>
+          <a:xfrm>
+            <a:off x="406301" y="4434929"/>
+            <a:ext cx="8498026" cy="213271"/>
+          </a:xfrm>
+          <a:prstGeom prst="rect">
+            <a:avLst/>
+          </a:prstGeom>
+          <a:noFill/>
+          <a:ln/>
+        </p:spPr>
+        <p:txBody>
+          <a:bodyPr wrap="square" lIns="0" tIns="0" rIns="0" bIns="0" rtlCol="0" anchor="t"/>
+          <a:lstStyle/>
+          <a:p>
+            <a:pPr algn="l" indent="0" marL="0">
+              <a:lnSpc>
+                <a:spcPts val="1680"/>
+              </a:lnSpc>
+              <a:spcBef>
+                <a:spcPts val="300"/>
+              </a:spcBef>
+              <a:spcAft>
+                <a:spcPts val="300"/>
+              </a:spcAft>
+              <a:buNone/>
+            </a:pPr>
+            <a:r>
+              <a:rPr lang="en-US" sz="1200" dirty="0">
+                <a:solidFill>
+                  <a:srgbClr val="1C2833"/>
+                </a:solidFill>
+                <a:latin typeface="Arial" pitchFamily="34" charset="0"/>
+                <a:ea typeface="Arial" pitchFamily="34" charset="-122"/>
+                <a:cs typeface="Arial" pitchFamily="34" charset="-120"/>
+              </a:rPr>
+              <a:t>Middle ·  · IKS Curriculum</a:t>
+            </a:r>
+            <a:endParaRPr lang="en-US" sz="1200" dirty="0"/>
+          </a:p>
+        </p:txBody>
+      </p:sp>
+    </p:spTree>
+  </p:cSld>
+  <p:clrMapOvr>
+    <a:masterClrMapping/>
+  </p:clrMapOvr>
+</p:sld>
+</file>
+
+<file path=ppt/slides/slide17.xml><?xml version="1.0" encoding="utf-8"?>
+<p:sld xmlns:a="http://schemas.openxmlformats.org/drawingml/2006/main" xmlns:r="http://schemas.openxmlformats.org/officeDocument/2006/relationships" xmlns:p="http://schemas.openxmlformats.org/presentationml/2006/main">
+  <p:cSld name="Slide 17">
+    <p:bg>
+      <p:bgPr>
+        <a:solidFill>
+          <a:srgbClr val="FFFFFF"/>
+        </a:solidFill>
+      </p:bgPr>
+    </p:bg>
+    <p:spTree>
+      <p:nvGrpSpPr>
+        <p:cNvPr id="1" name=""/>
+        <p:cNvGrpSpPr/>
+        <p:nvPr/>
+      </p:nvGrpSpPr>
+      <p:grpSpPr>
+        <a:xfrm>
+          <a:off x="0" y="0"/>
+          <a:ext cx="0" cy="0"/>
+          <a:chOff x="0" y="0"/>
+          <a:chExt cx="0" cy="0"/>
+        </a:xfrm>
+      </p:grpSpPr>
+      <p:sp>
+        <p:nvSpPr>
+          <p:cNvPr id="2" name="Text 0"/>
+          <p:cNvSpPr/>
+          <p:nvPr/>
+        </p:nvSpPr>
+        <p:spPr>
+          <a:xfrm>
+            <a:off x="0" y="0"/>
+            <a:ext cx="9144000" cy="101501"/>
+          </a:xfrm>
+          <a:prstGeom prst="rect">
+            <a:avLst/>
+          </a:prstGeom>
+          <a:solidFill>
+            <a:srgbClr val="277884"/>
+          </a:solidFill>
+          <a:ln/>
+        </p:spPr>
+        <p:txBody>
+          <a:bodyPr wrap="square" rtlCol="0" anchor="ctr"/>
+          <a:lstStyle/>
+          <a:p>
+            <a:pPr indent="0" marL="0">
+              <a:buNone/>
+            </a:pPr>
+            <a:endParaRPr lang="en-US" dirty="0"/>
+          </a:p>
+        </p:txBody>
+      </p:sp>
+      <p:sp>
+        <p:nvSpPr>
+          <p:cNvPr id="3" name="Text 1"/>
+          <p:cNvSpPr/>
+          <p:nvPr/>
+        </p:nvSpPr>
+        <p:spPr>
+          <a:xfrm>
+            <a:off x="406301" y="457051"/>
+            <a:ext cx="8498026" cy="274290"/>
+          </a:xfrm>
+          <a:prstGeom prst="rect">
+            <a:avLst/>
+          </a:prstGeom>
+          <a:noFill/>
+          <a:ln/>
+        </p:spPr>
+        <p:txBody>
+          <a:bodyPr wrap="square" lIns="0" tIns="0" rIns="0" bIns="0" rtlCol="0" anchor="t"/>
+          <a:lstStyle/>
+          <a:p>
+            <a:pPr algn="l" indent="0" marL="0">
+              <a:lnSpc>
+                <a:spcPts val="2160"/>
+              </a:lnSpc>
+              <a:spcBef>
+                <a:spcPts val="600"/>
+              </a:spcBef>
+              <a:spcAft>
+                <a:spcPts val="800"/>
+              </a:spcAft>
+              <a:buNone/>
+            </a:pPr>
+            <a:r>
+              <a:rPr lang="en-US" sz="1800" b="1" dirty="0">
+                <a:solidFill>
+                  <a:srgbClr val="FE4447"/>
+                </a:solidFill>
+                <a:latin typeface="Georgia" pitchFamily="34" charset="0"/>
+                <a:ea typeface="Georgia" pitchFamily="34" charset="-122"/>
+                <a:cs typeface="Georgia" pitchFamily="34" charset="-120"/>
+              </a:rPr>
+              <a:t>Differentiation</a:t>
+            </a:r>
+            <a:endParaRPr lang="en-US" sz="1800" dirty="0"/>
+          </a:p>
+        </p:txBody>
+      </p:sp>
+      <p:sp>
+        <p:nvSpPr>
+          <p:cNvPr id="4" name="Text 2"/>
+          <p:cNvSpPr/>
+          <p:nvPr/>
+        </p:nvSpPr>
+        <p:spPr>
+          <a:xfrm>
+            <a:off x="634901" y="883593"/>
+            <a:ext cx="8102798" cy="937022"/>
+          </a:xfrm>
+          <a:prstGeom prst="rect">
+            <a:avLst/>
+          </a:prstGeom>
+          <a:noFill/>
+          <a:ln/>
+        </p:spPr>
+        <p:txBody>
+          <a:bodyPr wrap="square" lIns="0" tIns="0" rIns="0" bIns="0" rtlCol="0" anchor="t"/>
+          <a:lstStyle/>
+          <a:p>
+            <a:pPr algn="l" marL="342900" indent="-342900">
+              <a:lnSpc>
+                <a:spcPts val="1620"/>
+              </a:lnSpc>
+              <a:spcAft>
+                <a:spcPts val="300"/>
+              </a:spcAft>
+              <a:buSzPct val="100000"/>
+              <a:buChar char="•"/>
+            </a:pPr>
+            <a:r>
+              <a:rPr lang="en-US" sz="1200" b="1" dirty="0">
+                <a:solidFill>
+                  <a:srgbClr val="1C2833"/>
+                </a:solidFill>
+                <a:latin typeface="Arial" pitchFamily="34" charset="0"/>
+                <a:ea typeface="Arial" pitchFamily="34" charset="-122"/>
+                <a:cs typeface="Arial" pitchFamily="34" charset="-120"/>
+              </a:rPr>
+              <a:t>One tier up:</a:t>
+            </a:r>
+            <a:pPr algn="l" indent="0" marL="0">
+              <a:lnSpc>
+                <a:spcPts val="1620"/>
+              </a:lnSpc>
+              <a:spcAft>
+                <a:spcPts val="300"/>
+              </a:spcAft>
+              <a:buNone/>
+            </a:pPr>
+            <a:r>
+              <a:rPr lang="en-US" sz="1200" dirty="0">
+                <a:solidFill>
+                  <a:srgbClr val="1C2833"/>
+                </a:solidFill>
+                <a:latin typeface="Arial" pitchFamily="34" charset="0"/>
+                <a:ea typeface="Arial" pitchFamily="34" charset="-122"/>
+                <a:cs typeface="Arial" pitchFamily="34" charset="-120"/>
+              </a:rPr>
+              <a:t> Add a "measurement" to your action — how will you know whether it worked? (E.g. </a:t>
+            </a:r>
+            <a:pPr algn="l" indent="0" marL="0">
+              <a:lnSpc>
+                <a:spcPts val="1620"/>
+              </a:lnSpc>
+              <a:spcAft>
+                <a:spcPts val="300"/>
+              </a:spcAft>
+              <a:buNone/>
+            </a:pPr>
+            <a:r>
+              <a:rPr lang="en-US" sz="1200" i="1" dirty="0">
+                <a:solidFill>
+                  <a:srgbClr val="1C2833"/>
+                </a:solidFill>
+                <a:latin typeface="Arial" pitchFamily="34" charset="0"/>
+                <a:ea typeface="Arial" pitchFamily="34" charset="-122"/>
+                <a:cs typeface="Arial" pitchFamily="34" charset="-120"/>
+              </a:rPr>
+              <a:t>"By Day 14, 5 fewer cars idling at pick-up."</a:t>
+            </a:r>
+            <a:pPr algn="l" indent="0" marL="0">
+              <a:lnSpc>
+                <a:spcPts val="1620"/>
+              </a:lnSpc>
+              <a:spcAft>
+                <a:spcPts val="300"/>
+              </a:spcAft>
+              <a:buNone/>
+            </a:pPr>
+            <a:r>
+              <a:rPr lang="en-US" sz="1200" dirty="0">
+                <a:solidFill>
+                  <a:srgbClr val="1C2833"/>
+                </a:solidFill>
+                <a:latin typeface="Arial" pitchFamily="34" charset="0"/>
+                <a:ea typeface="Arial" pitchFamily="34" charset="-122"/>
+                <a:cs typeface="Arial" pitchFamily="34" charset="-120"/>
+              </a:rPr>
+              <a:t>) Measured actions are stronger.</a:t>
+            </a:r>
+            <a:endParaRPr lang="en-US" sz="1200" dirty="0"/>
+          </a:p>
+          <a:p>
+            <a:pPr algn="l" marL="342900" indent="-342900">
+              <a:lnSpc>
+                <a:spcPts val="1620"/>
+              </a:lnSpc>
+              <a:spcAft>
+                <a:spcPts val="300"/>
+              </a:spcAft>
+              <a:buSzPct val="100000"/>
+              <a:buChar char="•"/>
+            </a:pPr>
+            <a:r>
+              <a:rPr lang="en-US" sz="1200" b="1" dirty="0">
+                <a:solidFill>
+                  <a:srgbClr val="1C2833"/>
+                </a:solidFill>
+                <a:latin typeface="Arial" pitchFamily="34" charset="0"/>
+                <a:ea typeface="Arial" pitchFamily="34" charset="-122"/>
+                <a:cs typeface="Arial" pitchFamily="34" charset="-120"/>
+              </a:rPr>
+              <a:t>One tier down:</a:t>
+            </a:r>
+            <a:pPr algn="l" indent="0" marL="0">
+              <a:lnSpc>
+                <a:spcPts val="1620"/>
+              </a:lnSpc>
+              <a:spcAft>
+                <a:spcPts val="300"/>
+              </a:spcAft>
+              <a:buNone/>
+            </a:pPr>
+            <a:r>
+              <a:rPr lang="en-US" sz="1200" dirty="0">
+                <a:solidFill>
+                  <a:srgbClr val="1C2833"/>
+                </a:solidFill>
+                <a:latin typeface="Arial" pitchFamily="34" charset="0"/>
+                <a:ea typeface="Arial" pitchFamily="34" charset="-122"/>
+                <a:cs typeface="Arial" pitchFamily="34" charset="-120"/>
+              </a:rPr>
+              <a:t> Stick to one observation and one action. Skip the measurement. The principle + observation + action is enough.</a:t>
+            </a:r>
+            <a:endParaRPr lang="en-US" sz="1200" dirty="0"/>
+          </a:p>
+        </p:txBody>
+      </p:sp>
+      <p:sp>
+        <p:nvSpPr>
+          <p:cNvPr id="5" name="Text 3"/>
+          <p:cNvSpPr/>
+          <p:nvPr/>
+        </p:nvSpPr>
+        <p:spPr>
+          <a:xfrm>
+            <a:off x="406301" y="4434929"/>
+            <a:ext cx="8498026" cy="213271"/>
+          </a:xfrm>
+          <a:prstGeom prst="rect">
+            <a:avLst/>
+          </a:prstGeom>
+          <a:noFill/>
+          <a:ln/>
+        </p:spPr>
+        <p:txBody>
+          <a:bodyPr wrap="square" lIns="0" tIns="0" rIns="0" bIns="0" rtlCol="0" anchor="t"/>
+          <a:lstStyle/>
+          <a:p>
+            <a:pPr algn="l" indent="0" marL="0">
+              <a:lnSpc>
+                <a:spcPts val="1680"/>
+              </a:lnSpc>
+              <a:spcBef>
+                <a:spcPts val="300"/>
+              </a:spcBef>
+              <a:spcAft>
+                <a:spcPts val="300"/>
+              </a:spcAft>
+              <a:buNone/>
+            </a:pPr>
+            <a:r>
+              <a:rPr lang="en-US" sz="1200" dirty="0">
+                <a:solidFill>
+                  <a:srgbClr val="1C2833"/>
+                </a:solidFill>
+                <a:latin typeface="Arial" pitchFamily="34" charset="0"/>
+                <a:ea typeface="Arial" pitchFamily="34" charset="-122"/>
+                <a:cs typeface="Arial" pitchFamily="34" charset="-120"/>
+              </a:rPr>
+              <a:t>Middle ·  · IKS Curriculum</a:t>
+            </a:r>
+            <a:endParaRPr lang="en-US" sz="1200" dirty="0"/>
+          </a:p>
+        </p:txBody>
+      </p:sp>
+    </p:spTree>
+  </p:cSld>
+  <p:clrMapOvr>
+    <a:masterClrMapping/>
+  </p:clrMapOvr>
+</p:sld>
+</file>
+
+<file path=ppt/slides/slide18.xml><?xml version="1.0" encoding="utf-8"?>
+<p:sld xmlns:a="http://schemas.openxmlformats.org/drawingml/2006/main" xmlns:r="http://schemas.openxmlformats.org/officeDocument/2006/relationships" xmlns:p="http://schemas.openxmlformats.org/presentationml/2006/main">
+  <p:cSld name="Slide 18">
+    <p:bg>
+      <p:bgPr>
+        <a:solidFill>
+          <a:srgbClr val="FFFFFF"/>
+        </a:solidFill>
+      </p:bgPr>
+    </p:bg>
+    <p:spTree>
+      <p:nvGrpSpPr>
+        <p:cNvPr id="1" name=""/>
+        <p:cNvGrpSpPr/>
+        <p:nvPr/>
+      </p:nvGrpSpPr>
+      <p:grpSpPr>
+        <a:xfrm>
+          <a:off x="0" y="0"/>
+          <a:ext cx="0" cy="0"/>
+          <a:chOff x="0" y="0"/>
+          <a:chExt cx="0" cy="0"/>
+        </a:xfrm>
+      </p:grpSpPr>
+      <p:sp>
+        <p:nvSpPr>
+          <p:cNvPr id="2" name="Text 0"/>
+          <p:cNvSpPr/>
+          <p:nvPr/>
+        </p:nvSpPr>
+        <p:spPr>
+          <a:xfrm>
+            <a:off x="0" y="0"/>
+            <a:ext cx="9144000" cy="101501"/>
+          </a:xfrm>
+          <a:prstGeom prst="rect">
+            <a:avLst/>
+          </a:prstGeom>
+          <a:solidFill>
+            <a:srgbClr val="277884"/>
+          </a:solidFill>
+          <a:ln/>
+        </p:spPr>
+        <p:txBody>
+          <a:bodyPr wrap="square" rtlCol="0" anchor="ctr"/>
+          <a:lstStyle/>
+          <a:p>
+            <a:pPr indent="0" marL="0">
+              <a:buNone/>
+            </a:pPr>
+            <a:endParaRPr lang="en-US" dirty="0"/>
+          </a:p>
+        </p:txBody>
+      </p:sp>
+      <p:sp>
+        <p:nvSpPr>
+          <p:cNvPr id="3" name="Text 1"/>
+          <p:cNvSpPr/>
+          <p:nvPr/>
+        </p:nvSpPr>
+        <p:spPr>
+          <a:xfrm>
+            <a:off x="406301" y="457051"/>
+            <a:ext cx="8498026" cy="274290"/>
+          </a:xfrm>
+          <a:prstGeom prst="rect">
+            <a:avLst/>
+          </a:prstGeom>
+          <a:noFill/>
+          <a:ln/>
+        </p:spPr>
+        <p:txBody>
+          <a:bodyPr wrap="square" lIns="0" tIns="0" rIns="0" bIns="0" rtlCol="0" anchor="t"/>
+          <a:lstStyle/>
+          <a:p>
+            <a:pPr algn="l" indent="0" marL="0">
+              <a:lnSpc>
+                <a:spcPts val="2160"/>
+              </a:lnSpc>
+              <a:spcBef>
+                <a:spcPts val="600"/>
+              </a:spcBef>
+              <a:spcAft>
+                <a:spcPts val="800"/>
+              </a:spcAft>
+              <a:buNone/>
+            </a:pPr>
+            <a:r>
+              <a:rPr lang="en-US" sz="1800" b="1" dirty="0">
+                <a:solidFill>
+                  <a:srgbClr val="FE4447"/>
+                </a:solidFill>
+                <a:latin typeface="Georgia" pitchFamily="34" charset="0"/>
+                <a:ea typeface="Georgia" pitchFamily="34" charset="-122"/>
+                <a:cs typeface="Georgia" pitchFamily="34" charset="-120"/>
+              </a:rPr>
+              <a:t>Teacher notes</a:t>
+            </a:r>
+            <a:endParaRPr lang="en-US" sz="1800" dirty="0"/>
+          </a:p>
+        </p:txBody>
+      </p:sp>
+      <p:sp>
+        <p:nvSpPr>
+          <p:cNvPr id="4" name="Text 2"/>
+          <p:cNvSpPr/>
+          <p:nvPr/>
+        </p:nvSpPr>
+        <p:spPr>
+          <a:xfrm>
+            <a:off x="634901" y="883593"/>
+            <a:ext cx="8102798" cy="1835944"/>
+          </a:xfrm>
+          <a:prstGeom prst="rect">
+            <a:avLst/>
+          </a:prstGeom>
+          <a:noFill/>
+          <a:ln/>
+        </p:spPr>
+        <p:txBody>
+          <a:bodyPr wrap="square" lIns="0" tIns="0" rIns="0" bIns="0" rtlCol="0" anchor="t"/>
+          <a:lstStyle/>
+          <a:p>
+            <a:pPr algn="l" marL="342900" indent="-342900">
+              <a:lnSpc>
+                <a:spcPts val="1620"/>
+              </a:lnSpc>
+              <a:spcAft>
+                <a:spcPts val="300"/>
+              </a:spcAft>
+              <a:buSzPct val="100000"/>
+              <a:buChar char="•"/>
+            </a:pPr>
+            <a:r>
+              <a:rPr lang="en-US" sz="1200" dirty="0">
+                <a:solidFill>
+                  <a:srgbClr val="1C2833"/>
+                </a:solidFill>
+                <a:latin typeface="Arial" pitchFamily="34" charset="0"/>
+                <a:ea typeface="Arial" pitchFamily="34" charset="-122"/>
+                <a:cs typeface="Arial" pitchFamily="34" charset="-120"/>
+              </a:rPr>
+              <a:t>Some pairs will plan an action they can't actually do. Push back kindly during the post-walk drafting. "Who specifically will you talk to? When?"</a:t>
+            </a:r>
+            <a:endParaRPr lang="en-US" sz="1200" dirty="0"/>
+          </a:p>
+          <a:p>
+            <a:pPr algn="l" marL="342900" indent="-342900">
+              <a:lnSpc>
+                <a:spcPts val="1620"/>
+              </a:lnSpc>
+              <a:spcAft>
+                <a:spcPts val="300"/>
+              </a:spcAft>
+              <a:buSzPct val="100000"/>
+              <a:buChar char="•"/>
+            </a:pPr>
+            <a:r>
+              <a:rPr lang="en-US" sz="1200" dirty="0">
+                <a:solidFill>
+                  <a:srgbClr val="1C2833"/>
+                </a:solidFill>
+                <a:latin typeface="Arial" pitchFamily="34" charset="0"/>
+                <a:ea typeface="Arial" pitchFamily="34" charset="-122"/>
+                <a:cs typeface="Arial" pitchFamily="34" charset="-120"/>
+              </a:rPr>
+              <a:t>Some pairs will plan an action that is too large to do in 14 days. Cut it. "What's the smallest version of this you can do this week?" The 14-day frame is non-negotiable; the rubric on Day 10 reflects this.</a:t>
+            </a:r>
+            <a:endParaRPr lang="en-US" sz="1200" dirty="0"/>
+          </a:p>
+          <a:p>
+            <a:pPr algn="l" marL="342900" indent="-342900">
+              <a:lnSpc>
+                <a:spcPts val="1620"/>
+              </a:lnSpc>
+              <a:spcAft>
+                <a:spcPts val="300"/>
+              </a:spcAft>
+              <a:buSzPct val="100000"/>
+              <a:buChar char="•"/>
+            </a:pPr>
+            <a:r>
+              <a:rPr lang="en-US" sz="1200" dirty="0">
+                <a:solidFill>
+                  <a:srgbClr val="1C2833"/>
+                </a:solidFill>
+                <a:latin typeface="Arial" pitchFamily="34" charset="0"/>
+                <a:ea typeface="Arial" pitchFamily="34" charset="-122"/>
+                <a:cs typeface="Arial" pitchFamily="34" charset="-120"/>
+              </a:rPr>
+              <a:t>The "engine off" sign is the most common student action. Encourage variation — water saving, food waste, biodiversity (a pollinator-friendly corner), noise reduction. Module 13 is about the full five elements, not just air.</a:t>
+            </a:r>
+            <a:endParaRPr lang="en-US" sz="1200" dirty="0"/>
+          </a:p>
+          <a:p>
+            <a:pPr algn="l" marL="342900" indent="-342900">
+              <a:lnSpc>
+                <a:spcPts val="1620"/>
+              </a:lnSpc>
+              <a:spcAft>
+                <a:spcPts val="300"/>
+              </a:spcAft>
+              <a:buSzPct val="100000"/>
+              <a:buChar char="•"/>
+            </a:pPr>
+            <a:r>
+              <a:rPr lang="en-US" sz="1200" dirty="0">
+                <a:solidFill>
+                  <a:srgbClr val="1C2833"/>
+                </a:solidFill>
+                <a:latin typeface="Arial" pitchFamily="34" charset="0"/>
+                <a:ea typeface="Arial" pitchFamily="34" charset="-122"/>
+                <a:cs typeface="Arial" pitchFamily="34" charset="-120"/>
+              </a:rPr>
+              <a:t>If the school is in a context where an outdoor walk isn't feasible (rain, unsafe neighbourhood), do a "windows and corridors" walk inside the building. Same rules.</a:t>
+            </a:r>
+            <a:endParaRPr lang="en-US" sz="1200" dirty="0"/>
+          </a:p>
+        </p:txBody>
+      </p:sp>
+      <p:sp>
+        <p:nvSpPr>
+          <p:cNvPr id="5" name="Text 3"/>
+          <p:cNvSpPr/>
+          <p:nvPr/>
+        </p:nvSpPr>
+        <p:spPr>
+          <a:xfrm>
+            <a:off x="406301" y="4434929"/>
+            <a:ext cx="8498026" cy="213271"/>
+          </a:xfrm>
+          <a:prstGeom prst="rect">
+            <a:avLst/>
+          </a:prstGeom>
+          <a:noFill/>
+          <a:ln/>
+        </p:spPr>
+        <p:txBody>
+          <a:bodyPr wrap="square" lIns="0" tIns="0" rIns="0" bIns="0" rtlCol="0" anchor="t"/>
+          <a:lstStyle/>
+          <a:p>
+            <a:pPr algn="l" indent="0" marL="0">
+              <a:lnSpc>
+                <a:spcPts val="1680"/>
+              </a:lnSpc>
+              <a:spcBef>
+                <a:spcPts val="300"/>
+              </a:spcBef>
+              <a:spcAft>
+                <a:spcPts val="300"/>
+              </a:spcAft>
+              <a:buNone/>
+            </a:pPr>
+            <a:r>
+              <a:rPr lang="en-US" sz="1200" dirty="0">
+                <a:solidFill>
+                  <a:srgbClr val="1C2833"/>
+                </a:solidFill>
+                <a:latin typeface="Arial" pitchFamily="34" charset="0"/>
+                <a:ea typeface="Arial" pitchFamily="34" charset="-122"/>
+                <a:cs typeface="Arial" pitchFamily="34" charset="-120"/>
+              </a:rPr>
+              <a:t>Middle ·  · IKS Curriculum</a:t>
+            </a:r>
+            <a:endParaRPr lang="en-US" sz="1200" dirty="0"/>
+          </a:p>
+        </p:txBody>
+      </p:sp>
+    </p:spTree>
+  </p:cSld>
+  <p:clrMapOvr>
+    <a:masterClrMapping/>
+  </p:clrMapOvr>
+</p:sld>
+</file>
+
+<file path=ppt/slides/slide19.xml><?xml version="1.0" encoding="utf-8"?>
+<p:sld xmlns:a="http://schemas.openxmlformats.org/drawingml/2006/main" xmlns:r="http://schemas.openxmlformats.org/officeDocument/2006/relationships" xmlns:p="http://schemas.openxmlformats.org/presentationml/2006/main">
+  <p:cSld name="Slide 19">
+    <p:bg>
+      <p:bgPr>
+        <a:solidFill>
+          <a:srgbClr val="FFFFFF"/>
+        </a:solidFill>
+      </p:bgPr>
+    </p:bg>
+    <p:spTree>
+      <p:nvGrpSpPr>
+        <p:cNvPr id="1" name=""/>
+        <p:cNvGrpSpPr/>
+        <p:nvPr/>
+      </p:nvGrpSpPr>
+      <p:grpSpPr>
+        <a:xfrm>
+          <a:off x="0" y="0"/>
+          <a:ext cx="0" cy="0"/>
+          <a:chOff x="0" y="0"/>
+          <a:chExt cx="0" cy="0"/>
+        </a:xfrm>
+      </p:grpSpPr>
+      <p:sp>
+        <p:nvSpPr>
+          <p:cNvPr id="2" name="Text 0"/>
+          <p:cNvSpPr/>
+          <p:nvPr/>
+        </p:nvSpPr>
+        <p:spPr>
+          <a:xfrm>
+            <a:off x="0" y="0"/>
+            <a:ext cx="9144000" cy="101501"/>
+          </a:xfrm>
+          <a:prstGeom prst="rect">
+            <a:avLst/>
+          </a:prstGeom>
+          <a:solidFill>
+            <a:srgbClr val="277884"/>
+          </a:solidFill>
+          <a:ln/>
+        </p:spPr>
+        <p:txBody>
+          <a:bodyPr wrap="square" rtlCol="0" anchor="ctr"/>
+          <a:lstStyle/>
+          <a:p>
+            <a:pPr indent="0" marL="0">
+              <a:buNone/>
+            </a:pPr>
+            <a:endParaRPr lang="en-US" dirty="0"/>
+          </a:p>
+        </p:txBody>
+      </p:sp>
+      <p:sp>
+        <p:nvSpPr>
+          <p:cNvPr id="3" name="Text 1"/>
+          <p:cNvSpPr/>
+          <p:nvPr/>
+        </p:nvSpPr>
+        <p:spPr>
+          <a:xfrm>
+            <a:off x="406301" y="457051"/>
+            <a:ext cx="8498026" cy="274290"/>
+          </a:xfrm>
+          <a:prstGeom prst="rect">
+            <a:avLst/>
+          </a:prstGeom>
+          <a:noFill/>
+          <a:ln/>
+        </p:spPr>
+        <p:txBody>
+          <a:bodyPr wrap="square" lIns="0" tIns="0" rIns="0" bIns="0" rtlCol="0" anchor="t"/>
+          <a:lstStyle/>
+          <a:p>
+            <a:pPr algn="l" indent="0" marL="0">
+              <a:lnSpc>
+                <a:spcPts val="2160"/>
+              </a:lnSpc>
+              <a:spcBef>
+                <a:spcPts val="600"/>
+              </a:spcBef>
+              <a:spcAft>
+                <a:spcPts val="800"/>
+              </a:spcAft>
+              <a:buNone/>
+            </a:pPr>
+            <a:r>
+              <a:rPr lang="en-US" sz="1800" b="1" dirty="0">
+                <a:solidFill>
+                  <a:srgbClr val="FE4447"/>
+                </a:solidFill>
+                <a:latin typeface="Georgia" pitchFamily="34" charset="0"/>
+                <a:ea typeface="Georgia" pitchFamily="34" charset="-122"/>
+                <a:cs typeface="Georgia" pitchFamily="34" charset="-120"/>
+              </a:rPr>
               <a:t>Citation(s) used in this lesson</a:t>
             </a:r>
             <a:endParaRPr lang="en-US" sz="1800" dirty="0"/>
@@ -2471,8 +6502,8 @@
         </p:nvSpPr>
         <p:spPr>
           <a:xfrm>
-            <a:off x="406301" y="870942"/>
-            <a:ext cx="8498026" cy="213271"/>
+            <a:off x="634901" y="883593"/>
+            <a:ext cx="8102798" cy="281880"/>
           </a:xfrm>
           <a:prstGeom prst="rect">
             <a:avLst/>
@@ -2484,17 +6515,15 @@
           <a:bodyPr wrap="square" lIns="0" tIns="0" rIns="0" bIns="0" rtlCol="0" anchor="t"/>
           <a:lstStyle/>
           <a:p>
-            <a:pPr algn="l" indent="0" marL="0">
-              <a:lnSpc>
-                <a:spcPts val="1680"/>
-              </a:lnSpc>
-              <a:spcBef>
-                <a:spcPts val="300"/>
-              </a:spcBef>
-              <a:spcAft>
-                <a:spcPts val="300"/>
-              </a:spcAft>
-              <a:buNone/>
+            <a:pPr algn="l" marL="342900" indent="-342900">
+              <a:lnSpc>
+                <a:spcPts val="1620"/>
+              </a:lnSpc>
+              <a:spcAft>
+                <a:spcPts val="300"/>
+              </a:spcAft>
+              <a:buSzPct val="100000"/>
+              <a:buChar char="•"/>
             </a:pPr>
             <a:r>
               <a:rPr lang="en-US" sz="1200" dirty="0">
@@ -2505,7 +6534,7 @@
                 <a:ea typeface="Arial" pitchFamily="34" charset="-122"/>
                 <a:cs typeface="Arial" pitchFamily="34" charset="-120"/>
               </a:rPr>
-              <a:t>– None new; today's anchor is the four principles already cited (Days 1, 5, 6, 7).</a:t>
+              <a:t>None new; today's anchor is the four principles already cited (Days 1, 5, 6, 7).</a:t>
             </a:r>
             <a:endParaRPr lang="en-US" sz="1200" dirty="0"/>
           </a:p>
@@ -2663,7 +6692,7 @@
                 <a:ea typeface="Georgia" pitchFamily="34" charset="-122"/>
                 <a:cs typeface="Georgia" pitchFamily="34" charset="-120"/>
               </a:rPr>
-              <a:t>Materials</a:t>
+              <a:t>Learning objective</a:t>
             </a:r>
             <a:endParaRPr lang="en-US" sz="1800" dirty="0"/>
           </a:p>
@@ -2678,7 +6707,7 @@
         <p:spPr>
           <a:xfrm>
             <a:off x="406301" y="870942"/>
-            <a:ext cx="8498026" cy="658862"/>
+            <a:ext cx="8498026" cy="426541"/>
           </a:xfrm>
           <a:prstGeom prst="rect">
             <a:avLst/>
@@ -2711,53 +6740,7 @@
                 <a:ea typeface="Arial" pitchFamily="34" charset="-122"/>
                 <a:cs typeface="Arial" pitchFamily="34" charset="-120"/>
               </a:rPr>
-              <a:t>– Each pair's project plan from yesterday – Notebook + pen – A printed observation sheet (see </a:t>
-            </a:r>
-            <a:pPr algn="l" indent="0" marL="0">
-              <a:lnSpc>
-                <a:spcPts val="1680"/>
-              </a:lnSpc>
-              <a:spcBef>
-                <a:spcPts val="300"/>
-              </a:spcBef>
-              <a:spcAft>
-                <a:spcPts val="300"/>
-              </a:spcAft>
-              <a:buNone/>
-            </a:pPr>
-            <a:r>
-              <a:rPr lang="en-US" sz="1200" dirty="0">
-                <a:solidFill>
-                  <a:srgbClr val="1C2833"/>
-                </a:solidFill>
-                <a:latin typeface="Arial" pitchFamily="34" charset="0"/>
-                <a:ea typeface="Arial" pitchFamily="34" charset="-122"/>
-                <a:cs typeface="Arial" pitchFamily="34" charset="-120"/>
-              </a:rPr>
-              <a:t>activities/activity-02-eco-walk.md</a:t>
-            </a:r>
-            <a:pPr algn="l" indent="0" marL="0">
-              <a:lnSpc>
-                <a:spcPts val="1680"/>
-              </a:lnSpc>
-              <a:spcBef>
-                <a:spcPts val="300"/>
-              </a:spcBef>
-              <a:spcAft>
-                <a:spcPts val="300"/>
-              </a:spcAft>
-              <a:buNone/>
-            </a:pPr>
-            <a:r>
-              <a:rPr lang="en-US" sz="1200" dirty="0">
-                <a:solidFill>
-                  <a:srgbClr val="1C2833"/>
-                </a:solidFill>
-                <a:latin typeface="Arial" pitchFamily="34" charset="0"/>
-                <a:ea typeface="Arial" pitchFamily="34" charset="-122"/>
-                <a:cs typeface="Arial" pitchFamily="34" charset="-120"/>
-              </a:rPr>
-              <a:t>) – Permission slip already on file for off-campus walk (only if leaving campus; on-campus is fine without) – Smartphone with camera if available (one per pair maximum, used only for documentation, not for general phone use)</a:t>
+              <a:t>Students conduct a 15-minute observation walk on or near the school campus, record one specific ecological observation, and draft a single concrete action they will lead — anchored on one Indic principle.</a:t>
             </a:r>
             <a:endParaRPr lang="en-US" sz="1200" dirty="0"/>
           </a:p>
@@ -2915,7 +6898,7 @@
                 <a:ea typeface="Georgia" pitchFamily="34" charset="-122"/>
                 <a:cs typeface="Georgia" pitchFamily="34" charset="-120"/>
               </a:rPr>
-              <a:t>Vocabulary</a:t>
+              <a:t>Materials</a:t>
             </a:r>
             <a:endParaRPr lang="en-US" sz="1800" dirty="0"/>
           </a:p>
@@ -2929,8 +6912,8 @@
         </p:nvSpPr>
         <p:spPr>
           <a:xfrm>
-            <a:off x="406301" y="870942"/>
-            <a:ext cx="8498026" cy="213271"/>
+            <a:off x="634901" y="883593"/>
+            <a:ext cx="8102798" cy="1276052"/>
           </a:xfrm>
           <a:prstGeom prst="rect">
             <a:avLst/>
@@ -2942,17 +6925,15 @@
           <a:bodyPr wrap="square" lIns="0" tIns="0" rIns="0" bIns="0" rtlCol="0" anchor="t"/>
           <a:lstStyle/>
           <a:p>
-            <a:pPr algn="l" indent="0" marL="0">
-              <a:lnSpc>
-                <a:spcPts val="1680"/>
-              </a:lnSpc>
-              <a:spcBef>
-                <a:spcPts val="300"/>
-              </a:spcBef>
-              <a:spcAft>
-                <a:spcPts val="300"/>
-              </a:spcAft>
-              <a:buNone/>
+            <a:pPr algn="l" marL="342900" indent="-342900">
+              <a:lnSpc>
+                <a:spcPts val="1620"/>
+              </a:lnSpc>
+              <a:spcAft>
+                <a:spcPts val="300"/>
+              </a:spcAft>
+              <a:buSzPct val="100000"/>
+              <a:buChar char="•"/>
             </a:pPr>
             <a:r>
               <a:rPr lang="en-US" sz="1200" dirty="0">
@@ -2963,7 +6944,143 @@
                 <a:ea typeface="Arial" pitchFamily="34" charset="-122"/>
                 <a:cs typeface="Arial" pitchFamily="34" charset="-120"/>
               </a:rPr>
-              <a:t>(All previous; no new terms today. Today is application.)</a:t>
+              <a:t>Each pair's project plan from yesterday</a:t>
+            </a:r>
+            <a:endParaRPr lang="en-US" sz="1200" dirty="0"/>
+          </a:p>
+          <a:p>
+            <a:pPr algn="l" marL="342900" indent="-342900">
+              <a:lnSpc>
+                <a:spcPts val="1620"/>
+              </a:lnSpc>
+              <a:spcAft>
+                <a:spcPts val="300"/>
+              </a:spcAft>
+              <a:buSzPct val="100000"/>
+              <a:buChar char="•"/>
+            </a:pPr>
+            <a:r>
+              <a:rPr lang="en-US" sz="1200" dirty="0">
+                <a:solidFill>
+                  <a:srgbClr val="1C2833"/>
+                </a:solidFill>
+                <a:latin typeface="Arial" pitchFamily="34" charset="0"/>
+                <a:ea typeface="Arial" pitchFamily="34" charset="-122"/>
+                <a:cs typeface="Arial" pitchFamily="34" charset="-120"/>
+              </a:rPr>
+              <a:t>Notebook + pen</a:t>
+            </a:r>
+            <a:endParaRPr lang="en-US" sz="1200" dirty="0"/>
+          </a:p>
+          <a:p>
+            <a:pPr algn="l" marL="342900" indent="-342900">
+              <a:lnSpc>
+                <a:spcPts val="1620"/>
+              </a:lnSpc>
+              <a:spcAft>
+                <a:spcPts val="300"/>
+              </a:spcAft>
+              <a:buSzPct val="100000"/>
+              <a:buChar char="•"/>
+            </a:pPr>
+            <a:r>
+              <a:rPr lang="en-US" sz="1200" dirty="0">
+                <a:solidFill>
+                  <a:srgbClr val="1C2833"/>
+                </a:solidFill>
+                <a:latin typeface="Arial" pitchFamily="34" charset="0"/>
+                <a:ea typeface="Arial" pitchFamily="34" charset="-122"/>
+                <a:cs typeface="Arial" pitchFamily="34" charset="-120"/>
+              </a:rPr>
+              <a:t>A printed observation sheet (see </a:t>
+            </a:r>
+            <a:pPr algn="l" indent="0" marL="0">
+              <a:lnSpc>
+                <a:spcPts val="1620"/>
+              </a:lnSpc>
+              <a:spcAft>
+                <a:spcPts val="300"/>
+              </a:spcAft>
+              <a:buNone/>
+            </a:pPr>
+            <a:r>
+              <a:rPr lang="en-US" sz="1200" dirty="0">
+                <a:solidFill>
+                  <a:srgbClr val="1C2833"/>
+                </a:solidFill>
+                <a:latin typeface="Arial" pitchFamily="34" charset="0"/>
+                <a:ea typeface="Arial" pitchFamily="34" charset="-122"/>
+                <a:cs typeface="Arial" pitchFamily="34" charset="-120"/>
+              </a:rPr>
+              <a:t>activities/activity-02-eco-walk.md</a:t>
+            </a:r>
+            <a:pPr algn="l" indent="0" marL="0">
+              <a:lnSpc>
+                <a:spcPts val="1620"/>
+              </a:lnSpc>
+              <a:spcAft>
+                <a:spcPts val="300"/>
+              </a:spcAft>
+              <a:buNone/>
+            </a:pPr>
+            <a:r>
+              <a:rPr lang="en-US" sz="1200" dirty="0">
+                <a:solidFill>
+                  <a:srgbClr val="1C2833"/>
+                </a:solidFill>
+                <a:latin typeface="Arial" pitchFamily="34" charset="0"/>
+                <a:ea typeface="Arial" pitchFamily="34" charset="-122"/>
+                <a:cs typeface="Arial" pitchFamily="34" charset="-120"/>
+              </a:rPr>
+              <a:t>)</a:t>
+            </a:r>
+            <a:endParaRPr lang="en-US" sz="1200" dirty="0"/>
+          </a:p>
+          <a:p>
+            <a:pPr algn="l" marL="342900" indent="-342900">
+              <a:lnSpc>
+                <a:spcPts val="1620"/>
+              </a:lnSpc>
+              <a:spcAft>
+                <a:spcPts val="300"/>
+              </a:spcAft>
+              <a:buSzPct val="100000"/>
+              <a:buChar char="•"/>
+            </a:pPr>
+            <a:r>
+              <a:rPr lang="en-US" sz="1200" dirty="0">
+                <a:solidFill>
+                  <a:srgbClr val="1C2833"/>
+                </a:solidFill>
+                <a:latin typeface="Arial" pitchFamily="34" charset="0"/>
+                <a:ea typeface="Arial" pitchFamily="34" charset="-122"/>
+                <a:cs typeface="Arial" pitchFamily="34" charset="-120"/>
+              </a:rPr>
+              <a:t>Permission slip already on file for off-campus walk (only if leaving campus; on-campus is fine without)</a:t>
+            </a:r>
+            <a:endParaRPr lang="en-US" sz="1200" dirty="0"/>
+          </a:p>
+          <a:p>
+            <a:pPr algn="l" marL="342900" indent="-342900">
+              <a:lnSpc>
+                <a:spcPts val="1620"/>
+              </a:lnSpc>
+              <a:spcAft>
+                <a:spcPts val="300"/>
+              </a:spcAft>
+              <a:buSzPct val="100000"/>
+              <a:buChar char="•"/>
+            </a:pPr>
+            <a:r>
+              <a:rPr lang="en-US" sz="1200" dirty="0">
+                <a:solidFill>
+                  <a:srgbClr val="1C2833"/>
+                </a:solidFill>
+                <a:latin typeface="Arial" pitchFamily="34" charset="0"/>
+                <a:ea typeface="Arial" pitchFamily="34" charset="-122"/>
+                <a:cs typeface="Arial" pitchFamily="34" charset="-120"/>
+              </a:rPr>
+              <a:t>Smartphone with camera if available (one per pair maximum, used only for documentation, not for general phone use)</a:t>
             </a:r>
             <a:endParaRPr lang="en-US" sz="1200" dirty="0"/>
           </a:p>
@@ -3121,7 +7238,7 @@
                 <a:ea typeface="Georgia" pitchFamily="34" charset="-122"/>
                 <a:cs typeface="Georgia" pitchFamily="34" charset="-120"/>
               </a:rPr>
-              <a:t>Lesson flow</a:t>
+              <a:t>Vocabulary</a:t>
             </a:r>
             <a:endParaRPr lang="en-US" sz="1800" dirty="0"/>
           </a:p>
@@ -3130,6 +7247,54 @@
       <p:sp>
         <p:nvSpPr>
           <p:cNvPr id="4" name="Text 2"/>
+          <p:cNvSpPr/>
+          <p:nvPr/>
+        </p:nvSpPr>
+        <p:spPr>
+          <a:xfrm>
+            <a:off x="406301" y="870942"/>
+            <a:ext cx="8498026" cy="213271"/>
+          </a:xfrm>
+          <a:prstGeom prst="rect">
+            <a:avLst/>
+          </a:prstGeom>
+          <a:noFill/>
+          <a:ln/>
+        </p:spPr>
+        <p:txBody>
+          <a:bodyPr wrap="square" lIns="0" tIns="0" rIns="0" bIns="0" rtlCol="0" anchor="t"/>
+          <a:lstStyle/>
+          <a:p>
+            <a:pPr algn="l" indent="0" marL="0">
+              <a:lnSpc>
+                <a:spcPts val="1680"/>
+              </a:lnSpc>
+              <a:spcBef>
+                <a:spcPts val="300"/>
+              </a:spcBef>
+              <a:spcAft>
+                <a:spcPts val="300"/>
+              </a:spcAft>
+              <a:buNone/>
+            </a:pPr>
+            <a:r>
+              <a:rPr lang="en-US" sz="1200" dirty="0">
+                <a:solidFill>
+                  <a:srgbClr val="1C2833"/>
+                </a:solidFill>
+                <a:latin typeface="Arial" pitchFamily="34" charset="0"/>
+                <a:ea typeface="Arial" pitchFamily="34" charset="-122"/>
+                <a:cs typeface="Arial" pitchFamily="34" charset="-120"/>
+              </a:rPr>
+              <a:t>(All previous; no new terms today. Today is application.)</a:t>
+            </a:r>
+            <a:endParaRPr lang="en-US" sz="1200" dirty="0"/>
+          </a:p>
+        </p:txBody>
+      </p:sp>
+      <p:sp>
+        <p:nvSpPr>
+          <p:cNvPr id="5" name="Text 3"/>
           <p:cNvSpPr/>
           <p:nvPr/>
         </p:nvSpPr>
@@ -3279,7 +7444,7 @@
                 <a:ea typeface="Georgia" pitchFamily="34" charset="-122"/>
                 <a:cs typeface="Georgia" pitchFamily="34" charset="-120"/>
               </a:rPr>
-              <a:t>The walk (15 min)</a:t>
+              <a:t>Lesson flow</a:t>
             </a:r>
             <a:endParaRPr lang="en-US" sz="1800" dirty="0"/>
           </a:p>
@@ -3288,54 +7453,6 @@
       <p:sp>
         <p:nvSpPr>
           <p:cNvPr id="4" name="Text 2"/>
-          <p:cNvSpPr/>
-          <p:nvPr/>
-        </p:nvSpPr>
-        <p:spPr>
-          <a:xfrm>
-            <a:off x="406301" y="870942"/>
-            <a:ext cx="8498026" cy="426541"/>
-          </a:xfrm>
-          <a:prstGeom prst="rect">
-            <a:avLst/>
-          </a:prstGeom>
-          <a:noFill/>
-          <a:ln/>
-        </p:spPr>
-        <p:txBody>
-          <a:bodyPr wrap="square" lIns="0" tIns="0" rIns="0" bIns="0" rtlCol="0" anchor="t"/>
-          <a:lstStyle/>
-          <a:p>
-            <a:pPr algn="l" indent="0" marL="0">
-              <a:lnSpc>
-                <a:spcPts val="1680"/>
-              </a:lnSpc>
-              <a:spcBef>
-                <a:spcPts val="300"/>
-              </a:spcBef>
-              <a:spcAft>
-                <a:spcPts val="300"/>
-              </a:spcAft>
-              <a:buNone/>
-            </a:pPr>
-            <a:r>
-              <a:rPr lang="en-US" sz="1200" dirty="0">
-                <a:solidFill>
-                  <a:srgbClr val="1C2833"/>
-                </a:solidFill>
-                <a:latin typeface="Arial" pitchFamily="34" charset="0"/>
-                <a:ea typeface="Arial" pitchFamily="34" charset="-122"/>
-                <a:cs typeface="Arial" pitchFamily="34" charset="-120"/>
-              </a:rPr>
-              <a:t>– Pairs leave together with their sheet. – Teacher walks a perimeter to monitor; no specific guidance during the walk. – Pairs come back to the classroom at 25 min mark.</a:t>
-            </a:r>
-            <a:endParaRPr lang="en-US" sz="1200" dirty="0"/>
-          </a:p>
-        </p:txBody>
-      </p:sp>
-      <p:sp>
-        <p:nvSpPr>
-          <p:cNvPr id="5" name="Text 3"/>
           <p:cNvSpPr/>
           <p:nvPr/>
         </p:nvSpPr>
@@ -3485,7 +7602,7 @@
                 <a:ea typeface="Georgia" pitchFamily="34" charset="-122"/>
                 <a:cs typeface="Georgia" pitchFamily="34" charset="-120"/>
               </a:rPr>
-              <a:t>Wrap-up (5 min)</a:t>
+              <a:t>Pre-walk briefing (10 min — in class)</a:t>
             </a:r>
             <a:endParaRPr lang="en-US" sz="1800" dirty="0"/>
           </a:p>
@@ -3499,8 +7616,8 @@
         </p:nvSpPr>
         <p:spPr>
           <a:xfrm>
-            <a:off x="406301" y="870942"/>
-            <a:ext cx="8498026" cy="426541"/>
+            <a:off x="634901" y="883593"/>
+            <a:ext cx="8102798" cy="281880"/>
           </a:xfrm>
           <a:prstGeom prst="rect">
             <a:avLst/>
@@ -3512,13 +7629,31 @@
           <a:bodyPr wrap="square" lIns="0" tIns="0" rIns="0" bIns="0" rtlCol="0" anchor="t"/>
           <a:lstStyle/>
           <a:p>
-            <a:pPr algn="l" indent="0" marL="0">
-              <a:lnSpc>
-                <a:spcPts val="1680"/>
-              </a:lnSpc>
-              <a:spcBef>
-                <a:spcPts val="300"/>
-              </a:spcBef>
+            <a:pPr algn="l" marL="342900" indent="-342900">
+              <a:lnSpc>
+                <a:spcPts val="1620"/>
+              </a:lnSpc>
+              <a:spcAft>
+                <a:spcPts val="300"/>
+              </a:spcAft>
+              <a:buSzPct val="100000"/>
+              <a:buChar char="•"/>
+            </a:pPr>
+            <a:r>
+              <a:rPr lang="en-US" sz="1200" b="1" dirty="0">
+                <a:solidFill>
+                  <a:srgbClr val="1C2833"/>
+                </a:solidFill>
+                <a:latin typeface="Arial" pitchFamily="34" charset="0"/>
+                <a:ea typeface="Arial" pitchFamily="34" charset="-122"/>
+                <a:cs typeface="Arial" pitchFamily="34" charset="-120"/>
+              </a:rPr>
+              <a:t>Review the project plan paragraph.</a:t>
+            </a:r>
+            <a:pPr algn="l" indent="0" marL="0">
+              <a:lnSpc>
+                <a:spcPts val="1620"/>
+              </a:lnSpc>
               <a:spcAft>
                 <a:spcPts val="300"/>
               </a:spcAft>
@@ -3533,7 +7668,7 @@
                 <a:ea typeface="Arial" pitchFamily="34" charset="-122"/>
                 <a:cs typeface="Arial" pitchFamily="34" charset="-120"/>
               </a:rPr>
-              <a:t>– Each pair reads ONE line of their action plan aloud — the action sentence. – Teacher acknowledges each with a short response (clarify, narrow, encourage). – Tomorrow: 3-minute pitch + summative quiz.</a:t>
+              <a:t> Each pair confirms:</a:t>
             </a:r>
             <a:endParaRPr lang="en-US" sz="1200" dirty="0"/>
           </a:p>
@@ -3542,6 +7677,100 @@
       <p:sp>
         <p:nvSpPr>
           <p:cNvPr id="5" name="Text 3"/>
+          <p:cNvSpPr/>
+          <p:nvPr/>
+        </p:nvSpPr>
+        <p:spPr>
+          <a:xfrm>
+            <a:off x="634901" y="1266974"/>
+            <a:ext cx="8102798" cy="769441"/>
+          </a:xfrm>
+          <a:prstGeom prst="rect">
+            <a:avLst/>
+          </a:prstGeom>
+          <a:noFill/>
+          <a:ln/>
+        </p:spPr>
+        <p:txBody>
+          <a:bodyPr wrap="square" lIns="0" tIns="0" rIns="0" bIns="0" rtlCol="0" anchor="t"/>
+          <a:lstStyle/>
+          <a:p>
+            <a:pPr algn="l" marL="342900" indent="-342900">
+              <a:lnSpc>
+                <a:spcPts val="1620"/>
+              </a:lnSpc>
+              <a:spcAft>
+                <a:spcPts val="300"/>
+              </a:spcAft>
+              <a:buSzPct val="100000"/>
+              <a:buChar char="•"/>
+            </a:pPr>
+            <a:r>
+              <a:rPr lang="en-US" sz="1200" dirty="0">
+                <a:solidFill>
+                  <a:srgbClr val="1C2833"/>
+                </a:solidFill>
+                <a:latin typeface="Arial" pitchFamily="34" charset="0"/>
+                <a:ea typeface="Arial" pitchFamily="34" charset="-122"/>
+                <a:cs typeface="Arial" pitchFamily="34" charset="-120"/>
+              </a:rPr>
+              <a:t>Their anchor Indic principle.</a:t>
+            </a:r>
+            <a:endParaRPr lang="en-US" sz="1200" dirty="0"/>
+          </a:p>
+          <a:p>
+            <a:pPr algn="l" marL="342900" indent="-342900">
+              <a:lnSpc>
+                <a:spcPts val="1620"/>
+              </a:lnSpc>
+              <a:spcAft>
+                <a:spcPts val="300"/>
+              </a:spcAft>
+              <a:buSzPct val="100000"/>
+              <a:buChar char="•"/>
+            </a:pPr>
+            <a:r>
+              <a:rPr lang="en-US" sz="1200" dirty="0">
+                <a:solidFill>
+                  <a:srgbClr val="1C2833"/>
+                </a:solidFill>
+                <a:latin typeface="Arial" pitchFamily="34" charset="0"/>
+                <a:ea typeface="Arial" pitchFamily="34" charset="-122"/>
+                <a:cs typeface="Arial" pitchFamily="34" charset="-120"/>
+              </a:rPr>
+              <a:t>Their walk objective.</a:t>
+            </a:r>
+            <a:endParaRPr lang="en-US" sz="1200" dirty="0"/>
+          </a:p>
+          <a:p>
+            <a:pPr algn="l" marL="342900" indent="-342900">
+              <a:lnSpc>
+                <a:spcPts val="1620"/>
+              </a:lnSpc>
+              <a:spcAft>
+                <a:spcPts val="300"/>
+              </a:spcAft>
+              <a:buSzPct val="100000"/>
+              <a:buChar char="•"/>
+            </a:pPr>
+            <a:r>
+              <a:rPr lang="en-US" sz="1200" dirty="0">
+                <a:solidFill>
+                  <a:srgbClr val="1C2833"/>
+                </a:solidFill>
+                <a:latin typeface="Arial" pitchFamily="34" charset="0"/>
+                <a:ea typeface="Arial" pitchFamily="34" charset="-122"/>
+                <a:cs typeface="Arial" pitchFamily="34" charset="-120"/>
+              </a:rPr>
+              <a:t>Their format (poster / 2-min audio / action plan).</a:t>
+            </a:r>
+            <a:endParaRPr lang="en-US" sz="1200" dirty="0"/>
+          </a:p>
+        </p:txBody>
+      </p:sp>
+      <p:sp>
+        <p:nvSpPr>
+          <p:cNvPr id="6" name="Text 4"/>
           <p:cNvSpPr/>
           <p:nvPr/>
         </p:nvSpPr>
@@ -3691,7 +7920,7 @@
                 <a:ea typeface="Georgia" pitchFamily="34" charset="-122"/>
                 <a:cs typeface="Georgia" pitchFamily="34" charset="-120"/>
               </a:rPr>
-              <a:t>Student-facing content</a:t>
+              <a:t>Pre-walk briefing (10 min — in class) (cont.)</a:t>
             </a:r>
             <a:endParaRPr lang="en-US" sz="1800" dirty="0"/>
           </a:p>
@@ -3705,382 +7934,189 @@
         </p:nvSpPr>
         <p:spPr>
           <a:xfrm>
-            <a:off x="406301" y="883593"/>
-            <a:ext cx="8331398" cy="1612106"/>
-          </a:xfrm>
-          <a:prstGeom prst="rect">
-            <a:avLst/>
-          </a:prstGeom>
-          <a:solidFill>
-            <a:srgbClr val="F4F8F9"/>
-          </a:solidFill>
-          <a:ln/>
-        </p:spPr>
-        <p:txBody>
-          <a:bodyPr wrap="square" rtlCol="0" anchor="ctr"/>
-          <a:lstStyle/>
-          <a:p>
-            <a:pPr indent="0" marL="0">
-              <a:buNone/>
-            </a:pPr>
-            <a:endParaRPr lang="en-US" dirty="0"/>
-          </a:p>
-        </p:txBody>
-      </p:sp>
-      <p:sp>
-        <p:nvSpPr>
-          <p:cNvPr id="5" name="Shape 3"/>
-          <p:cNvSpPr/>
-          <p:nvPr/>
-        </p:nvSpPr>
-        <p:spPr>
-          <a:xfrm>
-            <a:off x="434876" y="883593"/>
-            <a:ext cx="0" cy="1612106"/>
-          </a:xfrm>
-          <a:prstGeom prst="line">
+            <a:off x="634901" y="883593"/>
+            <a:ext cx="8102798" cy="281880"/>
+          </a:xfrm>
+          <a:prstGeom prst="rect">
             <a:avLst/>
           </a:prstGeom>
           <a:noFill/>
-          <a:ln w="57150">
-            <a:solidFill>
-              <a:srgbClr val="FE4447"/>
-            </a:solidFill>
-            <a:prstDash val="solid"/>
-          </a:ln>
-        </p:spPr>
+          <a:ln/>
+        </p:spPr>
+        <p:txBody>
+          <a:bodyPr wrap="square" lIns="0" tIns="0" rIns="0" bIns="0" rtlCol="0" anchor="t"/>
+          <a:lstStyle/>
+          <a:p>
+            <a:pPr algn="l" marL="342900" indent="-342900">
+              <a:lnSpc>
+                <a:spcPts val="1620"/>
+              </a:lnSpc>
+              <a:spcAft>
+                <a:spcPts val="300"/>
+              </a:spcAft>
+              <a:buSzPct val="100000"/>
+              <a:buChar char="•"/>
+            </a:pPr>
+            <a:r>
+              <a:rPr lang="en-US" sz="1200" b="1" dirty="0">
+                <a:solidFill>
+                  <a:srgbClr val="1C2833"/>
+                </a:solidFill>
+                <a:latin typeface="Arial" pitchFamily="34" charset="0"/>
+                <a:ea typeface="Arial" pitchFamily="34" charset="-122"/>
+                <a:cs typeface="Arial" pitchFamily="34" charset="-120"/>
+              </a:rPr>
+              <a:t>Walk rules.</a:t>
+            </a:r>
+            <a:endParaRPr lang="en-US" sz="1200" dirty="0"/>
+          </a:p>
+        </p:txBody>
+      </p:sp>
+      <p:sp>
+        <p:nvSpPr>
+          <p:cNvPr id="5" name="Text 3"/>
+          <p:cNvSpPr/>
+          <p:nvPr/>
+        </p:nvSpPr>
+        <p:spPr>
+          <a:xfrm>
+            <a:off x="634901" y="1266974"/>
+            <a:ext cx="8102798" cy="1257002"/>
+          </a:xfrm>
+          <a:prstGeom prst="rect">
+            <a:avLst/>
+          </a:prstGeom>
+          <a:noFill/>
+          <a:ln/>
+        </p:spPr>
+        <p:txBody>
+          <a:bodyPr wrap="square" lIns="0" tIns="0" rIns="0" bIns="0" rtlCol="0" anchor="t"/>
+          <a:lstStyle/>
+          <a:p>
+            <a:pPr algn="l" marL="342900" indent="-342900">
+              <a:lnSpc>
+                <a:spcPts val="1620"/>
+              </a:lnSpc>
+              <a:spcAft>
+                <a:spcPts val="300"/>
+              </a:spcAft>
+              <a:buSzPct val="100000"/>
+              <a:buChar char="•"/>
+            </a:pPr>
+            <a:r>
+              <a:rPr lang="en-US" sz="1200" dirty="0">
+                <a:solidFill>
+                  <a:srgbClr val="1C2833"/>
+                </a:solidFill>
+                <a:latin typeface="Arial" pitchFamily="34" charset="0"/>
+                <a:ea typeface="Arial" pitchFamily="34" charset="-122"/>
+                <a:cs typeface="Arial" pitchFamily="34" charset="-120"/>
+              </a:rPr>
+              <a:t>Pairs stay together. No solo walkers.</a:t>
+            </a:r>
+            <a:endParaRPr lang="en-US" sz="1200" dirty="0"/>
+          </a:p>
+          <a:p>
+            <a:pPr algn="l" marL="342900" indent="-342900">
+              <a:lnSpc>
+                <a:spcPts val="1620"/>
+              </a:lnSpc>
+              <a:spcAft>
+                <a:spcPts val="300"/>
+              </a:spcAft>
+              <a:buSzPct val="100000"/>
+              <a:buChar char="•"/>
+            </a:pPr>
+            <a:r>
+              <a:rPr lang="en-US" sz="1200" dirty="0">
+                <a:solidFill>
+                  <a:srgbClr val="1C2833"/>
+                </a:solidFill>
+                <a:latin typeface="Arial" pitchFamily="34" charset="0"/>
+                <a:ea typeface="Arial" pitchFamily="34" charset="-122"/>
+                <a:cs typeface="Arial" pitchFamily="34" charset="-120"/>
+              </a:rPr>
+              <a:t>15 minutes. The teacher's timer is final.</a:t>
+            </a:r>
+            <a:endParaRPr lang="en-US" sz="1200" dirty="0"/>
+          </a:p>
+          <a:p>
+            <a:pPr algn="l" marL="342900" indent="-342900">
+              <a:lnSpc>
+                <a:spcPts val="1620"/>
+              </a:lnSpc>
+              <a:spcAft>
+                <a:spcPts val="300"/>
+              </a:spcAft>
+              <a:buSzPct val="100000"/>
+              <a:buChar char="•"/>
+            </a:pPr>
+            <a:r>
+              <a:rPr lang="en-US" sz="1200" dirty="0">
+                <a:solidFill>
+                  <a:srgbClr val="1C2833"/>
+                </a:solidFill>
+                <a:latin typeface="Arial" pitchFamily="34" charset="0"/>
+                <a:ea typeface="Arial" pitchFamily="34" charset="-122"/>
+                <a:cs typeface="Arial" pitchFamily="34" charset="-120"/>
+              </a:rPr>
+              <a:t>Phones in pocket except for one documentation photo per pair.</a:t>
+            </a:r>
+            <a:endParaRPr lang="en-US" sz="1200" dirty="0"/>
+          </a:p>
+          <a:p>
+            <a:pPr algn="l" marL="342900" indent="-342900">
+              <a:lnSpc>
+                <a:spcPts val="1620"/>
+              </a:lnSpc>
+              <a:spcAft>
+                <a:spcPts val="300"/>
+              </a:spcAft>
+              <a:buSzPct val="100000"/>
+              <a:buChar char="•"/>
+            </a:pPr>
+            <a:r>
+              <a:rPr lang="en-US" sz="1200" dirty="0">
+                <a:solidFill>
+                  <a:srgbClr val="1C2833"/>
+                </a:solidFill>
+                <a:latin typeface="Arial" pitchFamily="34" charset="0"/>
+                <a:ea typeface="Arial" pitchFamily="34" charset="-122"/>
+                <a:cs typeface="Arial" pitchFamily="34" charset="-120"/>
+              </a:rPr>
+              <a:t>One specific observation, written down on the sheet.</a:t>
+            </a:r>
+            <a:endParaRPr lang="en-US" sz="1200" dirty="0"/>
+          </a:p>
+          <a:p>
+            <a:pPr algn="l" marL="342900" indent="-342900">
+              <a:lnSpc>
+                <a:spcPts val="1620"/>
+              </a:lnSpc>
+              <a:spcAft>
+                <a:spcPts val="300"/>
+              </a:spcAft>
+              <a:buSzPct val="100000"/>
+              <a:buChar char="•"/>
+            </a:pPr>
+            <a:r>
+              <a:rPr lang="en-US" sz="1200" dirty="0">
+                <a:solidFill>
+                  <a:srgbClr val="1C2833"/>
+                </a:solidFill>
+                <a:latin typeface="Arial" pitchFamily="34" charset="0"/>
+                <a:ea typeface="Arial" pitchFamily="34" charset="-122"/>
+                <a:cs typeface="Arial" pitchFamily="34" charset="-120"/>
+              </a:rPr>
+              <a:t>Walk in silence for the first 5 minutes. Talk only after.</a:t>
+            </a:r>
+            <a:endParaRPr lang="en-US" sz="1200" dirty="0"/>
+          </a:p>
+        </p:txBody>
       </p:sp>
       <p:sp>
         <p:nvSpPr>
           <p:cNvPr id="6" name="Text 4"/>
-          <p:cNvSpPr/>
-          <p:nvPr/>
-        </p:nvSpPr>
-        <p:spPr>
-          <a:xfrm>
-            <a:off x="692051" y="1074093"/>
-            <a:ext cx="7973389" cy="461963"/>
-          </a:xfrm>
-          <a:prstGeom prst="rect">
-            <a:avLst/>
-          </a:prstGeom>
-          <a:noFill/>
-          <a:ln/>
-        </p:spPr>
-        <p:txBody>
-          <a:bodyPr wrap="square" lIns="0" tIns="0" rIns="0" bIns="0" rtlCol="0" anchor="t"/>
-          <a:lstStyle/>
-          <a:p>
-            <a:pPr algn="l" indent="0" marL="0">
-              <a:lnSpc>
-                <a:spcPts val="1820"/>
-              </a:lnSpc>
-              <a:spcBef>
-                <a:spcPts val="300"/>
-              </a:spcBef>
-              <a:spcAft>
-                <a:spcPts val="300"/>
-              </a:spcAft>
-              <a:buNone/>
-            </a:pPr>
-            <a:r>
-              <a:rPr lang="en-US" sz="1300" b="1" i="1" dirty="0">
-                <a:solidFill>
-                  <a:srgbClr val="1C2833"/>
-                </a:solidFill>
-                <a:latin typeface="Georgia" pitchFamily="34" charset="0"/>
-                <a:ea typeface="Georgia" pitchFamily="34" charset="-122"/>
-                <a:cs typeface="Georgia" pitchFamily="34" charset="-120"/>
-              </a:rPr>
-              <a:t>The walk has three rules:</a:t>
-            </a:r>
-            <a:pPr algn="l" indent="0" marL="0">
-              <a:lnSpc>
-                <a:spcPts val="1820"/>
-              </a:lnSpc>
-              <a:spcBef>
-                <a:spcPts val="300"/>
-              </a:spcBef>
-              <a:spcAft>
-                <a:spcPts val="300"/>
-              </a:spcAft>
-              <a:buNone/>
-            </a:pPr>
-            <a:r>
-              <a:rPr lang="en-US" sz="1300" dirty="0">
-                <a:solidFill>
-                  <a:srgbClr val="1C2833"/>
-                </a:solidFill>
-                <a:latin typeface="Georgia" pitchFamily="34" charset="0"/>
-                <a:ea typeface="Georgia" pitchFamily="34" charset="-122"/>
-                <a:cs typeface="Georgia" pitchFamily="34" charset="-120"/>
-              </a:rPr>
-              <a:t> 1. Stay with your partner. 2. Write down one specific observation — with time and place. 3. Draft one specific action you can actually do.</a:t>
-            </a:r>
-            <a:endParaRPr lang="en-US" sz="1300" dirty="0"/>
-          </a:p>
-        </p:txBody>
-      </p:sp>
-      <p:sp>
-        <p:nvSpPr>
-          <p:cNvPr id="7" name="Text 5"/>
-          <p:cNvSpPr/>
-          <p:nvPr/>
-        </p:nvSpPr>
-        <p:spPr>
-          <a:xfrm>
-            <a:off x="692051" y="1574155"/>
-            <a:ext cx="7973389" cy="461963"/>
-          </a:xfrm>
-          <a:prstGeom prst="rect">
-            <a:avLst/>
-          </a:prstGeom>
-          <a:noFill/>
-          <a:ln/>
-        </p:spPr>
-        <p:txBody>
-          <a:bodyPr wrap="square" lIns="0" tIns="0" rIns="0" bIns="0" rtlCol="0" anchor="t"/>
-          <a:lstStyle/>
-          <a:p>
-            <a:pPr algn="l" indent="0" marL="0">
-              <a:lnSpc>
-                <a:spcPts val="1820"/>
-              </a:lnSpc>
-              <a:spcBef>
-                <a:spcPts val="300"/>
-              </a:spcBef>
-              <a:spcAft>
-                <a:spcPts val="300"/>
-              </a:spcAft>
-              <a:buNone/>
-            </a:pPr>
-            <a:r>
-              <a:rPr lang="en-US" sz="1300" b="1" i="1" dirty="0">
-                <a:solidFill>
-                  <a:srgbClr val="1C2833"/>
-                </a:solidFill>
-                <a:latin typeface="Georgia" pitchFamily="34" charset="0"/>
-                <a:ea typeface="Georgia" pitchFamily="34" charset="-122"/>
-                <a:cs typeface="Georgia" pitchFamily="34" charset="-120"/>
-              </a:rPr>
-              <a:t>The action criteria:</a:t>
-            </a:r>
-            <a:pPr algn="l" indent="0" marL="0">
-              <a:lnSpc>
-                <a:spcPts val="1820"/>
-              </a:lnSpc>
-              <a:spcBef>
-                <a:spcPts val="300"/>
-              </a:spcBef>
-              <a:spcAft>
-                <a:spcPts val="300"/>
-              </a:spcAft>
-              <a:buNone/>
-            </a:pPr>
-            <a:r>
-              <a:rPr lang="en-US" sz="1300" dirty="0">
-                <a:solidFill>
-                  <a:srgbClr val="1C2833"/>
-                </a:solidFill>
-                <a:latin typeface="Georgia" pitchFamily="34" charset="0"/>
-                <a:ea typeface="Georgia" pitchFamily="34" charset="-122"/>
-                <a:cs typeface="Georgia" pitchFamily="34" charset="-120"/>
-              </a:rPr>
-              <a:t> - Specific (says exactly what you'll do). - Doable in 14 days. - Done by you, not "by someone."</a:t>
-            </a:r>
-            <a:endParaRPr lang="en-US" sz="1300" dirty="0"/>
-          </a:p>
-        </p:txBody>
-      </p:sp>
-      <p:sp>
-        <p:nvSpPr>
-          <p:cNvPr id="8" name="Text 6"/>
-          <p:cNvSpPr/>
-          <p:nvPr/>
-        </p:nvSpPr>
-        <p:spPr>
-          <a:xfrm>
-            <a:off x="692051" y="2074218"/>
-            <a:ext cx="7973389" cy="230981"/>
-          </a:xfrm>
-          <a:prstGeom prst="rect">
-            <a:avLst/>
-          </a:prstGeom>
-          <a:noFill/>
-          <a:ln/>
-        </p:spPr>
-        <p:txBody>
-          <a:bodyPr wrap="square" lIns="0" tIns="0" rIns="0" bIns="0" rtlCol="0" anchor="t"/>
-          <a:lstStyle/>
-          <a:p>
-            <a:pPr algn="l" indent="0" marL="0">
-              <a:lnSpc>
-                <a:spcPts val="1820"/>
-              </a:lnSpc>
-              <a:spcBef>
-                <a:spcPts val="300"/>
-              </a:spcBef>
-              <a:spcAft>
-                <a:spcPts val="300"/>
-              </a:spcAft>
-              <a:buNone/>
-            </a:pPr>
-            <a:r>
-              <a:rPr lang="en-US" sz="1300" dirty="0">
-                <a:solidFill>
-                  <a:srgbClr val="1C2833"/>
-                </a:solidFill>
-                <a:latin typeface="Georgia" pitchFamily="34" charset="0"/>
-                <a:ea typeface="Georgia" pitchFamily="34" charset="-122"/>
-                <a:cs typeface="Georgia" pitchFamily="34" charset="-120"/>
-              </a:rPr>
-              <a:t>The Indic principle anchors your </a:t>
-            </a:r>
-            <a:pPr algn="l" indent="0" marL="0">
-              <a:lnSpc>
-                <a:spcPts val="1820"/>
-              </a:lnSpc>
-              <a:spcBef>
-                <a:spcPts val="300"/>
-              </a:spcBef>
-              <a:spcAft>
-                <a:spcPts val="300"/>
-              </a:spcAft>
-              <a:buNone/>
-            </a:pPr>
-            <a:r>
-              <a:rPr lang="en-US" sz="1300" i="1" dirty="0">
-                <a:solidFill>
-                  <a:srgbClr val="1C2833"/>
-                </a:solidFill>
-                <a:latin typeface="Georgia" pitchFamily="34" charset="0"/>
-                <a:ea typeface="Georgia" pitchFamily="34" charset="-122"/>
-                <a:cs typeface="Georgia" pitchFamily="34" charset="-120"/>
-              </a:rPr>
-              <a:t>why</a:t>
-            </a:r>
-            <a:pPr algn="l" indent="0" marL="0">
-              <a:lnSpc>
-                <a:spcPts val="1820"/>
-              </a:lnSpc>
-              <a:spcBef>
-                <a:spcPts val="300"/>
-              </a:spcBef>
-              <a:spcAft>
-                <a:spcPts val="300"/>
-              </a:spcAft>
-              <a:buNone/>
-            </a:pPr>
-            <a:r>
-              <a:rPr lang="en-US" sz="1300" dirty="0">
-                <a:solidFill>
-                  <a:srgbClr val="1C2833"/>
-                </a:solidFill>
-                <a:latin typeface="Georgia" pitchFamily="34" charset="0"/>
-                <a:ea typeface="Georgia" pitchFamily="34" charset="-122"/>
-                <a:cs typeface="Georgia" pitchFamily="34" charset="-120"/>
-              </a:rPr>
-              <a:t>. The observation anchors your </a:t>
-            </a:r>
-            <a:pPr algn="l" indent="0" marL="0">
-              <a:lnSpc>
-                <a:spcPts val="1820"/>
-              </a:lnSpc>
-              <a:spcBef>
-                <a:spcPts val="300"/>
-              </a:spcBef>
-              <a:spcAft>
-                <a:spcPts val="300"/>
-              </a:spcAft>
-              <a:buNone/>
-            </a:pPr>
-            <a:r>
-              <a:rPr lang="en-US" sz="1300" i="1" dirty="0">
-                <a:solidFill>
-                  <a:srgbClr val="1C2833"/>
-                </a:solidFill>
-                <a:latin typeface="Georgia" pitchFamily="34" charset="0"/>
-                <a:ea typeface="Georgia" pitchFamily="34" charset="-122"/>
-                <a:cs typeface="Georgia" pitchFamily="34" charset="-120"/>
-              </a:rPr>
-              <a:t>what</a:t>
-            </a:r>
-            <a:pPr algn="l" indent="0" marL="0">
-              <a:lnSpc>
-                <a:spcPts val="1820"/>
-              </a:lnSpc>
-              <a:spcBef>
-                <a:spcPts val="300"/>
-              </a:spcBef>
-              <a:spcAft>
-                <a:spcPts val="300"/>
-              </a:spcAft>
-              <a:buNone/>
-            </a:pPr>
-            <a:r>
-              <a:rPr lang="en-US" sz="1300" dirty="0">
-                <a:solidFill>
-                  <a:srgbClr val="1C2833"/>
-                </a:solidFill>
-                <a:latin typeface="Georgia" pitchFamily="34" charset="0"/>
-                <a:ea typeface="Georgia" pitchFamily="34" charset="-122"/>
-                <a:cs typeface="Georgia" pitchFamily="34" charset="-120"/>
-              </a:rPr>
-              <a:t>. The action is the actual </a:t>
-            </a:r>
-            <a:pPr algn="l" indent="0" marL="0">
-              <a:lnSpc>
-                <a:spcPts val="1820"/>
-              </a:lnSpc>
-              <a:spcBef>
-                <a:spcPts val="300"/>
-              </a:spcBef>
-              <a:spcAft>
-                <a:spcPts val="300"/>
-              </a:spcAft>
-              <a:buNone/>
-            </a:pPr>
-            <a:r>
-              <a:rPr lang="en-US" sz="1300" i="1" dirty="0">
-                <a:solidFill>
-                  <a:srgbClr val="1C2833"/>
-                </a:solidFill>
-                <a:latin typeface="Georgia" pitchFamily="34" charset="0"/>
-                <a:ea typeface="Georgia" pitchFamily="34" charset="-122"/>
-                <a:cs typeface="Georgia" pitchFamily="34" charset="-120"/>
-              </a:rPr>
-              <a:t>yajña</a:t>
-            </a:r>
-            <a:pPr algn="l" indent="0" marL="0">
-              <a:lnSpc>
-                <a:spcPts val="1820"/>
-              </a:lnSpc>
-              <a:spcBef>
-                <a:spcPts val="300"/>
-              </a:spcBef>
-              <a:spcAft>
-                <a:spcPts val="300"/>
-              </a:spcAft>
-              <a:buNone/>
-            </a:pPr>
-            <a:r>
-              <a:rPr lang="en-US" sz="1300" dirty="0">
-                <a:solidFill>
-                  <a:srgbClr val="1C2833"/>
-                </a:solidFill>
-                <a:latin typeface="Georgia" pitchFamily="34" charset="0"/>
-                <a:ea typeface="Georgia" pitchFamily="34" charset="-122"/>
-                <a:cs typeface="Georgia" pitchFamily="34" charset="-120"/>
-              </a:rPr>
-              <a:t>.</a:t>
-            </a:r>
-            <a:endParaRPr lang="en-US" sz="1300" dirty="0"/>
-          </a:p>
-        </p:txBody>
-      </p:sp>
-      <p:sp>
-        <p:nvSpPr>
-          <p:cNvPr id="9" name="Text 7"/>
           <p:cNvSpPr/>
           <p:nvPr/>
         </p:nvSpPr>
@@ -4230,7 +8266,7 @@
                 <a:ea typeface="Georgia" pitchFamily="34" charset="-122"/>
                 <a:cs typeface="Georgia" pitchFamily="34" charset="-120"/>
               </a:rPr>
-              <a:t>Homework</a:t>
+              <a:t>Pre-walk briefing (10 min — in class) (cont.)</a:t>
             </a:r>
             <a:endParaRPr lang="en-US" sz="1800" dirty="0"/>
           </a:p>
@@ -4244,8 +8280,8 @@
         </p:nvSpPr>
         <p:spPr>
           <a:xfrm>
-            <a:off x="406301" y="870942"/>
-            <a:ext cx="8498026" cy="426541"/>
+            <a:off x="634901" y="883593"/>
+            <a:ext cx="8102798" cy="281880"/>
           </a:xfrm>
           <a:prstGeom prst="rect">
             <a:avLst/>
@@ -4257,6 +8293,162 @@
           <a:bodyPr wrap="square" lIns="0" tIns="0" rIns="0" bIns="0" rtlCol="0" anchor="t"/>
           <a:lstStyle/>
           <a:p>
+            <a:pPr algn="l" marL="342900" indent="-342900">
+              <a:lnSpc>
+                <a:spcPts val="1620"/>
+              </a:lnSpc>
+              <a:spcAft>
+                <a:spcPts val="300"/>
+              </a:spcAft>
+              <a:buSzPct val="100000"/>
+              <a:buChar char="•"/>
+            </a:pPr>
+            <a:r>
+              <a:rPr lang="en-US" sz="1200" b="1" dirty="0">
+                <a:solidFill>
+                  <a:srgbClr val="1C2833"/>
+                </a:solidFill>
+                <a:latin typeface="Arial" pitchFamily="34" charset="0"/>
+                <a:ea typeface="Arial" pitchFamily="34" charset="-122"/>
+                <a:cs typeface="Arial" pitchFamily="34" charset="-120"/>
+              </a:rPr>
+              <a:t>What "observation" means here.</a:t>
+            </a:r>
+            <a:endParaRPr lang="en-US" sz="1200" dirty="0"/>
+          </a:p>
+        </p:txBody>
+      </p:sp>
+      <p:sp>
+        <p:nvSpPr>
+          <p:cNvPr id="5" name="Text 3"/>
+          <p:cNvSpPr/>
+          <p:nvPr/>
+        </p:nvSpPr>
+        <p:spPr>
+          <a:xfrm>
+            <a:off x="634901" y="1266974"/>
+            <a:ext cx="8102798" cy="731341"/>
+          </a:xfrm>
+          <a:prstGeom prst="rect">
+            <a:avLst/>
+          </a:prstGeom>
+          <a:noFill/>
+          <a:ln/>
+        </p:spPr>
+        <p:txBody>
+          <a:bodyPr wrap="square" lIns="0" tIns="0" rIns="0" bIns="0" rtlCol="0" anchor="t"/>
+          <a:lstStyle/>
+          <a:p>
+            <a:pPr algn="l" marL="342900" indent="-342900">
+              <a:lnSpc>
+                <a:spcPts val="1620"/>
+              </a:lnSpc>
+              <a:spcAft>
+                <a:spcPts val="300"/>
+              </a:spcAft>
+              <a:buSzPct val="100000"/>
+              <a:buChar char="•"/>
+            </a:pPr>
+            <a:r>
+              <a:rPr lang="en-US" sz="1200" dirty="0">
+                <a:solidFill>
+                  <a:srgbClr val="1C2833"/>
+                </a:solidFill>
+                <a:latin typeface="Arial" pitchFamily="34" charset="0"/>
+                <a:ea typeface="Arial" pitchFamily="34" charset="-122"/>
+                <a:cs typeface="Arial" pitchFamily="34" charset="-120"/>
+              </a:rPr>
+              <a:t>❌ Bad: </a:t>
+            </a:r>
+            <a:pPr algn="l" indent="0" marL="0">
+              <a:lnSpc>
+                <a:spcPts val="1620"/>
+              </a:lnSpc>
+              <a:spcAft>
+                <a:spcPts val="300"/>
+              </a:spcAft>
+              <a:buNone/>
+            </a:pPr>
+            <a:r>
+              <a:rPr lang="en-US" sz="1200" i="1" dirty="0">
+                <a:solidFill>
+                  <a:srgbClr val="1C2833"/>
+                </a:solidFill>
+                <a:latin typeface="Arial" pitchFamily="34" charset="0"/>
+                <a:ea typeface="Arial" pitchFamily="34" charset="-122"/>
+                <a:cs typeface="Arial" pitchFamily="34" charset="-120"/>
+              </a:rPr>
+              <a:t>"There is pollution."</a:t>
+            </a:r>
+            <a:endParaRPr lang="en-US" sz="1200" dirty="0"/>
+          </a:p>
+          <a:p>
+            <a:pPr algn="l" marL="342900" indent="-342900">
+              <a:lnSpc>
+                <a:spcPts val="1620"/>
+              </a:lnSpc>
+              <a:spcAft>
+                <a:spcPts val="300"/>
+              </a:spcAft>
+              <a:buSzPct val="100000"/>
+              <a:buChar char="•"/>
+            </a:pPr>
+            <a:r>
+              <a:rPr lang="en-US" sz="1200" dirty="0">
+                <a:solidFill>
+                  <a:srgbClr val="1C2833"/>
+                </a:solidFill>
+                <a:latin typeface="Arial" pitchFamily="34" charset="0"/>
+                <a:ea typeface="Arial" pitchFamily="34" charset="-122"/>
+                <a:cs typeface="Arial" pitchFamily="34" charset="-120"/>
+              </a:rPr>
+              <a:t>✅ Good: </a:t>
+            </a:r>
+            <a:pPr algn="l" indent="0" marL="0">
+              <a:lnSpc>
+                <a:spcPts val="1620"/>
+              </a:lnSpc>
+              <a:spcAft>
+                <a:spcPts val="300"/>
+              </a:spcAft>
+              <a:buNone/>
+            </a:pPr>
+            <a:r>
+              <a:rPr lang="en-US" sz="1200" i="1" dirty="0">
+                <a:solidFill>
+                  <a:srgbClr val="1C2833"/>
+                </a:solidFill>
+                <a:latin typeface="Arial" pitchFamily="34" charset="0"/>
+                <a:ea typeface="Arial" pitchFamily="34" charset="-122"/>
+                <a:cs typeface="Arial" pitchFamily="34" charset="-120"/>
+              </a:rPr>
+              <a:t>"At the south gate, between 8:00 and 8:15, twelve cars idled with engines running. The exhaust collected in the corner where the watchman sits."</a:t>
+            </a:r>
+            <a:endParaRPr lang="en-US" sz="1200" dirty="0"/>
+          </a:p>
+        </p:txBody>
+      </p:sp>
+      <p:sp>
+        <p:nvSpPr>
+          <p:cNvPr id="6" name="Text 4"/>
+          <p:cNvSpPr/>
+          <p:nvPr/>
+        </p:nvSpPr>
+        <p:spPr>
+          <a:xfrm>
+            <a:off x="406301" y="2087166"/>
+            <a:ext cx="8498026" cy="213271"/>
+          </a:xfrm>
+          <a:prstGeom prst="rect">
+            <a:avLst/>
+          </a:prstGeom>
+          <a:noFill/>
+          <a:ln/>
+        </p:spPr>
+        <p:txBody>
+          <a:bodyPr wrap="square" lIns="0" tIns="0" rIns="0" bIns="0" rtlCol="0" anchor="t"/>
+          <a:lstStyle/>
+          <a:p>
             <a:pPr algn="l" indent="0" marL="0">
               <a:lnSpc>
                 <a:spcPts val="1680"/>
@@ -4278,7 +8470,7 @@
                 <a:ea typeface="Arial" pitchFamily="34" charset="-122"/>
                 <a:cs typeface="Arial" pitchFamily="34" charset="-120"/>
               </a:rPr>
-              <a:t>– Finalise your pitch:   – 3 minutes max.   – Both partners speak.   – Open with the principle. Show the observation. End with the action. – Bring your artefact (poster / audio file on a device / printed plan).</a:t>
+              <a:t>Specificity makes the action possible.</a:t>
             </a:r>
             <a:endParaRPr lang="en-US" sz="1200" dirty="0"/>
           </a:p>
@@ -4286,7 +8478,7 @@
       </p:sp>
       <p:sp>
         <p:nvSpPr>
-          <p:cNvPr id="5" name="Text 3"/>
+          <p:cNvPr id="7" name="Text 5"/>
           <p:cNvSpPr/>
           <p:nvPr/>
         </p:nvSpPr>
@@ -4436,7 +8628,7 @@
                 <a:ea typeface="Georgia" pitchFamily="34" charset="-122"/>
                 <a:cs typeface="Georgia" pitchFamily="34" charset="-120"/>
               </a:rPr>
-              <a:t>Differentiation</a:t>
+              <a:t>The walk (15 min)</a:t>
             </a:r>
             <a:endParaRPr lang="en-US" sz="1800" dirty="0"/>
           </a:p>
@@ -4451,7 +8643,7 @@
         <p:spPr>
           <a:xfrm>
             <a:off x="634901" y="883593"/>
-            <a:ext cx="8102798" cy="937022"/>
+            <a:ext cx="8102798" cy="769441"/>
           </a:xfrm>
           <a:prstGeom prst="rect">
             <a:avLst/>
@@ -4474,26 +8666,6 @@
               <a:buChar char="•"/>
             </a:pPr>
             <a:r>
-              <a:rPr lang="en-US" sz="1200" b="1" dirty="0">
-                <a:solidFill>
-                  <a:srgbClr val="1C2833"/>
-                </a:solidFill>
-                <a:latin typeface="Arial" pitchFamily="34" charset="0"/>
-                <a:ea typeface="Arial" pitchFamily="34" charset="-122"/>
-                <a:cs typeface="Arial" pitchFamily="34" charset="-120"/>
-              </a:rPr>
-              <a:t>One tier up:</a:t>
-            </a:r>
-            <a:pPr algn="l" indent="0" marL="0">
-              <a:lnSpc>
-                <a:spcPts val="1620"/>
-              </a:lnSpc>
-              <a:spcAft>
-                <a:spcPts val="300"/>
-              </a:spcAft>
-              <a:buNone/>
-            </a:pPr>
-            <a:r>
               <a:rPr lang="en-US" sz="1200" dirty="0">
                 <a:solidFill>
                   <a:srgbClr val="1C2833"/>
@@ -4502,47 +8674,7 @@
                 <a:ea typeface="Arial" pitchFamily="34" charset="-122"/>
                 <a:cs typeface="Arial" pitchFamily="34" charset="-120"/>
               </a:rPr>
-              <a:t> Add a "measurement" to your action — how will you know whether it worked? (E.g. </a:t>
-            </a:r>
-            <a:pPr algn="l" indent="0" marL="0">
-              <a:lnSpc>
-                <a:spcPts val="1620"/>
-              </a:lnSpc>
-              <a:spcAft>
-                <a:spcPts val="300"/>
-              </a:spcAft>
-              <a:buNone/>
-            </a:pPr>
-            <a:r>
-              <a:rPr lang="en-US" sz="1200" i="1" dirty="0">
-                <a:solidFill>
-                  <a:srgbClr val="1C2833"/>
-                </a:solidFill>
-                <a:latin typeface="Arial" pitchFamily="34" charset="0"/>
-                <a:ea typeface="Arial" pitchFamily="34" charset="-122"/>
-                <a:cs typeface="Arial" pitchFamily="34" charset="-120"/>
-              </a:rPr>
-              <a:t>"By Day 14, 5 fewer cars idling at pick-up."</a:t>
-            </a:r>
-            <a:pPr algn="l" indent="0" marL="0">
-              <a:lnSpc>
-                <a:spcPts val="1620"/>
-              </a:lnSpc>
-              <a:spcAft>
-                <a:spcPts val="300"/>
-              </a:spcAft>
-              <a:buNone/>
-            </a:pPr>
-            <a:r>
-              <a:rPr lang="en-US" sz="1200" dirty="0">
-                <a:solidFill>
-                  <a:srgbClr val="1C2833"/>
-                </a:solidFill>
-                <a:latin typeface="Arial" pitchFamily="34" charset="0"/>
-                <a:ea typeface="Arial" pitchFamily="34" charset="-122"/>
-                <a:cs typeface="Arial" pitchFamily="34" charset="-120"/>
-              </a:rPr>
-              <a:t>) Measured actions are stronger.</a:t>
+              <a:t>Pairs leave together with their sheet.</a:t>
             </a:r>
             <a:endParaRPr lang="en-US" sz="1200" dirty="0"/>
           </a:p>
@@ -4558,24 +8690,28 @@
               <a:buChar char="•"/>
             </a:pPr>
             <a:r>
-              <a:rPr lang="en-US" sz="1200" b="1" dirty="0">
-                <a:solidFill>
-                  <a:srgbClr val="1C2833"/>
-                </a:solidFill>
-                <a:latin typeface="Arial" pitchFamily="34" charset="0"/>
-                <a:ea typeface="Arial" pitchFamily="34" charset="-122"/>
-                <a:cs typeface="Arial" pitchFamily="34" charset="-120"/>
-              </a:rPr>
-              <a:t>One tier down:</a:t>
-            </a:r>
-            <a:pPr algn="l" indent="0" marL="0">
+              <a:rPr lang="en-US" sz="1200" dirty="0">
+                <a:solidFill>
+                  <a:srgbClr val="1C2833"/>
+                </a:solidFill>
+                <a:latin typeface="Arial" pitchFamily="34" charset="0"/>
+                <a:ea typeface="Arial" pitchFamily="34" charset="-122"/>
+                <a:cs typeface="Arial" pitchFamily="34" charset="-120"/>
+              </a:rPr>
+              <a:t>Teacher walks a perimeter to monitor; no specific guidance during the walk.</a:t>
+            </a:r>
+            <a:endParaRPr lang="en-US" sz="1200" dirty="0"/>
+          </a:p>
+          <a:p>
+            <a:pPr algn="l" marL="342900" indent="-342900">
               <a:lnSpc>
                 <a:spcPts val="1620"/>
               </a:lnSpc>
               <a:spcAft>
                 <a:spcPts val="300"/>
               </a:spcAft>
-              <a:buNone/>
+              <a:buSzPct val="100000"/>
+              <a:buChar char="•"/>
             </a:pPr>
             <a:r>
               <a:rPr lang="en-US" sz="1200" dirty="0">
@@ -4586,7 +8722,7 @@
                 <a:ea typeface="Arial" pitchFamily="34" charset="-122"/>
                 <a:cs typeface="Arial" pitchFamily="34" charset="-120"/>
               </a:rPr>
-              <a:t> Stick to one observation and one action. Skip the measurement. The principle + observation + action is enough.</a:t>
+              <a:t>Pairs come back to the classroom at 25 min mark.</a:t>
             </a:r>
             <a:endParaRPr lang="en-US" sz="1200" dirty="0"/>
           </a:p>
